--- a/docs/slides/opendb-harness-知识库一页.pptx
+++ b/docs/slides/opendb-harness-知识库一页.pptx
@@ -3096,7 +3096,7 @@
         </p:nvSpPr>
         <p:spPr>
           <a:xfrm>
-            <a:off x="457200" y="237744"/>
+            <a:off x="457200" y="256032"/>
             <a:ext cx="11247120" cy="457200"/>
           </a:xfrm>
           <a:prstGeom prst="rect">
@@ -3122,7 +3122,7 @@
                 </a:solidFill>
                 <a:latin typeface="PingFang SC"/>
               </a:rPr>
-              <a:t>客户知识库：从"存着"到"真懂"</a:t>
+              <a:t>客户知识库：让平台"懂工行"</a:t>
             </a:r>
             <a:r>
               <a:rPr sz="1400" b="0">
@@ -3131,7 +3131,7 @@
                 </a:solidFill>
                 <a:latin typeface="PingFang SC"/>
               </a:rPr>
-              <a:t>   把客户既有文本自动构建成可被平台使用的知识资产</a:t>
+              <a:t>   把多年 GaussDB 实战沉淀，变成平台的判断力</a:t>
             </a:r>
           </a:p>
         </p:txBody>
@@ -3144,7 +3144,7 @@
         </p:nvSpPr>
         <p:spPr>
           <a:xfrm>
-            <a:off x="457200" y="694944"/>
+            <a:off x="457200" y="731520"/>
             <a:ext cx="11247120" cy="274320"/>
           </a:xfrm>
           <a:prstGeom prst="rect">
@@ -3164,13 +3164,13 @@
               </a:lnSpc>
             </a:pPr>
             <a:r>
-              <a:rPr sz="1100" b="0">
+              <a:rPr sz="1200" b="0">
                 <a:solidFill>
                   <a:srgbClr val="4176E6"/>
                 </a:solidFill>
                 <a:latin typeface="PingFang SC"/>
               </a:rPr>
-              <a:t>几十篇使用规范 + 上千条问题处理工单 + 上百份故障分析总结 → 结构化 → 三类存储各司其职 → 每一条诊断结论旁都能说出"贵司规范怎么说、上次怎么处理"</a:t>
+              <a:t>规范 · 工单 · 故障总结  →  自动结构化  →  三类存储各司其职  →  每条结论都按工行口径给方案</a:t>
             </a:r>
           </a:p>
         </p:txBody>
@@ -3183,8 +3183,8 @@
         </p:nvSpPr>
         <p:spPr>
           <a:xfrm>
-            <a:off x="457200" y="1078992"/>
-            <a:ext cx="2410968" cy="566928"/>
+            <a:off x="457200" y="1188720"/>
+            <a:ext cx="2212848" cy="402336"/>
           </a:xfrm>
           <a:prstGeom prst="roundRect">
             <a:avLst>
@@ -3229,8 +3229,8 @@
         </p:nvSpPr>
         <p:spPr>
           <a:xfrm>
-            <a:off x="530352" y="1115568"/>
-            <a:ext cx="2264664" cy="274320"/>
+            <a:off x="530352" y="1225296"/>
+            <a:ext cx="2066543" cy="274320"/>
           </a:xfrm>
           <a:prstGeom prst="rect">
             <a:avLst/>
@@ -3258,7 +3258,7 @@
               <a:t>使用规范</a:t>
             </a:r>
             <a:r>
-              <a:rPr sz="850" b="1">
+              <a:rPr sz="900" b="1">
                 <a:solidFill>
                   <a:srgbClr val="C9CED6"/>
                 </a:solidFill>
@@ -3271,53 +3271,14 @@
       </p:sp>
       <p:sp>
         <p:nvSpPr>
-          <p:cNvPr id="6" name="TextBox 5"/>
-          <p:cNvSpPr txBox="1"/>
-          <p:nvPr/>
-        </p:nvSpPr>
-        <p:spPr>
-          <a:xfrm>
-            <a:off x="530352" y="1371600"/>
-            <a:ext cx="2264664" cy="237744"/>
-          </a:xfrm>
-          <a:prstGeom prst="rect">
-            <a:avLst/>
-          </a:prstGeom>
-          <a:noFill/>
-        </p:spPr>
-        <p:txBody>
-          <a:bodyPr wrap="square" lIns="36576" rIns="36576" tIns="18288" bIns="18288" anchor="t">
-            <a:spAutoFit/>
-          </a:bodyPr>
-          <a:lstStyle/>
-          <a:p>
-            <a:pPr algn="l">
-              <a:lnSpc>
-                <a:spcPct val="112000"/>
-              </a:lnSpc>
-            </a:pPr>
-            <a:r>
-              <a:rPr sz="840" b="0">
-                <a:solidFill>
-                  <a:srgbClr val="61666B"/>
-                </a:solidFill>
-                <a:latin typeface="PingFang SC"/>
-              </a:rPr>
-              <a:t>· 运维/变更/安全规范、准入标准</a:t>
-            </a:r>
-          </a:p>
-        </p:txBody>
-      </p:sp>
-      <p:sp>
-        <p:nvSpPr>
-          <p:cNvPr id="7" name="Rounded Rectangle 6"/>
+          <p:cNvPr id="6" name="Rounded Rectangle 5"/>
           <p:cNvSpPr/>
           <p:nvPr/>
         </p:nvSpPr>
         <p:spPr>
           <a:xfrm>
-            <a:off x="2977896" y="1078992"/>
-            <a:ext cx="2410968" cy="566928"/>
+            <a:off x="2779776" y="1188720"/>
+            <a:ext cx="2212848" cy="402336"/>
           </a:xfrm>
           <a:prstGeom prst="roundRect">
             <a:avLst>
@@ -3356,14 +3317,14 @@
       </p:sp>
       <p:sp>
         <p:nvSpPr>
-          <p:cNvPr id="8" name="TextBox 7"/>
+          <p:cNvPr id="7" name="TextBox 6"/>
           <p:cNvSpPr txBox="1"/>
           <p:nvPr/>
         </p:nvSpPr>
         <p:spPr>
           <a:xfrm>
-            <a:off x="3051048" y="1115568"/>
-            <a:ext cx="2264664" cy="274320"/>
+            <a:off x="2852928" y="1225296"/>
+            <a:ext cx="2066543" cy="274320"/>
           </a:xfrm>
           <a:prstGeom prst="rect">
             <a:avLst/>
@@ -3388,10 +3349,10 @@
                 </a:solidFill>
                 <a:latin typeface="PingFang SC"/>
               </a:rPr>
-              <a:t>问题处理工单</a:t>
-            </a:r>
-            <a:r>
-              <a:rPr sz="850" b="1">
+              <a:t>处理工单</a:t>
+            </a:r>
+            <a:r>
+              <a:rPr sz="900" b="1">
                 <a:solidFill>
                   <a:srgbClr val="C9CED6"/>
                 </a:solidFill>
@@ -3404,53 +3365,14 @@
       </p:sp>
       <p:sp>
         <p:nvSpPr>
-          <p:cNvPr id="9" name="TextBox 8"/>
-          <p:cNvSpPr txBox="1"/>
-          <p:nvPr/>
-        </p:nvSpPr>
-        <p:spPr>
-          <a:xfrm>
-            <a:off x="3051048" y="1371600"/>
-            <a:ext cx="2264664" cy="237744"/>
-          </a:xfrm>
-          <a:prstGeom prst="rect">
-            <a:avLst/>
-          </a:prstGeom>
-          <a:noFill/>
-        </p:spPr>
-        <p:txBody>
-          <a:bodyPr wrap="square" lIns="36576" rIns="36576" tIns="18288" bIns="18288" anchor="t">
-            <a:spAutoFit/>
-          </a:bodyPr>
-          <a:lstStyle/>
-          <a:p>
-            <a:pPr algn="l">
-              <a:lnSpc>
-                <a:spcPct val="112000"/>
-              </a:lnSpc>
-            </a:pPr>
-            <a:r>
-              <a:rPr sz="840" b="0">
-                <a:solidFill>
-                  <a:srgbClr val="61666B"/>
-                </a:solidFill>
-                <a:latin typeface="PingFang SC"/>
-              </a:rPr>
-              <a:t>· 现象、处置动作、验证与耗时</a:t>
-            </a:r>
-          </a:p>
-        </p:txBody>
-      </p:sp>
-      <p:sp>
-        <p:nvSpPr>
-          <p:cNvPr id="10" name="Rounded Rectangle 9"/>
+          <p:cNvPr id="8" name="Rounded Rectangle 7"/>
           <p:cNvSpPr/>
           <p:nvPr/>
         </p:nvSpPr>
         <p:spPr>
           <a:xfrm>
-            <a:off x="5498592" y="1078992"/>
-            <a:ext cx="2410968" cy="566928"/>
+            <a:off x="5102352" y="1188720"/>
+            <a:ext cx="2212848" cy="402336"/>
           </a:xfrm>
           <a:prstGeom prst="roundRect">
             <a:avLst>
@@ -3489,14 +3411,14 @@
       </p:sp>
       <p:sp>
         <p:nvSpPr>
-          <p:cNvPr id="11" name="TextBox 10"/>
+          <p:cNvPr id="9" name="TextBox 8"/>
           <p:cNvSpPr txBox="1"/>
           <p:nvPr/>
         </p:nvSpPr>
         <p:spPr>
           <a:xfrm>
-            <a:off x="5571744" y="1115568"/>
-            <a:ext cx="2264664" cy="274320"/>
+            <a:off x="5175504" y="1225296"/>
+            <a:ext cx="2066543" cy="274320"/>
           </a:xfrm>
           <a:prstGeom prst="rect">
             <a:avLst/>
@@ -3521,10 +3443,10 @@
                 </a:solidFill>
                 <a:latin typeface="PingFang SC"/>
               </a:rPr>
-              <a:t>故障分析总结</a:t>
-            </a:r>
-            <a:r>
-              <a:rPr sz="850" b="1">
+              <a:t>故障总结</a:t>
+            </a:r>
+            <a:r>
+              <a:rPr sz="900" b="1">
                 <a:solidFill>
                   <a:srgbClr val="C9CED6"/>
                 </a:solidFill>
@@ -3537,14 +3459,14 @@
       </p:sp>
       <p:sp>
         <p:nvSpPr>
-          <p:cNvPr id="12" name="TextBox 11"/>
+          <p:cNvPr id="10" name="TextBox 9"/>
           <p:cNvSpPr txBox="1"/>
           <p:nvPr/>
         </p:nvSpPr>
         <p:spPr>
           <a:xfrm>
-            <a:off x="5571744" y="1371600"/>
-            <a:ext cx="2264664" cy="237744"/>
+            <a:off x="457200" y="1042415"/>
+            <a:ext cx="3657600" cy="146304"/>
           </a:xfrm>
           <a:prstGeom prst="rect">
             <a:avLst/>
@@ -3552,46 +3474,7 @@
           <a:noFill/>
         </p:spPr>
         <p:txBody>
-          <a:bodyPr wrap="square" lIns="36576" rIns="36576" tIns="18288" bIns="18288" anchor="t">
-            <a:spAutoFit/>
-          </a:bodyPr>
-          <a:lstStyle/>
-          <a:p>
-            <a:pPr algn="l">
-              <a:lnSpc>
-                <a:spcPct val="112000"/>
-              </a:lnSpc>
-            </a:pPr>
-            <a:r>
-              <a:rPr sz="840" b="0">
-                <a:solidFill>
-                  <a:srgbClr val="61666B"/>
-                </a:solidFill>
-                <a:latin typeface="PingFang SC"/>
-              </a:rPr>
-              <a:t>· 根因、影响面、复发防范</a:t>
-            </a:r>
-          </a:p>
-        </p:txBody>
-      </p:sp>
-      <p:sp>
-        <p:nvSpPr>
-          <p:cNvPr id="13" name="TextBox 12"/>
-          <p:cNvSpPr txBox="1"/>
-          <p:nvPr/>
-        </p:nvSpPr>
-        <p:spPr>
-          <a:xfrm>
-            <a:off x="457200" y="932688"/>
-            <a:ext cx="7452360" cy="146304"/>
-          </a:xfrm>
-          <a:prstGeom prst="rect">
-            <a:avLst/>
-          </a:prstGeom>
-          <a:noFill/>
-        </p:spPr>
-        <p:txBody>
-          <a:bodyPr wrap="square" lIns="36576" rIns="36576" tIns="18288" bIns="18288" anchor="t">
+          <a:bodyPr wrap="square" lIns="36576" rIns="36576" tIns="0" bIns="0" anchor="ctr">
             <a:spAutoFit/>
           </a:bodyPr>
           <a:lstStyle/>
@@ -3602,27 +3485,1011 @@
               </a:lnSpc>
             </a:pPr>
             <a:r>
-              <a:rPr sz="850" b="0">
+              <a:rPr sz="800" b="0">
                 <a:solidFill>
                   <a:srgbClr val="81858C"/>
                 </a:solidFill>
                 <a:latin typeface="PingFang SC"/>
               </a:rPr>
-              <a:t>① 客户既有资料（多来源、多格式、无统一结构）</a:t>
-            </a:r>
-          </a:p>
-        </p:txBody>
-      </p:sp>
-      <p:sp>
-        <p:nvSpPr>
-          <p:cNvPr id="14" name="Rounded Rectangle 13"/>
+              <a:t>① 工行既有资料 · 多来源 · 无统一结构</a:t>
+            </a:r>
+          </a:p>
+        </p:txBody>
+      </p:sp>
+      <p:sp>
+        <p:nvSpPr>
+          <p:cNvPr id="11" name="Rounded Rectangle 10"/>
           <p:cNvSpPr/>
           <p:nvPr/>
         </p:nvSpPr>
         <p:spPr>
           <a:xfrm>
-            <a:off x="457200" y="1847088"/>
-            <a:ext cx="7452360" cy="548640"/>
+            <a:off x="457200" y="1792224"/>
+            <a:ext cx="6858000" cy="914400"/>
+          </a:xfrm>
+          <a:prstGeom prst="roundRect">
+            <a:avLst>
+              <a:gd name="adj" fmla="val 8000"/>
+            </a:avLst>
+          </a:prstGeom>
+          <a:solidFill>
+            <a:srgbClr val="E8F5EC"/>
+          </a:solidFill>
+          <a:ln w="15875">
+            <a:solidFill>
+              <a:srgbClr val="3FA552"/>
+            </a:solidFill>
+          </a:ln>
+          <a:effectLst/>
+        </p:spPr>
+        <p:style>
+          <a:lnRef idx="1">
+            <a:schemeClr val="accent1"/>
+          </a:lnRef>
+          <a:fillRef idx="3">
+            <a:schemeClr val="accent1"/>
+          </a:fillRef>
+          <a:effectRef idx="2">
+            <a:schemeClr val="accent1"/>
+          </a:effectRef>
+          <a:fontRef idx="minor">
+            <a:schemeClr val="lt1"/>
+          </a:fontRef>
+        </p:style>
+        <p:txBody>
+          <a:bodyPr rtlCol="0" anchor="ctr"/>
+          <a:lstStyle/>
+          <a:p/>
+        </p:txBody>
+      </p:sp>
+      <p:sp>
+        <p:nvSpPr>
+          <p:cNvPr id="12" name="TextBox 11"/>
+          <p:cNvSpPr txBox="1"/>
+          <p:nvPr/>
+        </p:nvSpPr>
+        <p:spPr>
+          <a:xfrm>
+            <a:off x="530352" y="1828800"/>
+            <a:ext cx="6711696" cy="274320"/>
+          </a:xfrm>
+          <a:prstGeom prst="rect">
+            <a:avLst/>
+          </a:prstGeom>
+          <a:noFill/>
+        </p:spPr>
+        <p:txBody>
+          <a:bodyPr wrap="square" lIns="36576" rIns="36576" tIns="18288" bIns="18288" anchor="t">
+            <a:spAutoFit/>
+          </a:bodyPr>
+          <a:lstStyle/>
+          <a:p>
+            <a:pPr algn="l">
+              <a:lnSpc>
+                <a:spcPct val="115000"/>
+              </a:lnSpc>
+            </a:pPr>
+            <a:r>
+              <a:rPr sz="1200" b="1">
+                <a:solidFill>
+                  <a:srgbClr val="0F1115"/>
+                </a:solidFill>
+                <a:latin typeface="PingFang SC"/>
+              </a:rPr>
+              <a:t>② 自动加工成"可判定"的知识</a:t>
+            </a:r>
+            <a:r>
+              <a:rPr sz="900" b="1">
+                <a:solidFill>
+                  <a:srgbClr val="3FA552"/>
+                </a:solidFill>
+                <a:latin typeface="PingFang SC"/>
+              </a:rPr>
+              <a:t>  模型抽取 + 人工确认后方可引用</a:t>
+            </a:r>
+          </a:p>
+        </p:txBody>
+      </p:sp>
+      <p:sp>
+        <p:nvSpPr>
+          <p:cNvPr id="13" name="TextBox 12"/>
+          <p:cNvSpPr txBox="1"/>
+          <p:nvPr/>
+        </p:nvSpPr>
+        <p:spPr>
+          <a:xfrm>
+            <a:off x="548640" y="2048256"/>
+            <a:ext cx="2194560" cy="402336"/>
+          </a:xfrm>
+          <a:prstGeom prst="rect">
+            <a:avLst/>
+          </a:prstGeom>
+          <a:noFill/>
+        </p:spPr>
+        <p:txBody>
+          <a:bodyPr wrap="square" lIns="36576" rIns="36576" tIns="18288" bIns="18288" anchor="t">
+            <a:spAutoFit/>
+          </a:bodyPr>
+          <a:lstStyle/>
+          <a:p>
+            <a:pPr algn="l">
+              <a:lnSpc>
+                <a:spcPct val="110000"/>
+              </a:lnSpc>
+            </a:pPr>
+            <a:r>
+              <a:rPr sz="950" b="1">
+                <a:solidFill>
+                  <a:srgbClr val="0F1115"/>
+                </a:solidFill>
+                <a:latin typeface="PingFang SC"/>
+              </a:rPr>
+              <a:t>规范 → 条款卡</a:t>
+            </a:r>
+          </a:p>
+          <a:p>
+            <a:pPr algn="l">
+              <a:lnSpc>
+                <a:spcPct val="110000"/>
+              </a:lnSpc>
+            </a:pPr>
+            <a:r>
+              <a:rPr sz="860" b="0">
+                <a:solidFill>
+                  <a:srgbClr val="61666B"/>
+                </a:solidFill>
+                <a:latin typeface="PingFang SC"/>
+              </a:rPr>
+              <a:t>约束对象 · 要求值 · 强制/建议</a:t>
+            </a:r>
+          </a:p>
+        </p:txBody>
+      </p:sp>
+      <p:sp>
+        <p:nvSpPr>
+          <p:cNvPr id="14" name="TextBox 13"/>
+          <p:cNvSpPr txBox="1"/>
+          <p:nvPr/>
+        </p:nvSpPr>
+        <p:spPr>
+          <a:xfrm>
+            <a:off x="2788920" y="2048256"/>
+            <a:ext cx="2194560" cy="402336"/>
+          </a:xfrm>
+          <a:prstGeom prst="rect">
+            <a:avLst/>
+          </a:prstGeom>
+          <a:noFill/>
+        </p:spPr>
+        <p:txBody>
+          <a:bodyPr wrap="square" lIns="36576" rIns="36576" tIns="18288" bIns="18288" anchor="t">
+            <a:spAutoFit/>
+          </a:bodyPr>
+          <a:lstStyle/>
+          <a:p>
+            <a:pPr algn="l">
+              <a:lnSpc>
+                <a:spcPct val="110000"/>
+              </a:lnSpc>
+            </a:pPr>
+            <a:r>
+              <a:rPr sz="950" b="1">
+                <a:solidFill>
+                  <a:srgbClr val="0F1115"/>
+                </a:solidFill>
+                <a:latin typeface="PingFang SC"/>
+              </a:rPr>
+              <a:t>工单 → 处置卡</a:t>
+            </a:r>
+          </a:p>
+          <a:p>
+            <a:pPr algn="l">
+              <a:lnSpc>
+                <a:spcPct val="110000"/>
+              </a:lnSpc>
+            </a:pPr>
+            <a:r>
+              <a:rPr sz="860" b="0">
+                <a:solidFill>
+                  <a:srgbClr val="61666B"/>
+                </a:solidFill>
+                <a:latin typeface="PingFang SC"/>
+              </a:rPr>
+              <a:t>现象 · 动作 · 耗时</a:t>
+            </a:r>
+          </a:p>
+        </p:txBody>
+      </p:sp>
+      <p:sp>
+        <p:nvSpPr>
+          <p:cNvPr id="15" name="TextBox 14"/>
+          <p:cNvSpPr txBox="1"/>
+          <p:nvPr/>
+        </p:nvSpPr>
+        <p:spPr>
+          <a:xfrm>
+            <a:off x="5029199" y="2048256"/>
+            <a:ext cx="2194560" cy="402336"/>
+          </a:xfrm>
+          <a:prstGeom prst="rect">
+            <a:avLst/>
+          </a:prstGeom>
+          <a:noFill/>
+        </p:spPr>
+        <p:txBody>
+          <a:bodyPr wrap="square" lIns="36576" rIns="36576" tIns="18288" bIns="18288" anchor="t">
+            <a:spAutoFit/>
+          </a:bodyPr>
+          <a:lstStyle/>
+          <a:p>
+            <a:pPr algn="l">
+              <a:lnSpc>
+                <a:spcPct val="110000"/>
+              </a:lnSpc>
+            </a:pPr>
+            <a:r>
+              <a:rPr sz="950" b="1">
+                <a:solidFill>
+                  <a:srgbClr val="0F1115"/>
+                </a:solidFill>
+                <a:latin typeface="PingFang SC"/>
+              </a:rPr>
+              <a:t>故障 → 案例卡</a:t>
+            </a:r>
+          </a:p>
+          <a:p>
+            <a:pPr algn="l">
+              <a:lnSpc>
+                <a:spcPct val="110000"/>
+              </a:lnSpc>
+            </a:pPr>
+            <a:r>
+              <a:rPr sz="860" b="0">
+                <a:solidFill>
+                  <a:srgbClr val="61666B"/>
+                </a:solidFill>
+                <a:latin typeface="PingFang SC"/>
+              </a:rPr>
+              <a:t>根因 · 处置 · 防复发</a:t>
+            </a:r>
+          </a:p>
+        </p:txBody>
+      </p:sp>
+      <p:sp>
+        <p:nvSpPr>
+          <p:cNvPr id="16" name="TextBox 15"/>
+          <p:cNvSpPr txBox="1"/>
+          <p:nvPr/>
+        </p:nvSpPr>
+        <p:spPr>
+          <a:xfrm>
+            <a:off x="548640" y="2432304"/>
+            <a:ext cx="6675120" cy="146304"/>
+          </a:xfrm>
+          <a:prstGeom prst="rect">
+            <a:avLst/>
+          </a:prstGeom>
+          <a:noFill/>
+        </p:spPr>
+        <p:txBody>
+          <a:bodyPr wrap="square" lIns="36576" rIns="36576" tIns="0" bIns="0" anchor="ctr">
+            <a:spAutoFit/>
+          </a:bodyPr>
+          <a:lstStyle/>
+          <a:p>
+            <a:pPr algn="l">
+              <a:lnSpc>
+                <a:spcPct val="115000"/>
+              </a:lnSpc>
+            </a:pPr>
+            <a:r>
+              <a:rPr sz="840" b="0">
+                <a:solidFill>
+                  <a:srgbClr val="61666B"/>
+                </a:solidFill>
+                <a:latin typeface="PingFang SC"/>
+              </a:rPr>
+              <a:t>统一打标：适用引擎与环境 · 生效期 · 版本（重灌出新版，引用可追溯）</a:t>
+            </a:r>
+          </a:p>
+        </p:txBody>
+      </p:sp>
+      <p:sp>
+        <p:nvSpPr>
+          <p:cNvPr id="17" name="TextBox 16"/>
+          <p:cNvSpPr txBox="1"/>
+          <p:nvPr/>
+        </p:nvSpPr>
+        <p:spPr>
+          <a:xfrm>
+            <a:off x="457200" y="2688336"/>
+            <a:ext cx="5029200" cy="146304"/>
+          </a:xfrm>
+          <a:prstGeom prst="rect">
+            <a:avLst/>
+          </a:prstGeom>
+          <a:noFill/>
+        </p:spPr>
+        <p:txBody>
+          <a:bodyPr wrap="square" lIns="36576" rIns="36576" tIns="0" bIns="0" anchor="ctr">
+            <a:spAutoFit/>
+          </a:bodyPr>
+          <a:lstStyle/>
+          <a:p>
+            <a:pPr algn="l">
+              <a:lnSpc>
+                <a:spcPct val="115000"/>
+              </a:lnSpc>
+            </a:pPr>
+            <a:r>
+              <a:rPr sz="800" b="0">
+                <a:solidFill>
+                  <a:srgbClr val="81858C"/>
+                </a:solidFill>
+                <a:latin typeface="PingFang SC"/>
+              </a:rPr>
+              <a:t>③ 三类存储各司其职：真相只有一份，能力互补，任一层不可用都能降级</a:t>
+            </a:r>
+          </a:p>
+        </p:txBody>
+      </p:sp>
+      <p:sp>
+        <p:nvSpPr>
+          <p:cNvPr id="18" name="Rounded Rectangle 17"/>
+          <p:cNvSpPr/>
+          <p:nvPr/>
+        </p:nvSpPr>
+        <p:spPr>
+          <a:xfrm>
+            <a:off x="457200" y="2980944"/>
+            <a:ext cx="2103120" cy="1152144"/>
+          </a:xfrm>
+          <a:prstGeom prst="roundRect">
+            <a:avLst>
+              <a:gd name="adj" fmla="val 8000"/>
+            </a:avLst>
+          </a:prstGeom>
+          <a:solidFill>
+            <a:srgbClr val="F2F3F5"/>
+          </a:solidFill>
+          <a:ln w="15875">
+            <a:solidFill>
+              <a:srgbClr val="8A9099"/>
+            </a:solidFill>
+          </a:ln>
+          <a:effectLst/>
+        </p:spPr>
+        <p:style>
+          <a:lnRef idx="1">
+            <a:schemeClr val="accent1"/>
+          </a:lnRef>
+          <a:fillRef idx="3">
+            <a:schemeClr val="accent1"/>
+          </a:fillRef>
+          <a:effectRef idx="2">
+            <a:schemeClr val="accent1"/>
+          </a:effectRef>
+          <a:fontRef idx="minor">
+            <a:schemeClr val="lt1"/>
+          </a:fontRef>
+        </p:style>
+        <p:txBody>
+          <a:bodyPr rtlCol="0" anchor="ctr"/>
+          <a:lstStyle/>
+          <a:p/>
+        </p:txBody>
+      </p:sp>
+      <p:sp>
+        <p:nvSpPr>
+          <p:cNvPr id="19" name="TextBox 18"/>
+          <p:cNvSpPr txBox="1"/>
+          <p:nvPr/>
+        </p:nvSpPr>
+        <p:spPr>
+          <a:xfrm>
+            <a:off x="530352" y="3017520"/>
+            <a:ext cx="1956816" cy="274320"/>
+          </a:xfrm>
+          <a:prstGeom prst="rect">
+            <a:avLst/>
+          </a:prstGeom>
+          <a:noFill/>
+        </p:spPr>
+        <p:txBody>
+          <a:bodyPr wrap="square" lIns="36576" rIns="36576" tIns="18288" bIns="18288" anchor="t">
+            <a:spAutoFit/>
+          </a:bodyPr>
+          <a:lstStyle/>
+          <a:p>
+            <a:pPr algn="l">
+              <a:lnSpc>
+                <a:spcPct val="115000"/>
+              </a:lnSpc>
+            </a:pPr>
+            <a:r>
+              <a:rPr sz="1100" b="1">
+                <a:solidFill>
+                  <a:srgbClr val="0F1115"/>
+                </a:solidFill>
+                <a:latin typeface="PingFang SC"/>
+              </a:rPr>
+              <a:t>关系型数据库</a:t>
+            </a:r>
+            <a:r>
+              <a:rPr sz="850" b="1">
+                <a:solidFill>
+                  <a:srgbClr val="8A9099"/>
+                </a:solidFill>
+                <a:latin typeface="PingFang SC"/>
+              </a:rPr>
+              <a:t>  唯一真相</a:t>
+            </a:r>
+          </a:p>
+        </p:txBody>
+      </p:sp>
+      <p:sp>
+        <p:nvSpPr>
+          <p:cNvPr id="20" name="TextBox 19"/>
+          <p:cNvSpPr txBox="1"/>
+          <p:nvPr/>
+        </p:nvSpPr>
+        <p:spPr>
+          <a:xfrm>
+            <a:off x="530352" y="3273551"/>
+            <a:ext cx="1956816" cy="822960"/>
+          </a:xfrm>
+          <a:prstGeom prst="rect">
+            <a:avLst/>
+          </a:prstGeom>
+          <a:noFill/>
+        </p:spPr>
+        <p:txBody>
+          <a:bodyPr wrap="square" lIns="36576" rIns="36576" tIns="18288" bIns="18288" anchor="t">
+            <a:spAutoFit/>
+          </a:bodyPr>
+          <a:lstStyle/>
+          <a:p>
+            <a:pPr algn="l">
+              <a:lnSpc>
+                <a:spcPct val="114000"/>
+              </a:lnSpc>
+            </a:pPr>
+            <a:r>
+              <a:rPr sz="860" b="0">
+                <a:solidFill>
+                  <a:srgbClr val="61666B"/>
+                </a:solidFill>
+                <a:latin typeface="PingFang SC"/>
+              </a:rPr>
+              <a:t>· 三种卡片 · 版本 · 引用台账</a:t>
+            </a:r>
+          </a:p>
+          <a:p>
+            <a:pPr algn="l">
+              <a:lnSpc>
+                <a:spcPct val="114000"/>
+              </a:lnSpc>
+            </a:pPr>
+            <a:r>
+              <a:rPr sz="860" b="0">
+                <a:solidFill>
+                  <a:srgbClr val="61666B"/>
+                </a:solidFill>
+                <a:latin typeface="PingFang SC"/>
+              </a:rPr>
+              <a:t>· 记忆：这套库我们做过什么</a:t>
+            </a:r>
+          </a:p>
+          <a:p>
+            <a:pPr algn="l">
+              <a:lnSpc>
+                <a:spcPct val="114000"/>
+              </a:lnSpc>
+            </a:pPr>
+            <a:r>
+              <a:rPr sz="860" b="0">
+                <a:solidFill>
+                  <a:srgbClr val="61666B"/>
+                </a:solidFill>
+                <a:latin typeface="PingFang SC"/>
+              </a:rPr>
+              <a:t>· 按引擎/环境/生效期精确过滤</a:t>
+            </a:r>
+          </a:p>
+        </p:txBody>
+      </p:sp>
+      <p:sp>
+        <p:nvSpPr>
+          <p:cNvPr id="21" name="Rounded Rectangle 20"/>
+          <p:cNvSpPr/>
+          <p:nvPr/>
+        </p:nvSpPr>
+        <p:spPr>
+          <a:xfrm>
+            <a:off x="2834640" y="2980944"/>
+            <a:ext cx="2103120" cy="1152144"/>
+          </a:xfrm>
+          <a:prstGeom prst="roundRect">
+            <a:avLst>
+              <a:gd name="adj" fmla="val 8000"/>
+            </a:avLst>
+          </a:prstGeom>
+          <a:solidFill>
+            <a:srgbClr val="FDF0E3"/>
+          </a:solidFill>
+          <a:ln w="15875">
+            <a:solidFill>
+              <a:srgbClr val="C9862D"/>
+            </a:solidFill>
+          </a:ln>
+          <a:effectLst/>
+        </p:spPr>
+        <p:style>
+          <a:lnRef idx="1">
+            <a:schemeClr val="accent1"/>
+          </a:lnRef>
+          <a:fillRef idx="3">
+            <a:schemeClr val="accent1"/>
+          </a:fillRef>
+          <a:effectRef idx="2">
+            <a:schemeClr val="accent1"/>
+          </a:effectRef>
+          <a:fontRef idx="minor">
+            <a:schemeClr val="lt1"/>
+          </a:fontRef>
+        </p:style>
+        <p:txBody>
+          <a:bodyPr rtlCol="0" anchor="ctr"/>
+          <a:lstStyle/>
+          <a:p/>
+        </p:txBody>
+      </p:sp>
+      <p:sp>
+        <p:nvSpPr>
+          <p:cNvPr id="22" name="TextBox 21"/>
+          <p:cNvSpPr txBox="1"/>
+          <p:nvPr/>
+        </p:nvSpPr>
+        <p:spPr>
+          <a:xfrm>
+            <a:off x="2907792" y="3017520"/>
+            <a:ext cx="1956816" cy="274320"/>
+          </a:xfrm>
+          <a:prstGeom prst="rect">
+            <a:avLst/>
+          </a:prstGeom>
+          <a:noFill/>
+        </p:spPr>
+        <p:txBody>
+          <a:bodyPr wrap="square" lIns="36576" rIns="36576" tIns="18288" bIns="18288" anchor="t">
+            <a:spAutoFit/>
+          </a:bodyPr>
+          <a:lstStyle/>
+          <a:p>
+            <a:pPr algn="l">
+              <a:lnSpc>
+                <a:spcPct val="115000"/>
+              </a:lnSpc>
+            </a:pPr>
+            <a:r>
+              <a:rPr sz="1100" b="1">
+                <a:solidFill>
+                  <a:srgbClr val="0F1115"/>
+                </a:solidFill>
+                <a:latin typeface="PingFang SC"/>
+              </a:rPr>
+              <a:t>向量数据库</a:t>
+            </a:r>
+            <a:r>
+              <a:rPr sz="850" b="1">
+                <a:solidFill>
+                  <a:srgbClr val="C9862D"/>
+                </a:solidFill>
+                <a:latin typeface="PingFang SC"/>
+              </a:rPr>
+              <a:t>  语义召回</a:t>
+            </a:r>
+          </a:p>
+        </p:txBody>
+      </p:sp>
+      <p:sp>
+        <p:nvSpPr>
+          <p:cNvPr id="23" name="TextBox 22"/>
+          <p:cNvSpPr txBox="1"/>
+          <p:nvPr/>
+        </p:nvSpPr>
+        <p:spPr>
+          <a:xfrm>
+            <a:off x="2907792" y="3273551"/>
+            <a:ext cx="1956816" cy="822960"/>
+          </a:xfrm>
+          <a:prstGeom prst="rect">
+            <a:avLst/>
+          </a:prstGeom>
+          <a:noFill/>
+        </p:spPr>
+        <p:txBody>
+          <a:bodyPr wrap="square" lIns="36576" rIns="36576" tIns="18288" bIns="18288" anchor="t">
+            <a:spAutoFit/>
+          </a:bodyPr>
+          <a:lstStyle/>
+          <a:p>
+            <a:pPr algn="l">
+              <a:lnSpc>
+                <a:spcPct val="114000"/>
+              </a:lnSpc>
+            </a:pPr>
+            <a:r>
+              <a:rPr sz="860" b="0">
+                <a:solidFill>
+                  <a:srgbClr val="61666B"/>
+                </a:solidFill>
+                <a:latin typeface="PingFang SC"/>
+              </a:rPr>
+              <a:t>· 说法不同、意思相同也能召回</a:t>
+            </a:r>
+          </a:p>
+          <a:p>
+            <a:pPr algn="l">
+              <a:lnSpc>
+                <a:spcPct val="114000"/>
+              </a:lnSpc>
+            </a:pPr>
+            <a:r>
+              <a:rPr sz="860" b="0">
+                <a:solidFill>
+                  <a:srgbClr val="61666B"/>
+                </a:solidFill>
+                <a:latin typeface="PingFang SC"/>
+              </a:rPr>
+              <a:t>· "连接打满" ↔ "连接超阈值"</a:t>
+            </a:r>
+          </a:p>
+          <a:p>
+            <a:pPr algn="l">
+              <a:lnSpc>
+                <a:spcPct val="114000"/>
+              </a:lnSpc>
+            </a:pPr>
+            <a:r>
+              <a:rPr sz="860" b="0">
+                <a:solidFill>
+                  <a:srgbClr val="61666B"/>
+                </a:solidFill>
+                <a:latin typeface="PingFang SC"/>
+              </a:rPr>
+              <a:t>· 只加速，不存真相，可重建</a:t>
+            </a:r>
+          </a:p>
+        </p:txBody>
+      </p:sp>
+      <p:sp>
+        <p:nvSpPr>
+          <p:cNvPr id="24" name="Rounded Rectangle 23"/>
+          <p:cNvSpPr/>
+          <p:nvPr/>
+        </p:nvSpPr>
+        <p:spPr>
+          <a:xfrm>
+            <a:off x="5212080" y="2980944"/>
+            <a:ext cx="2103120" cy="1152144"/>
+          </a:xfrm>
+          <a:prstGeom prst="roundRect">
+            <a:avLst>
+              <a:gd name="adj" fmla="val 8000"/>
+            </a:avLst>
+          </a:prstGeom>
+          <a:solidFill>
+            <a:srgbClr val="F3EEFC"/>
+          </a:solidFill>
+          <a:ln w="15875">
+            <a:solidFill>
+              <a:srgbClr val="8B6BE0"/>
+            </a:solidFill>
+          </a:ln>
+          <a:effectLst/>
+        </p:spPr>
+        <p:style>
+          <a:lnRef idx="1">
+            <a:schemeClr val="accent1"/>
+          </a:lnRef>
+          <a:fillRef idx="3">
+            <a:schemeClr val="accent1"/>
+          </a:fillRef>
+          <a:effectRef idx="2">
+            <a:schemeClr val="accent1"/>
+          </a:effectRef>
+          <a:fontRef idx="minor">
+            <a:schemeClr val="lt1"/>
+          </a:fontRef>
+        </p:style>
+        <p:txBody>
+          <a:bodyPr rtlCol="0" anchor="ctr"/>
+          <a:lstStyle/>
+          <a:p/>
+        </p:txBody>
+      </p:sp>
+      <p:sp>
+        <p:nvSpPr>
+          <p:cNvPr id="25" name="TextBox 24"/>
+          <p:cNvSpPr txBox="1"/>
+          <p:nvPr/>
+        </p:nvSpPr>
+        <p:spPr>
+          <a:xfrm>
+            <a:off x="5285232" y="3017520"/>
+            <a:ext cx="1956816" cy="274320"/>
+          </a:xfrm>
+          <a:prstGeom prst="rect">
+            <a:avLst/>
+          </a:prstGeom>
+          <a:noFill/>
+        </p:spPr>
+        <p:txBody>
+          <a:bodyPr wrap="square" lIns="36576" rIns="36576" tIns="18288" bIns="18288" anchor="t">
+            <a:spAutoFit/>
+          </a:bodyPr>
+          <a:lstStyle/>
+          <a:p>
+            <a:pPr algn="l">
+              <a:lnSpc>
+                <a:spcPct val="115000"/>
+              </a:lnSpc>
+            </a:pPr>
+            <a:r>
+              <a:rPr sz="1100" b="1">
+                <a:solidFill>
+                  <a:srgbClr val="0F1115"/>
+                </a:solidFill>
+                <a:latin typeface="PingFang SC"/>
+              </a:rPr>
+              <a:t>图数据库</a:t>
+            </a:r>
+            <a:r>
+              <a:rPr sz="850" b="1">
+                <a:solidFill>
+                  <a:srgbClr val="8B6BE0"/>
+                </a:solidFill>
+                <a:latin typeface="PingFang SC"/>
+              </a:rPr>
+              <a:t>  关系推理</a:t>
+            </a:r>
+          </a:p>
+        </p:txBody>
+      </p:sp>
+      <p:sp>
+        <p:nvSpPr>
+          <p:cNvPr id="26" name="TextBox 25"/>
+          <p:cNvSpPr txBox="1"/>
+          <p:nvPr/>
+        </p:nvSpPr>
+        <p:spPr>
+          <a:xfrm>
+            <a:off x="5285232" y="3273551"/>
+            <a:ext cx="1956816" cy="822960"/>
+          </a:xfrm>
+          <a:prstGeom prst="rect">
+            <a:avLst/>
+          </a:prstGeom>
+          <a:noFill/>
+        </p:spPr>
+        <p:txBody>
+          <a:bodyPr wrap="square" lIns="36576" rIns="36576" tIns="18288" bIns="18288" anchor="t">
+            <a:spAutoFit/>
+          </a:bodyPr>
+          <a:lstStyle/>
+          <a:p>
+            <a:pPr algn="l">
+              <a:lnSpc>
+                <a:spcPct val="114000"/>
+              </a:lnSpc>
+            </a:pPr>
+            <a:r>
+              <a:rPr sz="860" b="0">
+                <a:solidFill>
+                  <a:srgbClr val="61666B"/>
+                </a:solidFill>
+                <a:latin typeface="PingFang SC"/>
+              </a:rPr>
+              <a:t>· 现象 → 根因 → 处置 多跳串联</a:t>
+            </a:r>
+          </a:p>
+          <a:p>
+            <a:pPr algn="l">
+              <a:lnSpc>
+                <a:spcPct val="114000"/>
+              </a:lnSpc>
+            </a:pPr>
+            <a:r>
+              <a:rPr sz="860" b="0">
+                <a:solidFill>
+                  <a:srgbClr val="61666B"/>
+                </a:solidFill>
+                <a:latin typeface="PingFang SC"/>
+              </a:rPr>
+              <a:t>· 条款 ↔ 对象、案例 ↔ 条款</a:t>
+            </a:r>
+          </a:p>
+          <a:p>
+            <a:pPr algn="l">
+              <a:lnSpc>
+                <a:spcPct val="114000"/>
+              </a:lnSpc>
+            </a:pPr>
+            <a:r>
+              <a:rPr sz="860" b="0">
+                <a:solidFill>
+                  <a:srgbClr val="61666B"/>
+                </a:solidFill>
+                <a:latin typeface="PingFang SC"/>
+              </a:rPr>
+              <a:t>· 一条结论牵出规范与历史全链</a:t>
+            </a:r>
+          </a:p>
+        </p:txBody>
+      </p:sp>
+      <p:cxnSp>
+        <p:nvCxnSpPr>
+          <p:cNvPr id="27" name="Connector 26"/>
+          <p:cNvCxnSpPr/>
+          <p:nvPr/>
+        </p:nvCxnSpPr>
+        <p:spPr>
+          <a:xfrm>
+            <a:off x="2560320" y="3557015"/>
+            <a:ext cx="274320" cy="0"/>
+          </a:xfrm>
+          <a:prstGeom prst="line">
+            <a:avLst/>
+          </a:prstGeom>
+          <a:ln w="16510">
+            <a:solidFill>
+              <a:srgbClr val="C9862D"/>
+            </a:solidFill>
+            <a:headEnd type="triangle" w="med" len="med"/>
+            <a:tailEnd type="triangle" w="med" len="med"/>
+          </a:ln>
+        </p:spPr>
+        <p:style>
+          <a:lnRef idx="2">
+            <a:schemeClr val="accent1"/>
+          </a:lnRef>
+          <a:fillRef idx="0">
+            <a:schemeClr val="accent1"/>
+          </a:fillRef>
+          <a:effectRef idx="1">
+            <a:schemeClr val="accent1"/>
+          </a:effectRef>
+          <a:fontRef idx="minor">
+            <a:schemeClr val="tx1"/>
+          </a:fontRef>
+        </p:style>
+      </p:cxnSp>
+      <p:cxnSp>
+        <p:nvCxnSpPr>
+          <p:cNvPr id="28" name="Connector 27"/>
+          <p:cNvCxnSpPr/>
+          <p:nvPr/>
+        </p:nvCxnSpPr>
+        <p:spPr>
+          <a:xfrm>
+            <a:off x="4937760" y="3557015"/>
+            <a:ext cx="274320" cy="0"/>
+          </a:xfrm>
+          <a:prstGeom prst="line">
+            <a:avLst/>
+          </a:prstGeom>
+          <a:ln w="16510">
+            <a:solidFill>
+              <a:srgbClr val="8B6BE0"/>
+            </a:solidFill>
+            <a:headEnd type="triangle" w="med" len="med"/>
+            <a:tailEnd type="triangle" w="med" len="med"/>
+          </a:ln>
+        </p:spPr>
+        <p:style>
+          <a:lnRef idx="2">
+            <a:schemeClr val="accent1"/>
+          </a:lnRef>
+          <a:fillRef idx="0">
+            <a:schemeClr val="accent1"/>
+          </a:fillRef>
+          <a:effectRef idx="1">
+            <a:schemeClr val="accent1"/>
+          </a:effectRef>
+          <a:fontRef idx="minor">
+            <a:schemeClr val="tx1"/>
+          </a:fontRef>
+        </p:style>
+      </p:cxnSp>
+      <p:sp>
+        <p:nvSpPr>
+          <p:cNvPr id="29" name="TextBox 28"/>
+          <p:cNvSpPr txBox="1"/>
+          <p:nvPr/>
+        </p:nvSpPr>
+        <p:spPr>
+          <a:xfrm>
+            <a:off x="2057400" y="4151375"/>
+            <a:ext cx="1280160" cy="146304"/>
+          </a:xfrm>
+          <a:prstGeom prst="rect">
+            <a:avLst/>
+          </a:prstGeom>
+          <a:noFill/>
+        </p:spPr>
+        <p:txBody>
+          <a:bodyPr wrap="square" lIns="36576" rIns="36576" tIns="0" bIns="0" anchor="ctr">
+            <a:spAutoFit/>
+          </a:bodyPr>
+          <a:lstStyle/>
+          <a:p>
+            <a:pPr algn="ctr">
+              <a:lnSpc>
+                <a:spcPct val="115000"/>
+              </a:lnSpc>
+            </a:pPr>
+            <a:r>
+              <a:rPr sz="750" b="0">
+                <a:solidFill>
+                  <a:srgbClr val="C9862D"/>
+                </a:solidFill>
+                <a:latin typeface="PingFang SC"/>
+              </a:rPr>
+              <a:t>同步向量 / 回表取原文</a:t>
+            </a:r>
+          </a:p>
+        </p:txBody>
+      </p:sp>
+      <p:sp>
+        <p:nvSpPr>
+          <p:cNvPr id="30" name="TextBox 29"/>
+          <p:cNvSpPr txBox="1"/>
+          <p:nvPr/>
+        </p:nvSpPr>
+        <p:spPr>
+          <a:xfrm>
+            <a:off x="4389120" y="4151375"/>
+            <a:ext cx="1371600" cy="146304"/>
+          </a:xfrm>
+          <a:prstGeom prst="rect">
+            <a:avLst/>
+          </a:prstGeom>
+          <a:noFill/>
+        </p:spPr>
+        <p:txBody>
+          <a:bodyPr wrap="square" lIns="36576" rIns="36576" tIns="0" bIns="0" anchor="ctr">
+            <a:spAutoFit/>
+          </a:bodyPr>
+          <a:lstStyle/>
+          <a:p>
+            <a:pPr algn="ctr">
+              <a:lnSpc>
+                <a:spcPct val="115000"/>
+              </a:lnSpc>
+            </a:pPr>
+            <a:r>
+              <a:rPr sz="750" b="0">
+                <a:solidFill>
+                  <a:srgbClr val="8B6BE0"/>
+                </a:solidFill>
+                <a:latin typeface="PingFang SC"/>
+              </a:rPr>
+              <a:t>抽实体与边 / 回表取证据</a:t>
+            </a:r>
+          </a:p>
+        </p:txBody>
+      </p:sp>
+      <p:sp>
+        <p:nvSpPr>
+          <p:cNvPr id="31" name="Rounded Rectangle 30"/>
+          <p:cNvSpPr/>
+          <p:nvPr/>
+        </p:nvSpPr>
+        <p:spPr>
+          <a:xfrm>
+            <a:off x="457200" y="4443984"/>
+            <a:ext cx="6858000" cy="603504"/>
           </a:xfrm>
           <a:prstGeom prst="roundRect">
             <a:avLst>
@@ -3661,14 +4528,14 @@
       </p:sp>
       <p:sp>
         <p:nvSpPr>
-          <p:cNvPr id="15" name="TextBox 14"/>
+          <p:cNvPr id="32" name="TextBox 31"/>
           <p:cNvSpPr txBox="1"/>
           <p:nvPr/>
         </p:nvSpPr>
         <p:spPr>
           <a:xfrm>
-            <a:off x="530352" y="1883664"/>
-            <a:ext cx="7306056" cy="274320"/>
+            <a:off x="530352" y="4480560"/>
+            <a:ext cx="6711696" cy="274320"/>
           </a:xfrm>
           <a:prstGeom prst="rect">
             <a:avLst/>
@@ -3687,13 +4554,13 @@
               </a:lnSpc>
             </a:pPr>
             <a:r>
-              <a:rPr sz="1150" b="1">
+              <a:rPr sz="1200" b="1">
                 <a:solidFill>
                   <a:srgbClr val="0F1115"/>
                 </a:solidFill>
                 <a:latin typeface="PingFang SC"/>
               </a:rPr>
-              <a:t>② 摄入与治理</a:t>
+              <a:t>④ 混合检索：由平台按"发现"发起</a:t>
             </a:r>
             <a:r>
               <a:rPr sz="900" b="1">
@@ -3702,21 +4569,21 @@
                 </a:solidFill>
                 <a:latin typeface="PingFang SC"/>
               </a:rPr>
-              <a:t>  自动化管线 · 增量</a:t>
-            </a:r>
-          </a:p>
-        </p:txBody>
-      </p:sp>
-      <p:sp>
-        <p:nvSpPr>
-          <p:cNvPr id="16" name="TextBox 15"/>
+              <a:t>  语义 + 词法 + 范围过滤 + 图扩展 → 重排</a:t>
+            </a:r>
+          </a:p>
+        </p:txBody>
+      </p:sp>
+      <p:sp>
+        <p:nvSpPr>
+          <p:cNvPr id="33" name="TextBox 32"/>
           <p:cNvSpPr txBox="1"/>
           <p:nvPr/>
         </p:nvSpPr>
         <p:spPr>
           <a:xfrm>
-            <a:off x="530352" y="2139696"/>
-            <a:ext cx="7306056" cy="219456"/>
+            <a:off x="530352" y="4736592"/>
+            <a:ext cx="6711696" cy="274320"/>
           </a:xfrm>
           <a:prstGeom prst="rect">
             <a:avLst/>
@@ -3731,1173 +4598,31 @@
           <a:p>
             <a:pPr algn="l">
               <a:lnSpc>
-                <a:spcPct val="112000"/>
+                <a:spcPct val="114000"/>
               </a:lnSpc>
             </a:pPr>
             <a:r>
-              <a:rPr sz="860" b="0">
+              <a:rPr sz="880" b="0">
                 <a:solidFill>
                   <a:srgbClr val="61666B"/>
                 </a:solidFill>
                 <a:latin typeface="PingFang SC"/>
               </a:rPr>
-              <a:t>· 格式归一（文档 / 表格 / 工单导出 / 邮件）→ 语义切块；每篇强制打元数据：类型 · 适用引擎与环境 · 生效时间 · 版本 · 密级</a:t>
-            </a:r>
-          </a:p>
-          <a:p>
-            <a:pPr algn="l">
-              <a:lnSpc>
-                <a:spcPct val="112000"/>
-              </a:lnSpc>
-            </a:pPr>
-            <a:r>
-              <a:rPr sz="860" b="0">
-                <a:solidFill>
-                  <a:srgbClr val="61666B"/>
-                </a:solidFill>
-                <a:latin typeface="PingFang SC"/>
-              </a:rPr>
-              <a:t>· 同源资料重灌产出新版本而非覆盖——报告引用永远能追溯到"当时依据的是哪一版规范"</a:t>
-            </a:r>
-          </a:p>
-        </p:txBody>
-      </p:sp>
-      <p:sp>
-        <p:nvSpPr>
-          <p:cNvPr id="17" name="Rounded Rectangle 16"/>
+              <a:t>· 检索键 = 规则码 + 对象 + 现象词；命中条款卡 / 处置卡 / 案例卡，连同出处一起交给模型</a:t>
+            </a:r>
+          </a:p>
+        </p:txBody>
+      </p:sp>
+      <p:sp>
+        <p:nvSpPr>
+          <p:cNvPr id="34" name="Rounded Rectangle 33"/>
           <p:cNvSpPr/>
           <p:nvPr/>
         </p:nvSpPr>
         <p:spPr>
           <a:xfrm>
-            <a:off x="457200" y="2596896"/>
-            <a:ext cx="7452360" cy="914400"/>
-          </a:xfrm>
-          <a:prstGeom prst="roundRect">
-            <a:avLst>
-              <a:gd name="adj" fmla="val 8000"/>
-            </a:avLst>
-          </a:prstGeom>
-          <a:solidFill>
-            <a:srgbClr val="E8F5EC"/>
-          </a:solidFill>
-          <a:ln w="15875">
-            <a:solidFill>
-              <a:srgbClr val="3FA552"/>
-            </a:solidFill>
-          </a:ln>
-          <a:effectLst/>
-        </p:spPr>
-        <p:style>
-          <a:lnRef idx="1">
-            <a:schemeClr val="accent1"/>
-          </a:lnRef>
-          <a:fillRef idx="3">
-            <a:schemeClr val="accent1"/>
-          </a:fillRef>
-          <a:effectRef idx="2">
-            <a:schemeClr val="accent1"/>
-          </a:effectRef>
-          <a:fontRef idx="minor">
-            <a:schemeClr val="lt1"/>
-          </a:fontRef>
-        </p:style>
-        <p:txBody>
-          <a:bodyPr rtlCol="0" anchor="ctr"/>
-          <a:lstStyle/>
-          <a:p/>
-        </p:txBody>
-      </p:sp>
-      <p:sp>
-        <p:nvSpPr>
-          <p:cNvPr id="18" name="TextBox 17"/>
-          <p:cNvSpPr txBox="1"/>
-          <p:nvPr/>
-        </p:nvSpPr>
-        <p:spPr>
-          <a:xfrm>
-            <a:off x="530352" y="2633472"/>
-            <a:ext cx="7306056" cy="274320"/>
-          </a:xfrm>
-          <a:prstGeom prst="rect">
-            <a:avLst/>
-          </a:prstGeom>
-          <a:noFill/>
-        </p:spPr>
-        <p:txBody>
-          <a:bodyPr wrap="square" lIns="36576" rIns="36576" tIns="18288" bIns="18288" anchor="t">
-            <a:spAutoFit/>
-          </a:bodyPr>
-          <a:lstStyle/>
-          <a:p>
-            <a:pPr algn="l">
-              <a:lnSpc>
-                <a:spcPct val="115000"/>
-              </a:lnSpc>
-            </a:pPr>
-            <a:r>
-              <a:rPr sz="1150" b="1">
-                <a:solidFill>
-                  <a:srgbClr val="0F1115"/>
-                </a:solidFill>
-                <a:latin typeface="PingFang SC"/>
-              </a:rPr>
-              <a:t>③ 结构化抽取：把文本变成"可判定/可复用"的知识</a:t>
-            </a:r>
-            <a:r>
-              <a:rPr sz="850" b="1">
-                <a:solidFill>
-                  <a:srgbClr val="3FA552"/>
-                </a:solidFill>
-                <a:latin typeface="PingFang SC"/>
-              </a:rPr>
-              <a:t>  模型抽取 + 人工确认后才可被引用</a:t>
-            </a:r>
-          </a:p>
-        </p:txBody>
-      </p:sp>
-      <p:sp>
-        <p:nvSpPr>
-          <p:cNvPr id="19" name="TextBox 18"/>
-          <p:cNvSpPr txBox="1"/>
-          <p:nvPr/>
-        </p:nvSpPr>
-        <p:spPr>
-          <a:xfrm>
-            <a:off x="566928" y="2962656"/>
-            <a:ext cx="2374392" cy="457200"/>
-          </a:xfrm>
-          <a:prstGeom prst="rect">
-            <a:avLst/>
-          </a:prstGeom>
-          <a:noFill/>
-        </p:spPr>
-        <p:txBody>
-          <a:bodyPr wrap="square" lIns="36576" rIns="36576" tIns="18288" bIns="18288" anchor="t">
-            <a:spAutoFit/>
-          </a:bodyPr>
-          <a:lstStyle/>
-          <a:p>
-            <a:pPr algn="l">
-              <a:lnSpc>
-                <a:spcPct val="112000"/>
-              </a:lnSpc>
-            </a:pPr>
-            <a:r>
-              <a:rPr sz="950" b="1">
-                <a:solidFill>
-                  <a:srgbClr val="0F1115"/>
-                </a:solidFill>
-                <a:latin typeface="PingFang SC"/>
-              </a:rPr>
-              <a:t>规范 → 条款卡</a:t>
-            </a:r>
-          </a:p>
-          <a:p>
-            <a:pPr algn="l">
-              <a:lnSpc>
-                <a:spcPct val="112000"/>
-              </a:lnSpc>
-            </a:pPr>
-            <a:r>
-              <a:rPr sz="819" b="0">
-                <a:solidFill>
-                  <a:srgbClr val="61666B"/>
-                </a:solidFill>
-                <a:latin typeface="PingFang SC"/>
-              </a:rPr>
-              <a:t>约束对象 · 条件 · 要求值 · 强制/建议</a:t>
-            </a:r>
-          </a:p>
-        </p:txBody>
-      </p:sp>
-      <p:sp>
-        <p:nvSpPr>
-          <p:cNvPr id="20" name="TextBox 19"/>
-          <p:cNvSpPr txBox="1"/>
-          <p:nvPr/>
-        </p:nvSpPr>
-        <p:spPr>
-          <a:xfrm>
-            <a:off x="2996184" y="2962656"/>
-            <a:ext cx="2374392" cy="457200"/>
-          </a:xfrm>
-          <a:prstGeom prst="rect">
-            <a:avLst/>
-          </a:prstGeom>
-          <a:noFill/>
-        </p:spPr>
-        <p:txBody>
-          <a:bodyPr wrap="square" lIns="36576" rIns="36576" tIns="18288" bIns="18288" anchor="t">
-            <a:spAutoFit/>
-          </a:bodyPr>
-          <a:lstStyle/>
-          <a:p>
-            <a:pPr algn="l">
-              <a:lnSpc>
-                <a:spcPct val="112000"/>
-              </a:lnSpc>
-            </a:pPr>
-            <a:r>
-              <a:rPr sz="950" b="1">
-                <a:solidFill>
-                  <a:srgbClr val="0F1115"/>
-                </a:solidFill>
-                <a:latin typeface="PingFang SC"/>
-              </a:rPr>
-              <a:t>工单 → 处置卡</a:t>
-            </a:r>
-          </a:p>
-          <a:p>
-            <a:pPr algn="l">
-              <a:lnSpc>
-                <a:spcPct val="112000"/>
-              </a:lnSpc>
-            </a:pPr>
-            <a:r>
-              <a:rPr sz="819" b="0">
-                <a:solidFill>
-                  <a:srgbClr val="61666B"/>
-                </a:solidFill>
-                <a:latin typeface="PingFang SC"/>
-              </a:rPr>
-              <a:t>现象 · 动作 · 验证方式 · 耗时 · 涉及对象</a:t>
-            </a:r>
-          </a:p>
-        </p:txBody>
-      </p:sp>
-      <p:sp>
-        <p:nvSpPr>
-          <p:cNvPr id="21" name="TextBox 20"/>
-          <p:cNvSpPr txBox="1"/>
-          <p:nvPr/>
-        </p:nvSpPr>
-        <p:spPr>
-          <a:xfrm>
-            <a:off x="5425440" y="2962656"/>
-            <a:ext cx="2374392" cy="457200"/>
-          </a:xfrm>
-          <a:prstGeom prst="rect">
-            <a:avLst/>
-          </a:prstGeom>
-          <a:noFill/>
-        </p:spPr>
-        <p:txBody>
-          <a:bodyPr wrap="square" lIns="36576" rIns="36576" tIns="18288" bIns="18288" anchor="t">
-            <a:spAutoFit/>
-          </a:bodyPr>
-          <a:lstStyle/>
-          <a:p>
-            <a:pPr algn="l">
-              <a:lnSpc>
-                <a:spcPct val="112000"/>
-              </a:lnSpc>
-            </a:pPr>
-            <a:r>
-              <a:rPr sz="950" b="1">
-                <a:solidFill>
-                  <a:srgbClr val="0F1115"/>
-                </a:solidFill>
-                <a:latin typeface="PingFang SC"/>
-              </a:rPr>
-              <a:t>故障总结 → 案例卡</a:t>
-            </a:r>
-          </a:p>
-          <a:p>
-            <a:pPr algn="l">
-              <a:lnSpc>
-                <a:spcPct val="112000"/>
-              </a:lnSpc>
-            </a:pPr>
-            <a:r>
-              <a:rPr sz="819" b="0">
-                <a:solidFill>
-                  <a:srgbClr val="61666B"/>
-                </a:solidFill>
-                <a:latin typeface="PingFang SC"/>
-              </a:rPr>
-              <a:t>现象 · 影响 · 根因 · 处置 · 防复发</a:t>
-            </a:r>
-          </a:p>
-        </p:txBody>
-      </p:sp>
-      <p:sp>
-        <p:nvSpPr>
-          <p:cNvPr id="22" name="TextBox 21"/>
-          <p:cNvSpPr txBox="1"/>
-          <p:nvPr/>
-        </p:nvSpPr>
-        <p:spPr>
-          <a:xfrm>
-            <a:off x="457200" y="3602736"/>
-            <a:ext cx="7452360" cy="146304"/>
-          </a:xfrm>
-          <a:prstGeom prst="rect">
-            <a:avLst/>
-          </a:prstGeom>
-          <a:noFill/>
-        </p:spPr>
-        <p:txBody>
-          <a:bodyPr wrap="square" lIns="36576" rIns="36576" tIns="18288" bIns="18288" anchor="t">
-            <a:spAutoFit/>
-          </a:bodyPr>
-          <a:lstStyle/>
-          <a:p>
-            <a:pPr algn="l">
-              <a:lnSpc>
-                <a:spcPct val="115000"/>
-              </a:lnSpc>
-            </a:pPr>
-            <a:r>
-              <a:rPr sz="850" b="0">
-                <a:solidFill>
-                  <a:srgbClr val="81858C"/>
-                </a:solidFill>
-                <a:latin typeface="PingFang SC"/>
-              </a:rPr>
-              <a:t>④ 三类存储各司其职：真相只有一份，能力互补，任一层不可用都能降级</a:t>
-            </a:r>
-          </a:p>
-        </p:txBody>
-      </p:sp>
-      <p:sp>
-        <p:nvSpPr>
-          <p:cNvPr id="23" name="Rounded Rectangle 22"/>
-          <p:cNvSpPr/>
-          <p:nvPr/>
-        </p:nvSpPr>
-        <p:spPr>
-          <a:xfrm>
-            <a:off x="457200" y="3767328"/>
-            <a:ext cx="2301240" cy="1243584"/>
-          </a:xfrm>
-          <a:prstGeom prst="roundRect">
-            <a:avLst>
-              <a:gd name="adj" fmla="val 8000"/>
-            </a:avLst>
-          </a:prstGeom>
-          <a:solidFill>
-            <a:srgbClr val="F2F3F5"/>
-          </a:solidFill>
-          <a:ln w="15875">
-            <a:solidFill>
-              <a:srgbClr val="8A9099"/>
-            </a:solidFill>
-          </a:ln>
-          <a:effectLst/>
-        </p:spPr>
-        <p:style>
-          <a:lnRef idx="1">
-            <a:schemeClr val="accent1"/>
-          </a:lnRef>
-          <a:fillRef idx="3">
-            <a:schemeClr val="accent1"/>
-          </a:fillRef>
-          <a:effectRef idx="2">
-            <a:schemeClr val="accent1"/>
-          </a:effectRef>
-          <a:fontRef idx="minor">
-            <a:schemeClr val="lt1"/>
-          </a:fontRef>
-        </p:style>
-        <p:txBody>
-          <a:bodyPr rtlCol="0" anchor="ctr"/>
-          <a:lstStyle/>
-          <a:p/>
-        </p:txBody>
-      </p:sp>
-      <p:sp>
-        <p:nvSpPr>
-          <p:cNvPr id="24" name="TextBox 23"/>
-          <p:cNvSpPr txBox="1"/>
-          <p:nvPr/>
-        </p:nvSpPr>
-        <p:spPr>
-          <a:xfrm>
-            <a:off x="530352" y="3803904"/>
-            <a:ext cx="2154936" cy="274320"/>
-          </a:xfrm>
-          <a:prstGeom prst="rect">
-            <a:avLst/>
-          </a:prstGeom>
-          <a:noFill/>
-        </p:spPr>
-        <p:txBody>
-          <a:bodyPr wrap="square" lIns="36576" rIns="36576" tIns="18288" bIns="18288" anchor="t">
-            <a:spAutoFit/>
-          </a:bodyPr>
-          <a:lstStyle/>
-          <a:p>
-            <a:pPr algn="l">
-              <a:lnSpc>
-                <a:spcPct val="115000"/>
-              </a:lnSpc>
-            </a:pPr>
-            <a:r>
-              <a:rPr sz="1100" b="1">
-                <a:solidFill>
-                  <a:srgbClr val="0F1115"/>
-                </a:solidFill>
-                <a:latin typeface="PingFang SC"/>
-              </a:rPr>
-              <a:t>关系型数据库</a:t>
-            </a:r>
-            <a:r>
-              <a:rPr sz="850" b="1">
-                <a:solidFill>
-                  <a:srgbClr val="8A9099"/>
-                </a:solidFill>
-                <a:latin typeface="PingFang SC"/>
-              </a:rPr>
-              <a:t>  唯一真相</a:t>
-            </a:r>
-          </a:p>
-        </p:txBody>
-      </p:sp>
-      <p:sp>
-        <p:nvSpPr>
-          <p:cNvPr id="25" name="TextBox 24"/>
-          <p:cNvSpPr txBox="1"/>
-          <p:nvPr/>
-        </p:nvSpPr>
-        <p:spPr>
-          <a:xfrm>
-            <a:off x="530352" y="4059936"/>
-            <a:ext cx="2154936" cy="914400"/>
-          </a:xfrm>
-          <a:prstGeom prst="rect">
-            <a:avLst/>
-          </a:prstGeom>
-          <a:noFill/>
-        </p:spPr>
-        <p:txBody>
-          <a:bodyPr wrap="square" lIns="36576" rIns="36576" tIns="18288" bIns="18288" anchor="t">
-            <a:spAutoFit/>
-          </a:bodyPr>
-          <a:lstStyle/>
-          <a:p>
-            <a:pPr algn="l">
-              <a:lnSpc>
-                <a:spcPct val="112000"/>
-              </a:lnSpc>
-            </a:pPr>
-            <a:r>
-              <a:rPr sz="830" b="0">
-                <a:solidFill>
-                  <a:srgbClr val="61666B"/>
-                </a:solidFill>
-                <a:latin typeface="PingFang SC"/>
-              </a:rPr>
-              <a:t>· 文档 · 版本 · 条款卡 / 处置卡 / 案例卡</a:t>
-            </a:r>
-          </a:p>
-          <a:p>
-            <a:pPr algn="l">
-              <a:lnSpc>
-                <a:spcPct val="112000"/>
-              </a:lnSpc>
-            </a:pPr>
-            <a:r>
-              <a:rPr sz="830" b="0">
-                <a:solidFill>
-                  <a:srgbClr val="61666B"/>
-                </a:solidFill>
-                <a:latin typeface="PingFang SC"/>
-              </a:rPr>
-              <a:t>· 记忆系统：平台在客户环境里做过什么</a:t>
-            </a:r>
-          </a:p>
-          <a:p>
-            <a:pPr algn="l">
-              <a:lnSpc>
-                <a:spcPct val="112000"/>
-              </a:lnSpc>
-            </a:pPr>
-            <a:r>
-              <a:rPr sz="830" b="0">
-                <a:solidFill>
-                  <a:srgbClr val="61666B"/>
-                </a:solidFill>
-                <a:latin typeface="PingFang SC"/>
-              </a:rPr>
-              <a:t>· 引用台账：哪条结论引用了哪一版哪一条</a:t>
-            </a:r>
-          </a:p>
-          <a:p>
-            <a:pPr algn="l">
-              <a:lnSpc>
-                <a:spcPct val="112000"/>
-              </a:lnSpc>
-            </a:pPr>
-            <a:r>
-              <a:rPr sz="830" b="0">
-                <a:solidFill>
-                  <a:srgbClr val="61666B"/>
-                </a:solidFill>
-                <a:latin typeface="PingFang SC"/>
-              </a:rPr>
-              <a:t>· 精确过滤：引擎 · 环境 · 生效期 · 权限</a:t>
-            </a:r>
-          </a:p>
-        </p:txBody>
-      </p:sp>
-      <p:sp>
-        <p:nvSpPr>
-          <p:cNvPr id="26" name="Rounded Rectangle 25"/>
-          <p:cNvSpPr/>
-          <p:nvPr/>
-        </p:nvSpPr>
-        <p:spPr>
-          <a:xfrm>
-            <a:off x="3032760" y="3767328"/>
-            <a:ext cx="2301240" cy="1243584"/>
-          </a:xfrm>
-          <a:prstGeom prst="roundRect">
-            <a:avLst>
-              <a:gd name="adj" fmla="val 8000"/>
-            </a:avLst>
-          </a:prstGeom>
-          <a:solidFill>
-            <a:srgbClr val="FDF0E3"/>
-          </a:solidFill>
-          <a:ln w="15875">
-            <a:solidFill>
-              <a:srgbClr val="C9862D"/>
-            </a:solidFill>
-          </a:ln>
-          <a:effectLst/>
-        </p:spPr>
-        <p:style>
-          <a:lnRef idx="1">
-            <a:schemeClr val="accent1"/>
-          </a:lnRef>
-          <a:fillRef idx="3">
-            <a:schemeClr val="accent1"/>
-          </a:fillRef>
-          <a:effectRef idx="2">
-            <a:schemeClr val="accent1"/>
-          </a:effectRef>
-          <a:fontRef idx="minor">
-            <a:schemeClr val="lt1"/>
-          </a:fontRef>
-        </p:style>
-        <p:txBody>
-          <a:bodyPr rtlCol="0" anchor="ctr"/>
-          <a:lstStyle/>
-          <a:p/>
-        </p:txBody>
-      </p:sp>
-      <p:sp>
-        <p:nvSpPr>
-          <p:cNvPr id="27" name="TextBox 26"/>
-          <p:cNvSpPr txBox="1"/>
-          <p:nvPr/>
-        </p:nvSpPr>
-        <p:spPr>
-          <a:xfrm>
-            <a:off x="3105912" y="3803904"/>
-            <a:ext cx="2154936" cy="274320"/>
-          </a:xfrm>
-          <a:prstGeom prst="rect">
-            <a:avLst/>
-          </a:prstGeom>
-          <a:noFill/>
-        </p:spPr>
-        <p:txBody>
-          <a:bodyPr wrap="square" lIns="36576" rIns="36576" tIns="18288" bIns="18288" anchor="t">
-            <a:spAutoFit/>
-          </a:bodyPr>
-          <a:lstStyle/>
-          <a:p>
-            <a:pPr algn="l">
-              <a:lnSpc>
-                <a:spcPct val="115000"/>
-              </a:lnSpc>
-            </a:pPr>
-            <a:r>
-              <a:rPr sz="1100" b="1">
-                <a:solidFill>
-                  <a:srgbClr val="0F1115"/>
-                </a:solidFill>
-                <a:latin typeface="PingFang SC"/>
-              </a:rPr>
-              <a:t>向量数据库</a:t>
-            </a:r>
-            <a:r>
-              <a:rPr sz="850" b="1">
-                <a:solidFill>
-                  <a:srgbClr val="C9862D"/>
-                </a:solidFill>
-                <a:latin typeface="PingFang SC"/>
-              </a:rPr>
-              <a:t>  语义召回</a:t>
-            </a:r>
-          </a:p>
-        </p:txBody>
-      </p:sp>
-      <p:sp>
-        <p:nvSpPr>
-          <p:cNvPr id="28" name="TextBox 27"/>
-          <p:cNvSpPr txBox="1"/>
-          <p:nvPr/>
-        </p:nvSpPr>
-        <p:spPr>
-          <a:xfrm>
-            <a:off x="3105912" y="4059936"/>
-            <a:ext cx="2154936" cy="914400"/>
-          </a:xfrm>
-          <a:prstGeom prst="rect">
-            <a:avLst/>
-          </a:prstGeom>
-          <a:noFill/>
-        </p:spPr>
-        <p:txBody>
-          <a:bodyPr wrap="square" lIns="36576" rIns="36576" tIns="18288" bIns="18288" anchor="t">
-            <a:spAutoFit/>
-          </a:bodyPr>
-          <a:lstStyle/>
-          <a:p>
-            <a:pPr algn="l">
-              <a:lnSpc>
-                <a:spcPct val="112000"/>
-              </a:lnSpc>
-            </a:pPr>
-            <a:r>
-              <a:rPr sz="830" b="0">
-                <a:solidFill>
-                  <a:srgbClr val="61666B"/>
-                </a:solidFill>
-                <a:latin typeface="PingFang SC"/>
-              </a:rPr>
-              <a:t>· 切块与卡片的向量索引，规模化近邻检索</a:t>
-            </a:r>
-          </a:p>
-          <a:p>
-            <a:pPr algn="l">
-              <a:lnSpc>
-                <a:spcPct val="112000"/>
-              </a:lnSpc>
-            </a:pPr>
-            <a:r>
-              <a:rPr sz="830" b="0">
-                <a:solidFill>
-                  <a:srgbClr val="61666B"/>
-                </a:solidFill>
-                <a:latin typeface="PingFang SC"/>
-              </a:rPr>
-              <a:t>· 解决"说法不同、意思相同"的召回</a:t>
-            </a:r>
-          </a:p>
-          <a:p>
-            <a:pPr algn="l">
-              <a:lnSpc>
-                <a:spcPct val="112000"/>
-              </a:lnSpc>
-            </a:pPr>
-            <a:r>
-              <a:rPr sz="830" b="0">
-                <a:solidFill>
-                  <a:srgbClr val="61666B"/>
-                </a:solidFill>
-                <a:latin typeface="PingFang SC"/>
-              </a:rPr>
-              <a:t>· 客户说"连接打满" ↔ 平台判"连接超阈值"</a:t>
-            </a:r>
-          </a:p>
-          <a:p>
-            <a:pPr algn="l">
-              <a:lnSpc>
-                <a:spcPct val="112000"/>
-              </a:lnSpc>
-            </a:pPr>
-            <a:r>
-              <a:rPr sz="830" b="0">
-                <a:solidFill>
-                  <a:srgbClr val="61666B"/>
-                </a:solidFill>
-                <a:latin typeface="PingFang SC"/>
-              </a:rPr>
-              <a:t>· 不存业务事实——只加速，可随时重建</a:t>
-            </a:r>
-          </a:p>
-        </p:txBody>
-      </p:sp>
-      <p:sp>
-        <p:nvSpPr>
-          <p:cNvPr id="29" name="Rounded Rectangle 28"/>
-          <p:cNvSpPr/>
-          <p:nvPr/>
-        </p:nvSpPr>
-        <p:spPr>
-          <a:xfrm>
-            <a:off x="5608320" y="3767328"/>
-            <a:ext cx="2301240" cy="1243584"/>
-          </a:xfrm>
-          <a:prstGeom prst="roundRect">
-            <a:avLst>
-              <a:gd name="adj" fmla="val 8000"/>
-            </a:avLst>
-          </a:prstGeom>
-          <a:solidFill>
-            <a:srgbClr val="F3EEFC"/>
-          </a:solidFill>
-          <a:ln w="15875">
-            <a:solidFill>
-              <a:srgbClr val="8B6BE0"/>
-            </a:solidFill>
-          </a:ln>
-          <a:effectLst/>
-        </p:spPr>
-        <p:style>
-          <a:lnRef idx="1">
-            <a:schemeClr val="accent1"/>
-          </a:lnRef>
-          <a:fillRef idx="3">
-            <a:schemeClr val="accent1"/>
-          </a:fillRef>
-          <a:effectRef idx="2">
-            <a:schemeClr val="accent1"/>
-          </a:effectRef>
-          <a:fontRef idx="minor">
-            <a:schemeClr val="lt1"/>
-          </a:fontRef>
-        </p:style>
-        <p:txBody>
-          <a:bodyPr rtlCol="0" anchor="ctr"/>
-          <a:lstStyle/>
-          <a:p/>
-        </p:txBody>
-      </p:sp>
-      <p:sp>
-        <p:nvSpPr>
-          <p:cNvPr id="30" name="TextBox 29"/>
-          <p:cNvSpPr txBox="1"/>
-          <p:nvPr/>
-        </p:nvSpPr>
-        <p:spPr>
-          <a:xfrm>
-            <a:off x="5681472" y="3803904"/>
-            <a:ext cx="2154936" cy="274320"/>
-          </a:xfrm>
-          <a:prstGeom prst="rect">
-            <a:avLst/>
-          </a:prstGeom>
-          <a:noFill/>
-        </p:spPr>
-        <p:txBody>
-          <a:bodyPr wrap="square" lIns="36576" rIns="36576" tIns="18288" bIns="18288" anchor="t">
-            <a:spAutoFit/>
-          </a:bodyPr>
-          <a:lstStyle/>
-          <a:p>
-            <a:pPr algn="l">
-              <a:lnSpc>
-                <a:spcPct val="115000"/>
-              </a:lnSpc>
-            </a:pPr>
-            <a:r>
-              <a:rPr sz="1100" b="1">
-                <a:solidFill>
-                  <a:srgbClr val="0F1115"/>
-                </a:solidFill>
-                <a:latin typeface="PingFang SC"/>
-              </a:rPr>
-              <a:t>图数据库</a:t>
-            </a:r>
-            <a:r>
-              <a:rPr sz="850" b="1">
-                <a:solidFill>
-                  <a:srgbClr val="8B6BE0"/>
-                </a:solidFill>
-                <a:latin typeface="PingFang SC"/>
-              </a:rPr>
-              <a:t>  关系推理</a:t>
-            </a:r>
-          </a:p>
-        </p:txBody>
-      </p:sp>
-      <p:sp>
-        <p:nvSpPr>
-          <p:cNvPr id="31" name="TextBox 30"/>
-          <p:cNvSpPr txBox="1"/>
-          <p:nvPr/>
-        </p:nvSpPr>
-        <p:spPr>
-          <a:xfrm>
-            <a:off x="5681472" y="4059936"/>
-            <a:ext cx="2154936" cy="914400"/>
-          </a:xfrm>
-          <a:prstGeom prst="rect">
-            <a:avLst/>
-          </a:prstGeom>
-          <a:noFill/>
-        </p:spPr>
-        <p:txBody>
-          <a:bodyPr wrap="square" lIns="36576" rIns="36576" tIns="18288" bIns="18288" anchor="t">
-            <a:spAutoFit/>
-          </a:bodyPr>
-          <a:lstStyle/>
-          <a:p>
-            <a:pPr algn="l">
-              <a:lnSpc>
-                <a:spcPct val="112000"/>
-              </a:lnSpc>
-            </a:pPr>
-            <a:r>
-              <a:rPr sz="830" b="0">
-                <a:solidFill>
-                  <a:srgbClr val="61666B"/>
-                </a:solidFill>
-                <a:latin typeface="PingFang SC"/>
-              </a:rPr>
-              <a:t>· 实体：对象 · 现象 · 根因 · 处置动作 · 条款</a:t>
-            </a:r>
-          </a:p>
-          <a:p>
-            <a:pPr algn="l">
-              <a:lnSpc>
-                <a:spcPct val="112000"/>
-              </a:lnSpc>
-            </a:pPr>
-            <a:r>
-              <a:rPr sz="830" b="0">
-                <a:solidFill>
-                  <a:srgbClr val="61666B"/>
-                </a:solidFill>
-                <a:latin typeface="PingFang SC"/>
-              </a:rPr>
-              <a:t>· 边：现象→根因→处置、条款→约束对象</a:t>
-            </a:r>
-          </a:p>
-          <a:p>
-            <a:pPr algn="l">
-              <a:lnSpc>
-                <a:spcPct val="112000"/>
-              </a:lnSpc>
-            </a:pPr>
-            <a:r>
-              <a:rPr sz="830" b="0">
-                <a:solidFill>
-                  <a:srgbClr val="61666B"/>
-                </a:solidFill>
-                <a:latin typeface="PingFang SC"/>
-              </a:rPr>
-              <a:t>· 案例→引用条款、故障→涉及节点</a:t>
-            </a:r>
-          </a:p>
-          <a:p>
-            <a:pPr algn="l">
-              <a:lnSpc>
-                <a:spcPct val="112000"/>
-              </a:lnSpc>
-            </a:pPr>
-            <a:r>
-              <a:rPr sz="830" b="0">
-                <a:solidFill>
-                  <a:srgbClr val="61666B"/>
-                </a:solidFill>
-                <a:latin typeface="PingFang SC"/>
-              </a:rPr>
-              <a:t>· 多跳串联：一条结论牵出规范与历史全链</a:t>
-            </a:r>
-          </a:p>
-        </p:txBody>
-      </p:sp>
-      <p:cxnSp>
-        <p:nvCxnSpPr>
-          <p:cNvPr id="32" name="Connector 31"/>
-          <p:cNvCxnSpPr/>
-          <p:nvPr/>
-        </p:nvCxnSpPr>
-        <p:spPr>
-          <a:xfrm>
-            <a:off x="2758440" y="4389120"/>
-            <a:ext cx="274320" cy="0"/>
-          </a:xfrm>
-          <a:prstGeom prst="line">
-            <a:avLst/>
-          </a:prstGeom>
-          <a:ln w="16510">
-            <a:solidFill>
-              <a:srgbClr val="C9862D"/>
-            </a:solidFill>
-            <a:headEnd type="triangle" w="med" len="med"/>
-            <a:tailEnd type="triangle" w="med" len="med"/>
-          </a:ln>
-        </p:spPr>
-        <p:style>
-          <a:lnRef idx="2">
-            <a:schemeClr val="accent1"/>
-          </a:lnRef>
-          <a:fillRef idx="0">
-            <a:schemeClr val="accent1"/>
-          </a:fillRef>
-          <a:effectRef idx="1">
-            <a:schemeClr val="accent1"/>
-          </a:effectRef>
-          <a:fontRef idx="minor">
-            <a:schemeClr val="tx1"/>
-          </a:fontRef>
-        </p:style>
-      </p:cxnSp>
-      <p:cxnSp>
-        <p:nvCxnSpPr>
-          <p:cNvPr id="33" name="Connector 32"/>
-          <p:cNvCxnSpPr/>
-          <p:nvPr/>
-        </p:nvCxnSpPr>
-        <p:spPr>
-          <a:xfrm>
-            <a:off x="5334000" y="4389120"/>
-            <a:ext cx="274320" cy="0"/>
-          </a:xfrm>
-          <a:prstGeom prst="line">
-            <a:avLst/>
-          </a:prstGeom>
-          <a:ln w="16510">
-            <a:solidFill>
-              <a:srgbClr val="8B6BE0"/>
-            </a:solidFill>
-            <a:headEnd type="triangle" w="med" len="med"/>
-            <a:tailEnd type="triangle" w="med" len="med"/>
-          </a:ln>
-        </p:spPr>
-        <p:style>
-          <a:lnRef idx="2">
-            <a:schemeClr val="accent1"/>
-          </a:lnRef>
-          <a:fillRef idx="0">
-            <a:schemeClr val="accent1"/>
-          </a:fillRef>
-          <a:effectRef idx="1">
-            <a:schemeClr val="accent1"/>
-          </a:effectRef>
-          <a:fontRef idx="minor">
-            <a:schemeClr val="tx1"/>
-          </a:fontRef>
-        </p:style>
-      </p:cxnSp>
-      <p:sp>
-        <p:nvSpPr>
-          <p:cNvPr id="34" name="TextBox 33"/>
-          <p:cNvSpPr txBox="1"/>
-          <p:nvPr/>
-        </p:nvSpPr>
-        <p:spPr>
-          <a:xfrm>
-            <a:off x="2209800" y="5038344"/>
-            <a:ext cx="1371600" cy="146304"/>
-          </a:xfrm>
-          <a:prstGeom prst="rect">
-            <a:avLst/>
-          </a:prstGeom>
-          <a:noFill/>
-        </p:spPr>
-        <p:txBody>
-          <a:bodyPr wrap="square" lIns="36576" rIns="36576" tIns="0" bIns="0" anchor="ctr">
-            <a:spAutoFit/>
-          </a:bodyPr>
-          <a:lstStyle/>
-          <a:p>
-            <a:pPr algn="ctr">
-              <a:lnSpc>
-                <a:spcPct val="115000"/>
-              </a:lnSpc>
-            </a:pPr>
-            <a:r>
-              <a:rPr sz="750" b="0">
-                <a:solidFill>
-                  <a:srgbClr val="C9862D"/>
-                </a:solidFill>
-                <a:latin typeface="PingFang SC"/>
-              </a:rPr>
-              <a:t>同步向量 / 回表取原文</a:t>
-            </a:r>
-          </a:p>
-        </p:txBody>
-      </p:sp>
-      <p:sp>
-        <p:nvSpPr>
-          <p:cNvPr id="35" name="TextBox 34"/>
-          <p:cNvSpPr txBox="1"/>
-          <p:nvPr/>
-        </p:nvSpPr>
-        <p:spPr>
-          <a:xfrm>
-            <a:off x="4739640" y="5038344"/>
-            <a:ext cx="1463040" cy="146304"/>
-          </a:xfrm>
-          <a:prstGeom prst="rect">
-            <a:avLst/>
-          </a:prstGeom>
-          <a:noFill/>
-        </p:spPr>
-        <p:txBody>
-          <a:bodyPr wrap="square" lIns="36576" rIns="36576" tIns="0" bIns="0" anchor="ctr">
-            <a:spAutoFit/>
-          </a:bodyPr>
-          <a:lstStyle/>
-          <a:p>
-            <a:pPr algn="ctr">
-              <a:lnSpc>
-                <a:spcPct val="115000"/>
-              </a:lnSpc>
-            </a:pPr>
-            <a:r>
-              <a:rPr sz="750" b="0">
-                <a:solidFill>
-                  <a:srgbClr val="8B6BE0"/>
-                </a:solidFill>
-                <a:latin typeface="PingFang SC"/>
-              </a:rPr>
-              <a:t>抽实体与边 / 回表取证据</a:t>
-            </a:r>
-          </a:p>
-        </p:txBody>
-      </p:sp>
-      <p:sp>
-        <p:nvSpPr>
-          <p:cNvPr id="36" name="Rounded Rectangle 35"/>
-          <p:cNvSpPr/>
-          <p:nvPr/>
-        </p:nvSpPr>
-        <p:spPr>
-          <a:xfrm>
-            <a:off x="457200" y="5230368"/>
-            <a:ext cx="7452360" cy="530352"/>
-          </a:xfrm>
-          <a:prstGeom prst="roundRect">
-            <a:avLst>
-              <a:gd name="adj" fmla="val 8000"/>
-            </a:avLst>
-          </a:prstGeom>
-          <a:solidFill>
-            <a:srgbClr val="EEF3FF"/>
-          </a:solidFill>
-          <a:ln w="15875">
-            <a:solidFill>
-              <a:srgbClr val="4176E6"/>
-            </a:solidFill>
-          </a:ln>
-          <a:effectLst/>
-        </p:spPr>
-        <p:style>
-          <a:lnRef idx="1">
-            <a:schemeClr val="accent1"/>
-          </a:lnRef>
-          <a:fillRef idx="3">
-            <a:schemeClr val="accent1"/>
-          </a:fillRef>
-          <a:effectRef idx="2">
-            <a:schemeClr val="accent1"/>
-          </a:effectRef>
-          <a:fontRef idx="minor">
-            <a:schemeClr val="lt1"/>
-          </a:fontRef>
-        </p:style>
-        <p:txBody>
-          <a:bodyPr rtlCol="0" anchor="ctr"/>
-          <a:lstStyle/>
-          <a:p/>
-        </p:txBody>
-      </p:sp>
-      <p:sp>
-        <p:nvSpPr>
-          <p:cNvPr id="37" name="TextBox 36"/>
-          <p:cNvSpPr txBox="1"/>
-          <p:nvPr/>
-        </p:nvSpPr>
-        <p:spPr>
-          <a:xfrm>
-            <a:off x="530352" y="5266944"/>
-            <a:ext cx="7306056" cy="274320"/>
-          </a:xfrm>
-          <a:prstGeom prst="rect">
-            <a:avLst/>
-          </a:prstGeom>
-          <a:noFill/>
-        </p:spPr>
-        <p:txBody>
-          <a:bodyPr wrap="square" lIns="36576" rIns="36576" tIns="18288" bIns="18288" anchor="t">
-            <a:spAutoFit/>
-          </a:bodyPr>
-          <a:lstStyle/>
-          <a:p>
-            <a:pPr algn="l">
-              <a:lnSpc>
-                <a:spcPct val="115000"/>
-              </a:lnSpc>
-            </a:pPr>
-            <a:r>
-              <a:rPr sz="1100" b="1">
-                <a:solidFill>
-                  <a:srgbClr val="0F1115"/>
-                </a:solidFill>
-                <a:latin typeface="PingFang SC"/>
-              </a:rPr>
-              <a:t>⑤ 混合检索编排（由平台按"发现"发起，不靠模型自己想起来查）</a:t>
-            </a:r>
-            <a:r>
-              <a:rPr sz="850" b="1">
-                <a:solidFill>
-                  <a:srgbClr val="4176E6"/>
-                </a:solidFill>
-                <a:latin typeface="PingFang SC"/>
-              </a:rPr>
-              <a:t>  语义 + 词法 + 结构过滤 + 图扩展 → 重排</a:t>
-            </a:r>
-          </a:p>
-        </p:txBody>
-      </p:sp>
-      <p:sp>
-        <p:nvSpPr>
-          <p:cNvPr id="38" name="TextBox 37"/>
-          <p:cNvSpPr txBox="1"/>
-          <p:nvPr/>
-        </p:nvSpPr>
-        <p:spPr>
-          <a:xfrm>
-            <a:off x="530352" y="5522976"/>
-            <a:ext cx="7306056" cy="201167"/>
-          </a:xfrm>
-          <a:prstGeom prst="rect">
-            <a:avLst/>
-          </a:prstGeom>
-          <a:noFill/>
-        </p:spPr>
-        <p:txBody>
-          <a:bodyPr wrap="square" lIns="36576" rIns="36576" tIns="18288" bIns="18288" anchor="t">
-            <a:spAutoFit/>
-          </a:bodyPr>
-          <a:lstStyle/>
-          <a:p>
-            <a:pPr algn="l">
-              <a:lnSpc>
-                <a:spcPct val="112000"/>
-              </a:lnSpc>
-            </a:pPr>
-            <a:r>
-              <a:rPr sz="860" b="0">
-                <a:solidFill>
-                  <a:srgbClr val="61666B"/>
-                </a:solidFill>
-                <a:latin typeface="PingFang SC"/>
-              </a:rPr>
-              <a:t>· 检索键 = 规则码 + 对象 + 现象词：语义召回近义说法、词法精确命中错误码与对象名、按引擎/环境/生效期过滤、再沿图扩展到根因与历史处置</a:t>
-            </a:r>
-          </a:p>
-        </p:txBody>
-      </p:sp>
-      <p:sp>
-        <p:nvSpPr>
-          <p:cNvPr id="39" name="Rounded Rectangle 38"/>
-          <p:cNvSpPr/>
-          <p:nvPr/>
-        </p:nvSpPr>
-        <p:spPr>
-          <a:xfrm>
-            <a:off x="457200" y="5870448"/>
-            <a:ext cx="7452360" cy="786384"/>
+            <a:off x="457200" y="5266944"/>
+            <a:ext cx="6858000" cy="530352"/>
           </a:xfrm>
           <a:prstGeom prst="roundRect">
             <a:avLst>
@@ -4936,14 +4661,14 @@
       </p:sp>
       <p:sp>
         <p:nvSpPr>
-          <p:cNvPr id="40" name="TextBox 39"/>
+          <p:cNvPr id="35" name="TextBox 34"/>
           <p:cNvSpPr txBox="1"/>
           <p:nvPr/>
         </p:nvSpPr>
         <p:spPr>
           <a:xfrm>
-            <a:off x="530352" y="5907024"/>
-            <a:ext cx="7306056" cy="274320"/>
+            <a:off x="530352" y="5303520"/>
+            <a:ext cx="6711696" cy="274320"/>
           </a:xfrm>
           <a:prstGeom prst="rect">
             <a:avLst/>
@@ -4962,36 +4687,36 @@
               </a:lnSpc>
             </a:pPr>
             <a:r>
-              <a:rPr sz="1100" b="1">
+              <a:rPr sz="1150" b="1">
                 <a:solidFill>
                   <a:srgbClr val="0F1115"/>
                 </a:solidFill>
                 <a:latin typeface="PingFang SC"/>
               </a:rPr>
-              <a:t>⑥ 用在哪：贴到平台每一条确定性结论旁</a:t>
-            </a:r>
-            <a:r>
-              <a:rPr sz="850" b="1">
+              <a:t>⑤ 越用越懂</a:t>
+            </a:r>
+            <a:r>
+              <a:rPr sz="900" b="1">
                 <a:solidFill>
                   <a:srgbClr val="B8BCC4"/>
                 </a:solidFill>
                 <a:latin typeface="PingFang SC"/>
               </a:rPr>
-              <a:t>  引用必须有出处 · 查不到就写"无对应规范"，绝不编造</a:t>
-            </a:r>
-          </a:p>
-        </p:txBody>
-      </p:sp>
-      <p:sp>
-        <p:nvSpPr>
-          <p:cNvPr id="41" name="TextBox 40"/>
+              <a:t>  缺口驱动</a:t>
+            </a:r>
+          </a:p>
+        </p:txBody>
+      </p:sp>
+      <p:sp>
+        <p:nvSpPr>
+          <p:cNvPr id="36" name="TextBox 35"/>
           <p:cNvSpPr txBox="1"/>
           <p:nvPr/>
         </p:nvSpPr>
         <p:spPr>
           <a:xfrm>
-            <a:off x="566928" y="6181344"/>
-            <a:ext cx="1780794" cy="420624"/>
+            <a:off x="530352" y="5559552"/>
+            <a:ext cx="6711696" cy="201167"/>
           </a:xfrm>
           <a:prstGeom prst="rect">
             <a:avLst/>
@@ -5006,211 +4731,30 @@
           <a:p>
             <a:pPr algn="l">
               <a:lnSpc>
-                <a:spcPct val="110000"/>
+                <a:spcPct val="114000"/>
               </a:lnSpc>
             </a:pPr>
             <a:r>
-              <a:rPr sz="900" b="1">
-                <a:solidFill>
-                  <a:srgbClr val="0F1115"/>
-                </a:solidFill>
-                <a:latin typeface="PingFang SC"/>
-              </a:rPr>
-              <a:t>规范对照</a:t>
-            </a:r>
-          </a:p>
-          <a:p>
-            <a:pPr algn="l">
-              <a:lnSpc>
-                <a:spcPct val="110000"/>
-              </a:lnSpc>
-            </a:pPr>
-            <a:r>
-              <a:rPr sz="800" b="0">
+              <a:rPr sz="880" b="0">
                 <a:solidFill>
                   <a:srgbClr val="61666B"/>
                 </a:solidFill>
                 <a:latin typeface="PingFang SC"/>
               </a:rPr>
-              <a:t>结论旁引用条款原文（参考不改判）</a:t>
-            </a:r>
-          </a:p>
-        </p:txBody>
-      </p:sp>
-      <p:sp>
-        <p:nvSpPr>
-          <p:cNvPr id="42" name="TextBox 41"/>
-          <p:cNvSpPr txBox="1"/>
-          <p:nvPr/>
-        </p:nvSpPr>
-        <p:spPr>
-          <a:xfrm>
-            <a:off x="2384298" y="6181344"/>
-            <a:ext cx="1780794" cy="420624"/>
-          </a:xfrm>
-          <a:prstGeom prst="rect">
-            <a:avLst/>
-          </a:prstGeom>
-          <a:noFill/>
-        </p:spPr>
-        <p:txBody>
-          <a:bodyPr wrap="square" lIns="36576" rIns="36576" tIns="18288" bIns="18288" anchor="t">
-            <a:spAutoFit/>
-          </a:bodyPr>
-          <a:lstStyle/>
-          <a:p>
-            <a:pPr algn="l">
-              <a:lnSpc>
-                <a:spcPct val="110000"/>
-              </a:lnSpc>
-            </a:pPr>
-            <a:r>
-              <a:rPr sz="900" b="1">
-                <a:solidFill>
-                  <a:srgbClr val="0F1115"/>
-                </a:solidFill>
-                <a:latin typeface="PingFang SC"/>
-              </a:rPr>
-              <a:t>建议本地化</a:t>
-            </a:r>
-          </a:p>
-          <a:p>
-            <a:pPr algn="l">
-              <a:lnSpc>
-                <a:spcPct val="110000"/>
-              </a:lnSpc>
-            </a:pPr>
-            <a:r>
-              <a:rPr sz="800" b="0">
-                <a:solidFill>
-                  <a:srgbClr val="61666B"/>
-                </a:solidFill>
-                <a:latin typeface="PingFang SC"/>
-              </a:rPr>
-              <a:t>按客户流程改写处置建议</a:t>
-            </a:r>
-          </a:p>
-        </p:txBody>
-      </p:sp>
-      <p:sp>
-        <p:nvSpPr>
-          <p:cNvPr id="43" name="TextBox 42"/>
-          <p:cNvSpPr txBox="1"/>
-          <p:nvPr/>
-        </p:nvSpPr>
-        <p:spPr>
-          <a:xfrm>
-            <a:off x="4201668" y="6181344"/>
-            <a:ext cx="1780794" cy="420624"/>
-          </a:xfrm>
-          <a:prstGeom prst="rect">
-            <a:avLst/>
-          </a:prstGeom>
-          <a:noFill/>
-        </p:spPr>
-        <p:txBody>
-          <a:bodyPr wrap="square" lIns="36576" rIns="36576" tIns="18288" bIns="18288" anchor="t">
-            <a:spAutoFit/>
-          </a:bodyPr>
-          <a:lstStyle/>
-          <a:p>
-            <a:pPr algn="l">
-              <a:lnSpc>
-                <a:spcPct val="110000"/>
-              </a:lnSpc>
-            </a:pPr>
-            <a:r>
-              <a:rPr sz="900" b="1">
-                <a:solidFill>
-                  <a:srgbClr val="0F1115"/>
-                </a:solidFill>
-                <a:latin typeface="PingFang SC"/>
-              </a:rPr>
-              <a:t>阈值对齐</a:t>
-            </a:r>
-          </a:p>
-          <a:p>
-            <a:pPr algn="l">
-              <a:lnSpc>
-                <a:spcPct val="110000"/>
-              </a:lnSpc>
-            </a:pPr>
-            <a:r>
-              <a:rPr sz="800" b="0">
-                <a:solidFill>
-                  <a:srgbClr val="61666B"/>
-                </a:solidFill>
-                <a:latin typeface="PingFang SC"/>
-              </a:rPr>
-              <a:t>口径差异清单 → 人确认后生效</a:t>
-            </a:r>
-          </a:p>
-        </p:txBody>
-      </p:sp>
-      <p:sp>
-        <p:nvSpPr>
-          <p:cNvPr id="44" name="TextBox 43"/>
-          <p:cNvSpPr txBox="1"/>
-          <p:nvPr/>
-        </p:nvSpPr>
-        <p:spPr>
-          <a:xfrm>
-            <a:off x="6019038" y="6181344"/>
-            <a:ext cx="1780794" cy="420624"/>
-          </a:xfrm>
-          <a:prstGeom prst="rect">
-            <a:avLst/>
-          </a:prstGeom>
-          <a:noFill/>
-        </p:spPr>
-        <p:txBody>
-          <a:bodyPr wrap="square" lIns="36576" rIns="36576" tIns="18288" bIns="18288" anchor="t">
-            <a:spAutoFit/>
-          </a:bodyPr>
-          <a:lstStyle/>
-          <a:p>
-            <a:pPr algn="l">
-              <a:lnSpc>
-                <a:spcPct val="110000"/>
-              </a:lnSpc>
-            </a:pPr>
-            <a:r>
-              <a:rPr sz="900" b="1">
-                <a:solidFill>
-                  <a:srgbClr val="0F1115"/>
-                </a:solidFill>
-                <a:latin typeface="PingFang SC"/>
-              </a:rPr>
-              <a:t>案例复用</a:t>
-            </a:r>
-          </a:p>
-          <a:p>
-            <a:pPr algn="l">
-              <a:lnSpc>
-                <a:spcPct val="110000"/>
-              </a:lnSpc>
-            </a:pPr>
-            <a:r>
-              <a:rPr sz="800" b="0">
-                <a:solidFill>
-                  <a:srgbClr val="61666B"/>
-                </a:solidFill>
-                <a:latin typeface="PingFang SC"/>
-              </a:rPr>
-              <a:t>相似历史故障的处置与耗时</a:t>
+              <a:t>· 查不到规范的发现自动排队提示补料；DBA 点"有用 / 无关"回写排序权重</a:t>
             </a:r>
           </a:p>
         </p:txBody>
       </p:sp>
       <p:cxnSp>
         <p:nvCxnSpPr>
-          <p:cNvPr id="45" name="Connector 44"/>
+          <p:cNvPr id="37" name="Connector 36"/>
           <p:cNvCxnSpPr/>
           <p:nvPr/>
         </p:nvCxnSpPr>
         <p:spPr>
           <a:xfrm>
-            <a:off x="4183380" y="1645920"/>
+            <a:off x="3886200" y="1591056"/>
             <a:ext cx="0" cy="201168"/>
           </a:xfrm>
           <a:prstGeom prst="line">
@@ -5240,14 +4784,14 @@
       </p:cxnSp>
       <p:cxnSp>
         <p:nvCxnSpPr>
-          <p:cNvPr id="46" name="Connector 45"/>
+          <p:cNvPr id="38" name="Connector 37"/>
           <p:cNvCxnSpPr/>
           <p:nvPr/>
         </p:nvCxnSpPr>
         <p:spPr>
           <a:xfrm>
-            <a:off x="4183380" y="2395728"/>
-            <a:ext cx="0" cy="201168"/>
+            <a:off x="3886200" y="2706624"/>
+            <a:ext cx="0" cy="274320"/>
           </a:xfrm>
           <a:prstGeom prst="line">
             <a:avLst/>
@@ -5276,21 +4820,21 @@
       </p:cxnSp>
       <p:cxnSp>
         <p:nvCxnSpPr>
-          <p:cNvPr id="47" name="Connector 46"/>
+          <p:cNvPr id="39" name="Connector 38"/>
           <p:cNvCxnSpPr/>
           <p:nvPr/>
         </p:nvCxnSpPr>
         <p:spPr>
           <a:xfrm>
-            <a:off x="4183380" y="3511296"/>
-            <a:ext cx="0" cy="256032"/>
+            <a:off x="3886200" y="4133087"/>
+            <a:ext cx="0" cy="310897"/>
           </a:xfrm>
           <a:prstGeom prst="line">
             <a:avLst/>
           </a:prstGeom>
           <a:ln w="15875">
             <a:solidFill>
-              <a:srgbClr val="61666B"/>
+              <a:srgbClr val="4176E6"/>
             </a:solidFill>
             <a:tailEnd type="triangle" w="med" len="med"/>
           </a:ln>
@@ -5312,13 +4856,13 @@
       </p:cxnSp>
       <p:cxnSp>
         <p:nvCxnSpPr>
-          <p:cNvPr id="48" name="Connector 47"/>
+          <p:cNvPr id="40" name="Connector 39"/>
           <p:cNvCxnSpPr/>
           <p:nvPr/>
         </p:nvCxnSpPr>
         <p:spPr>
           <a:xfrm>
-            <a:off x="4183380" y="5010912"/>
+            <a:off x="3886200" y="5047488"/>
             <a:ext cx="0" cy="219456"/>
           </a:xfrm>
           <a:prstGeom prst="line">
@@ -5326,7 +4870,7 @@
           </a:prstGeom>
           <a:ln w="15875">
             <a:solidFill>
-              <a:srgbClr val="4176E6"/>
+              <a:srgbClr val="61666B"/>
             </a:solidFill>
             <a:tailEnd type="triangle" w="med" len="med"/>
           </a:ln>
@@ -5346,52 +4890,158 @@
           </a:fontRef>
         </p:style>
       </p:cxnSp>
-      <p:cxnSp>
-        <p:nvCxnSpPr>
-          <p:cNvPr id="49" name="Connector 48"/>
-          <p:cNvCxnSpPr/>
+      <p:sp>
+        <p:nvSpPr>
+          <p:cNvPr id="41" name="Rounded Rectangle 40"/>
+          <p:cNvSpPr/>
           <p:nvPr/>
-        </p:nvCxnSpPr>
-        <p:spPr>
-          <a:xfrm>
-            <a:off x="4183380" y="5760720"/>
-            <a:ext cx="0" cy="109728"/>
-          </a:xfrm>
-          <a:prstGeom prst="line">
-            <a:avLst/>
-          </a:prstGeom>
-          <a:ln w="15875">
+        </p:nvSpPr>
+        <p:spPr>
+          <a:xfrm>
+            <a:off x="7543800" y="1005840"/>
+            <a:ext cx="4206240" cy="4791456"/>
+          </a:xfrm>
+          <a:prstGeom prst="roundRect">
+            <a:avLst>
+              <a:gd name="adj" fmla="val 3000"/>
+            </a:avLst>
+          </a:prstGeom>
+          <a:solidFill>
+            <a:srgbClr val="FFFFFF"/>
+          </a:solidFill>
+          <a:ln w="19050">
             <a:solidFill>
-              <a:srgbClr val="61666B"/>
+              <a:srgbClr val="4176E6"/>
             </a:solidFill>
-            <a:tailEnd type="triangle" w="med" len="med"/>
           </a:ln>
+          <a:effectLst/>
         </p:spPr>
         <p:style>
-          <a:lnRef idx="2">
+          <a:lnRef idx="1">
             <a:schemeClr val="accent1"/>
           </a:lnRef>
-          <a:fillRef idx="0">
+          <a:fillRef idx="3">
             <a:schemeClr val="accent1"/>
           </a:fillRef>
-          <a:effectRef idx="1">
+          <a:effectRef idx="2">
             <a:schemeClr val="accent1"/>
           </a:effectRef>
           <a:fontRef idx="minor">
-            <a:schemeClr val="tx1"/>
+            <a:schemeClr val="lt1"/>
           </a:fontRef>
         </p:style>
-      </p:cxnSp>
-      <p:sp>
-        <p:nvSpPr>
-          <p:cNvPr id="50" name="Rounded Rectangle 49"/>
+        <p:txBody>
+          <a:bodyPr rtlCol="0" anchor="ctr"/>
+          <a:lstStyle/>
+          <a:p>
+            <a:pPr algn="ctr"/>
+          </a:p>
+        </p:txBody>
+      </p:sp>
+      <p:sp>
+        <p:nvSpPr>
+          <p:cNvPr id="42" name="TextBox 41"/>
+          <p:cNvSpPr txBox="1"/>
+          <p:nvPr/>
+        </p:nvSpPr>
+        <p:spPr>
+          <a:xfrm>
+            <a:off x="7708392" y="1097280"/>
+            <a:ext cx="3877055" cy="329184"/>
+          </a:xfrm>
+          <a:prstGeom prst="rect">
+            <a:avLst/>
+          </a:prstGeom>
+          <a:noFill/>
+        </p:spPr>
+        <p:txBody>
+          <a:bodyPr wrap="square" lIns="36576" rIns="36576" tIns="18288" bIns="18288" anchor="t">
+            <a:spAutoFit/>
+          </a:bodyPr>
+          <a:lstStyle/>
+          <a:p>
+            <a:pPr algn="l">
+              <a:lnSpc>
+                <a:spcPct val="115000"/>
+              </a:lnSpc>
+            </a:pPr>
+            <a:r>
+              <a:rPr sz="1500" b="1">
+                <a:solidFill>
+                  <a:srgbClr val="0F1115"/>
+                </a:solidFill>
+                <a:latin typeface="PingFang SC"/>
+              </a:rPr>
+              <a:t>效果：最懂工行的那一版建议</a:t>
+            </a:r>
+          </a:p>
+        </p:txBody>
+      </p:sp>
+      <p:sp>
+        <p:nvSpPr>
+          <p:cNvPr id="43" name="TextBox 42"/>
+          <p:cNvSpPr txBox="1"/>
+          <p:nvPr/>
+        </p:nvSpPr>
+        <p:spPr>
+          <a:xfrm>
+            <a:off x="7708392" y="1444752"/>
+            <a:ext cx="3877055" cy="420624"/>
+          </a:xfrm>
+          <a:prstGeom prst="rect">
+            <a:avLst/>
+          </a:prstGeom>
+          <a:noFill/>
+        </p:spPr>
+        <p:txBody>
+          <a:bodyPr wrap="square" lIns="36576" rIns="36576" tIns="18288" bIns="18288" anchor="t">
+            <a:spAutoFit/>
+          </a:bodyPr>
+          <a:lstStyle/>
+          <a:p>
+            <a:pPr algn="l">
+              <a:lnSpc>
+                <a:spcPct val="120000"/>
+              </a:lnSpc>
+            </a:pPr>
+            <a:r>
+              <a:rPr sz="1050" b="1">
+                <a:solidFill>
+                  <a:srgbClr val="4176E6"/>
+                </a:solidFill>
+                <a:latin typeface="PingFang SC"/>
+              </a:rPr>
+              <a:t>知识库 = 工行多年 GaussDB 实战经验的结构化沉淀</a:t>
+            </a:r>
+          </a:p>
+          <a:p>
+            <a:pPr algn="l">
+              <a:lnSpc>
+                <a:spcPct val="120000"/>
+              </a:lnSpc>
+            </a:pPr>
+            <a:r>
+              <a:rPr sz="950" b="0">
+                <a:solidFill>
+                  <a:srgbClr val="61666B"/>
+                </a:solidFill>
+                <a:latin typeface="PingFang SC"/>
+              </a:rPr>
+              <a:t>平台判定仍归脚本，知识库负责"按工行的规矩和习惯"给方案</a:t>
+            </a:r>
+          </a:p>
+        </p:txBody>
+      </p:sp>
+      <p:sp>
+        <p:nvSpPr>
+          <p:cNvPr id="44" name="Rounded Rectangle 43"/>
           <p:cNvSpPr/>
           <p:nvPr/>
         </p:nvSpPr>
         <p:spPr>
           <a:xfrm>
-            <a:off x="8183879" y="1078992"/>
-            <a:ext cx="3566160" cy="5577840"/>
+            <a:off x="7708392" y="1965960"/>
+            <a:ext cx="3877055" cy="2011680"/>
           </a:xfrm>
           <a:prstGeom prst="roundRect">
             <a:avLst>
@@ -5399,7 +5049,7 @@
             </a:avLst>
           </a:prstGeom>
           <a:solidFill>
-            <a:srgbClr val="FFFFFF"/>
+            <a:srgbClr val="F7F8FA"/>
           </a:solidFill>
           <a:ln w="12700">
             <a:solidFill>
@@ -5432,14 +5082,14 @@
       </p:sp>
       <p:sp>
         <p:nvSpPr>
-          <p:cNvPr id="51" name="TextBox 50"/>
+          <p:cNvPr id="45" name="TextBox 44"/>
           <p:cNvSpPr txBox="1"/>
           <p:nvPr/>
         </p:nvSpPr>
         <p:spPr>
           <a:xfrm>
-            <a:off x="8321040" y="1152144"/>
-            <a:ext cx="3291840" cy="320040"/>
+            <a:off x="7781544" y="2020824"/>
+            <a:ext cx="2194560" cy="146304"/>
           </a:xfrm>
           <a:prstGeom prst="rect">
             <a:avLst/>
@@ -5447,7 +5097,7 @@
           <a:noFill/>
         </p:spPr>
         <p:txBody>
-          <a:bodyPr wrap="square" lIns="36576" rIns="36576" tIns="18288" bIns="18288" anchor="t">
+          <a:bodyPr wrap="square" lIns="36576" rIns="36576" tIns="0" bIns="0" anchor="ctr">
             <a:spAutoFit/>
           </a:bodyPr>
           <a:lstStyle/>
@@ -5458,27 +5108,355 @@
               </a:lnSpc>
             </a:pPr>
             <a:r>
-              <a:rPr sz="1400" b="1">
-                <a:solidFill>
-                  <a:srgbClr val="0F1115"/>
-                </a:solidFill>
-                <a:latin typeface="PingFang SC"/>
-              </a:rPr>
-              <a:t>为什么这样能"真懂客户"</a:t>
-            </a:r>
-          </a:p>
-        </p:txBody>
-      </p:sp>
-      <p:sp>
-        <p:nvSpPr>
-          <p:cNvPr id="52" name="Oval 51"/>
+              <a:rPr sz="800" b="0">
+                <a:solidFill>
+                  <a:srgbClr val="81858C"/>
+                </a:solidFill>
+                <a:latin typeface="PingFang SC"/>
+              </a:rPr>
+              <a:t>示例 · 报告里的一条结论</a:t>
+            </a:r>
+          </a:p>
+        </p:txBody>
+      </p:sp>
+      <p:sp>
+        <p:nvSpPr>
+          <p:cNvPr id="46" name="Rounded Rectangle 45"/>
           <p:cNvSpPr/>
           <p:nvPr/>
         </p:nvSpPr>
         <p:spPr>
           <a:xfrm>
-            <a:off x="8348471" y="1572768"/>
-            <a:ext cx="274320" cy="274320"/>
+            <a:off x="7781544" y="2240279"/>
+            <a:ext cx="420624" cy="182880"/>
+          </a:xfrm>
+          <a:prstGeom prst="roundRect">
+            <a:avLst>
+              <a:gd name="adj" fmla="val 30000"/>
+            </a:avLst>
+          </a:prstGeom>
+          <a:solidFill>
+            <a:srgbClr val="FDF0E3"/>
+          </a:solidFill>
+          <a:ln>
+            <a:noFill/>
+          </a:ln>
+          <a:effectLst/>
+        </p:spPr>
+        <p:style>
+          <a:lnRef idx="1">
+            <a:schemeClr val="accent1"/>
+          </a:lnRef>
+          <a:fillRef idx="3">
+            <a:schemeClr val="accent1"/>
+          </a:fillRef>
+          <a:effectRef idx="2">
+            <a:schemeClr val="accent1"/>
+          </a:effectRef>
+          <a:fontRef idx="minor">
+            <a:schemeClr val="lt1"/>
+          </a:fontRef>
+        </p:style>
+        <p:txBody>
+          <a:bodyPr rtlCol="0" anchor="ctr" lIns="0" rIns="0" tIns="0" bIns="0"/>
+          <a:lstStyle/>
+          <a:p>
+            <a:pPr algn="ctr"/>
+            <a:r>
+              <a:rPr sz="850" b="1">
+                <a:solidFill>
+                  <a:srgbClr val="E07A1F"/>
+                </a:solidFill>
+                <a:latin typeface="PingFang SC"/>
+              </a:rPr>
+              <a:t>warn</a:t>
+            </a:r>
+          </a:p>
+        </p:txBody>
+      </p:sp>
+      <p:sp>
+        <p:nvSpPr>
+          <p:cNvPr id="47" name="TextBox 46"/>
+          <p:cNvSpPr txBox="1"/>
+          <p:nvPr/>
+        </p:nvSpPr>
+        <p:spPr>
+          <a:xfrm>
+            <a:off x="8238744" y="2212848"/>
+            <a:ext cx="3346703" cy="237744"/>
+          </a:xfrm>
+          <a:prstGeom prst="rect">
+            <a:avLst/>
+          </a:prstGeom>
+          <a:noFill/>
+        </p:spPr>
+        <p:txBody>
+          <a:bodyPr wrap="square" lIns="36576" rIns="36576" tIns="18288" bIns="18288" anchor="t">
+            <a:spAutoFit/>
+          </a:bodyPr>
+          <a:lstStyle/>
+          <a:p>
+            <a:pPr algn="l">
+              <a:lnSpc>
+                <a:spcPct val="115000"/>
+              </a:lnSpc>
+            </a:pPr>
+            <a:r>
+              <a:rPr sz="1050" b="1">
+                <a:solidFill>
+                  <a:srgbClr val="0F1115"/>
+                </a:solidFill>
+                <a:latin typeface="PingFang SC"/>
+              </a:rPr>
+              <a:t>系统表膨胀 · 全量 SQL 追踪表 16GB</a:t>
+            </a:r>
+          </a:p>
+        </p:txBody>
+      </p:sp>
+      <p:sp>
+        <p:nvSpPr>
+          <p:cNvPr id="48" name="TextBox 47"/>
+          <p:cNvSpPr txBox="1"/>
+          <p:nvPr/>
+        </p:nvSpPr>
+        <p:spPr>
+          <a:xfrm>
+            <a:off x="7781544" y="2532888"/>
+            <a:ext cx="1188720" cy="219456"/>
+          </a:xfrm>
+          <a:prstGeom prst="rect">
+            <a:avLst/>
+          </a:prstGeom>
+          <a:noFill/>
+        </p:spPr>
+        <p:txBody>
+          <a:bodyPr wrap="square" lIns="36576" rIns="36576" tIns="18288" bIns="18288" anchor="t">
+            <a:spAutoFit/>
+          </a:bodyPr>
+          <a:lstStyle/>
+          <a:p>
+            <a:pPr algn="l">
+              <a:lnSpc>
+                <a:spcPct val="115000"/>
+              </a:lnSpc>
+            </a:pPr>
+            <a:r>
+              <a:rPr sz="900" b="1">
+                <a:solidFill>
+                  <a:srgbClr val="3FA552"/>
+                </a:solidFill>
+                <a:latin typeface="PingFang SC"/>
+              </a:rPr>
+              <a:t>贵行规范</a:t>
+            </a:r>
+          </a:p>
+        </p:txBody>
+      </p:sp>
+      <p:sp>
+        <p:nvSpPr>
+          <p:cNvPr id="49" name="TextBox 48"/>
+          <p:cNvSpPr txBox="1"/>
+          <p:nvPr/>
+        </p:nvSpPr>
+        <p:spPr>
+          <a:xfrm>
+            <a:off x="8988552" y="2532888"/>
+            <a:ext cx="2596896" cy="457200"/>
+          </a:xfrm>
+          <a:prstGeom prst="rect">
+            <a:avLst/>
+          </a:prstGeom>
+          <a:noFill/>
+        </p:spPr>
+        <p:txBody>
+          <a:bodyPr wrap="square" lIns="36576" rIns="36576" tIns="18288" bIns="18288" anchor="t">
+            <a:spAutoFit/>
+          </a:bodyPr>
+          <a:lstStyle/>
+          <a:p>
+            <a:pPr algn="l">
+              <a:lnSpc>
+                <a:spcPct val="115000"/>
+              </a:lnSpc>
+            </a:pPr>
+            <a:r>
+              <a:rPr sz="900" b="0">
+                <a:solidFill>
+                  <a:srgbClr val="61666B"/>
+                </a:solidFill>
+                <a:latin typeface="PingFang SC"/>
+              </a:rPr>
+              <a:t>全量 SQL 追踪仅在诊断窗口开启（强制）</a:t>
+            </a:r>
+          </a:p>
+        </p:txBody>
+      </p:sp>
+      <p:sp>
+        <p:nvSpPr>
+          <p:cNvPr id="50" name="TextBox 49"/>
+          <p:cNvSpPr txBox="1"/>
+          <p:nvPr/>
+        </p:nvSpPr>
+        <p:spPr>
+          <a:xfrm>
+            <a:off x="7781544" y="3081528"/>
+            <a:ext cx="1188720" cy="219456"/>
+          </a:xfrm>
+          <a:prstGeom prst="rect">
+            <a:avLst/>
+          </a:prstGeom>
+          <a:noFill/>
+        </p:spPr>
+        <p:txBody>
+          <a:bodyPr wrap="square" lIns="36576" rIns="36576" tIns="18288" bIns="18288" anchor="t">
+            <a:spAutoFit/>
+          </a:bodyPr>
+          <a:lstStyle/>
+          <a:p>
+            <a:pPr algn="l">
+              <a:lnSpc>
+                <a:spcPct val="115000"/>
+              </a:lnSpc>
+            </a:pPr>
+            <a:r>
+              <a:rPr sz="900" b="1">
+                <a:solidFill>
+                  <a:srgbClr val="8B6BE0"/>
+                </a:solidFill>
+                <a:latin typeface="PingFang SC"/>
+              </a:rPr>
+              <a:t>历史相似</a:t>
+            </a:r>
+          </a:p>
+        </p:txBody>
+      </p:sp>
+      <p:sp>
+        <p:nvSpPr>
+          <p:cNvPr id="51" name="TextBox 50"/>
+          <p:cNvSpPr txBox="1"/>
+          <p:nvPr/>
+        </p:nvSpPr>
+        <p:spPr>
+          <a:xfrm>
+            <a:off x="8988552" y="3081528"/>
+            <a:ext cx="2596896" cy="457200"/>
+          </a:xfrm>
+          <a:prstGeom prst="rect">
+            <a:avLst/>
+          </a:prstGeom>
+          <a:noFill/>
+        </p:spPr>
+        <p:txBody>
+          <a:bodyPr wrap="square" lIns="36576" rIns="36576" tIns="18288" bIns="18288" anchor="t">
+            <a:spAutoFit/>
+          </a:bodyPr>
+          <a:lstStyle/>
+          <a:p>
+            <a:pPr algn="l">
+              <a:lnSpc>
+                <a:spcPct val="115000"/>
+              </a:lnSpc>
+            </a:pPr>
+            <a:r>
+              <a:rPr sz="900" b="0">
+                <a:solidFill>
+                  <a:srgbClr val="61666B"/>
+                </a:solidFill>
+                <a:latin typeface="PingFang SC"/>
+              </a:rPr>
+              <a:t>同类问题曾降追踪级别后重建，2 小时恢复</a:t>
+            </a:r>
+          </a:p>
+        </p:txBody>
+      </p:sp>
+      <p:sp>
+        <p:nvSpPr>
+          <p:cNvPr id="52" name="TextBox 51"/>
+          <p:cNvSpPr txBox="1"/>
+          <p:nvPr/>
+        </p:nvSpPr>
+        <p:spPr>
+          <a:xfrm>
+            <a:off x="7781544" y="3630168"/>
+            <a:ext cx="1188720" cy="219456"/>
+          </a:xfrm>
+          <a:prstGeom prst="rect">
+            <a:avLst/>
+          </a:prstGeom>
+          <a:noFill/>
+        </p:spPr>
+        <p:txBody>
+          <a:bodyPr wrap="square" lIns="36576" rIns="36576" tIns="18288" bIns="18288" anchor="t">
+            <a:spAutoFit/>
+          </a:bodyPr>
+          <a:lstStyle/>
+          <a:p>
+            <a:pPr algn="l">
+              <a:lnSpc>
+                <a:spcPct val="115000"/>
+              </a:lnSpc>
+            </a:pPr>
+            <a:r>
+              <a:rPr sz="900" b="1">
+                <a:solidFill>
+                  <a:srgbClr val="4176E6"/>
+                </a:solidFill>
+                <a:latin typeface="PingFang SC"/>
+              </a:rPr>
+              <a:t>建议 · 工行口径</a:t>
+            </a:r>
+          </a:p>
+        </p:txBody>
+      </p:sp>
+      <p:sp>
+        <p:nvSpPr>
+          <p:cNvPr id="53" name="TextBox 52"/>
+          <p:cNvSpPr txBox="1"/>
+          <p:nvPr/>
+        </p:nvSpPr>
+        <p:spPr>
+          <a:xfrm>
+            <a:off x="8988552" y="3630168"/>
+            <a:ext cx="2596896" cy="457200"/>
+          </a:xfrm>
+          <a:prstGeom prst="rect">
+            <a:avLst/>
+          </a:prstGeom>
+          <a:noFill/>
+        </p:spPr>
+        <p:txBody>
+          <a:bodyPr wrap="square" lIns="36576" rIns="36576" tIns="18288" bIns="18288" anchor="t">
+            <a:spAutoFit/>
+          </a:bodyPr>
+          <a:lstStyle/>
+          <a:p>
+            <a:pPr algn="l">
+              <a:lnSpc>
+                <a:spcPct val="115000"/>
+              </a:lnSpc>
+            </a:pPr>
+            <a:r>
+              <a:rPr sz="900" b="0">
+                <a:solidFill>
+                  <a:srgbClr val="61666B"/>
+                </a:solidFill>
+                <a:latin typeface="PingFang SC"/>
+              </a:rPr>
+              <a:t>提变更单 → 23:00–06:00 窗口 → 双人复核</a:t>
+            </a:r>
+          </a:p>
+        </p:txBody>
+      </p:sp>
+      <p:sp>
+        <p:nvSpPr>
+          <p:cNvPr id="54" name="Oval 53"/>
+          <p:cNvSpPr/>
+          <p:nvPr/>
+        </p:nvSpPr>
+        <p:spPr>
+          <a:xfrm>
+            <a:off x="7726679" y="4242816"/>
+            <a:ext cx="237744" cy="237744"/>
           </a:xfrm>
           <a:prstGeom prst="ellipse">
             <a:avLst/>
@@ -5511,7 +5489,7 @@
           <a:p>
             <a:pPr algn="ctr"/>
             <a:r>
-              <a:rPr sz="1000" b="1">
+              <a:rPr sz="900" b="1">
                 <a:solidFill>
                   <a:srgbClr val="FFFFFF"/>
                 </a:solidFill>
@@ -5524,14 +5502,14 @@
       </p:sp>
       <p:sp>
         <p:nvSpPr>
-          <p:cNvPr id="53" name="TextBox 52"/>
+          <p:cNvPr id="55" name="TextBox 54"/>
           <p:cNvSpPr txBox="1"/>
           <p:nvPr/>
         </p:nvSpPr>
         <p:spPr>
           <a:xfrm>
-            <a:off x="8714232" y="1536192"/>
-            <a:ext cx="2880360" cy="310896"/>
+            <a:off x="8037575" y="4215383"/>
+            <a:ext cx="3547872" cy="256032"/>
           </a:xfrm>
           <a:prstGeom prst="rect">
             <a:avLst/>
@@ -5550,66 +5528,36 @@
               </a:lnSpc>
             </a:pPr>
             <a:r>
-              <a:rPr sz="1150" b="1">
+              <a:rPr sz="1100" b="1">
                 <a:solidFill>
                   <a:srgbClr val="0F1115"/>
                 </a:solidFill>
                 <a:latin typeface="PingFang SC"/>
               </a:rPr>
-              <a:t>不止"能搜"，而是"能对账"</a:t>
-            </a:r>
-          </a:p>
-        </p:txBody>
-      </p:sp>
-      <p:sp>
-        <p:nvSpPr>
-          <p:cNvPr id="54" name="TextBox 53"/>
-          <p:cNvSpPr txBox="1"/>
-          <p:nvPr/>
-        </p:nvSpPr>
-        <p:spPr>
-          <a:xfrm>
-            <a:off x="8714232" y="1828800"/>
-            <a:ext cx="2880360" cy="1051560"/>
-          </a:xfrm>
-          <a:prstGeom prst="rect">
-            <a:avLst/>
-          </a:prstGeom>
-          <a:noFill/>
-        </p:spPr>
-        <p:txBody>
-          <a:bodyPr wrap="square" lIns="36576" rIns="36576" tIns="18288" bIns="18288" anchor="t">
-            <a:spAutoFit/>
-          </a:bodyPr>
-          <a:lstStyle/>
-          <a:p>
-            <a:pPr algn="l">
-              <a:lnSpc>
-                <a:spcPct val="118000"/>
-              </a:lnSpc>
-            </a:pPr>
-            <a:r>
-              <a:rPr sz="919" b="0">
+              <a:t>说工行的话</a:t>
+            </a:r>
+            <a:r>
+              <a:rPr sz="930" b="0">
                 <a:solidFill>
                   <a:srgbClr val="61666B"/>
                 </a:solidFill>
                 <a:latin typeface="PingFang SC"/>
               </a:rPr>
-              <a:t>文本变成条款卡后，可与平台内置的确定性规则逐条比对：客户要求平台已在判但阈值不同 → 给出差异清单；客户有要求平台没规则 → 能力缺口；平台在判客户没写 → 建议补进规范。这一步把知识库从"资料检索"变成"按客户口径工作"。</a:t>
-            </a:r>
-          </a:p>
-        </p:txBody>
-      </p:sp>
-      <p:sp>
-        <p:nvSpPr>
-          <p:cNvPr id="55" name="Oval 54"/>
+              <a:t>   用贵行的术语与流程给建议，不给通用套话</a:t>
+            </a:r>
+          </a:p>
+        </p:txBody>
+      </p:sp>
+      <p:sp>
+        <p:nvSpPr>
+          <p:cNvPr id="56" name="Oval 55"/>
           <p:cNvSpPr/>
           <p:nvPr/>
         </p:nvSpPr>
         <p:spPr>
           <a:xfrm>
-            <a:off x="8348471" y="2889503"/>
-            <a:ext cx="274320" cy="274320"/>
+            <a:off x="7726679" y="4663440"/>
+            <a:ext cx="237744" cy="237744"/>
           </a:xfrm>
           <a:prstGeom prst="ellipse">
             <a:avLst/>
@@ -5642,7 +5590,7 @@
           <a:p>
             <a:pPr algn="ctr"/>
             <a:r>
-              <a:rPr sz="1000" b="1">
+              <a:rPr sz="900" b="1">
                 <a:solidFill>
                   <a:srgbClr val="FFFFFF"/>
                 </a:solidFill>
@@ -5655,14 +5603,14 @@
       </p:sp>
       <p:sp>
         <p:nvSpPr>
-          <p:cNvPr id="56" name="TextBox 55"/>
+          <p:cNvPr id="57" name="TextBox 56"/>
           <p:cNvSpPr txBox="1"/>
           <p:nvPr/>
         </p:nvSpPr>
         <p:spPr>
           <a:xfrm>
-            <a:off x="8714232" y="2852927"/>
-            <a:ext cx="2880360" cy="310896"/>
+            <a:off x="8037575" y="4636007"/>
+            <a:ext cx="3547872" cy="256032"/>
           </a:xfrm>
           <a:prstGeom prst="rect">
             <a:avLst/>
@@ -5681,52 +5629,22 @@
               </a:lnSpc>
             </a:pPr>
             <a:r>
-              <a:rPr sz="1150" b="1">
+              <a:rPr sz="1100" b="1">
                 <a:solidFill>
                   <a:srgbClr val="0F1115"/>
                 </a:solidFill>
                 <a:latin typeface="PingFang SC"/>
               </a:rPr>
-              <a:t>两套经验双轮驱动</a:t>
-            </a:r>
-          </a:p>
-        </p:txBody>
-      </p:sp>
-      <p:sp>
-        <p:nvSpPr>
-          <p:cNvPr id="57" name="TextBox 56"/>
-          <p:cNvSpPr txBox="1"/>
-          <p:nvPr/>
-        </p:nvSpPr>
-        <p:spPr>
-          <a:xfrm>
-            <a:off x="8714232" y="3145535"/>
-            <a:ext cx="2880360" cy="1051560"/>
-          </a:xfrm>
-          <a:prstGeom prst="rect">
-            <a:avLst/>
-          </a:prstGeom>
-          <a:noFill/>
-        </p:spPr>
-        <p:txBody>
-          <a:bodyPr wrap="square" lIns="36576" rIns="36576" tIns="18288" bIns="18288" anchor="t">
-            <a:spAutoFit/>
-          </a:bodyPr>
-          <a:lstStyle/>
-          <a:p>
-            <a:pPr algn="l">
-              <a:lnSpc>
-                <a:spcPct val="118000"/>
-              </a:lnSpc>
-            </a:pPr>
-            <a:r>
-              <a:rPr sz="919" b="0">
+              <a:t>每条有出处</a:t>
+            </a:r>
+            <a:r>
+              <a:rPr sz="930" b="0">
                 <a:solidFill>
                   <a:srgbClr val="61666B"/>
                 </a:solidFill>
                 <a:latin typeface="PingFang SC"/>
               </a:rPr>
-              <a:t>知识 = 客户自己沉淀的规范与案例；记忆 = 平台在这套环境里做过什么、上次结论是什么。两者同库同源、互为佐证——既懂客户的规矩，也记得这套库的脾气。</a:t>
+              <a:t>   引用可追到哪一版哪一条；查不到就写"无对应规范"</a:t>
             </a:r>
           </a:p>
         </p:txBody>
@@ -5739,8 +5657,8 @@
         </p:nvSpPr>
         <p:spPr>
           <a:xfrm>
-            <a:off x="8348471" y="4206240"/>
-            <a:ext cx="274320" cy="274320"/>
+            <a:off x="7726679" y="5084064"/>
+            <a:ext cx="237744" cy="237744"/>
           </a:xfrm>
           <a:prstGeom prst="ellipse">
             <a:avLst/>
@@ -5773,7 +5691,7 @@
           <a:p>
             <a:pPr algn="ctr"/>
             <a:r>
-              <a:rPr sz="1000" b="1">
+              <a:rPr sz="900" b="1">
                 <a:solidFill>
                   <a:srgbClr val="FFFFFF"/>
                 </a:solidFill>
@@ -5792,8 +5710,8 @@
         </p:nvSpPr>
         <p:spPr>
           <a:xfrm>
-            <a:off x="8714232" y="4169664"/>
-            <a:ext cx="2880360" cy="310896"/>
+            <a:off x="8037575" y="5056631"/>
+            <a:ext cx="3547872" cy="256032"/>
           </a:xfrm>
           <a:prstGeom prst="rect">
             <a:avLst/>
@@ -5812,119 +5730,72 @@
               </a:lnSpc>
             </a:pPr>
             <a:r>
-              <a:rPr sz="1150" b="1">
+              <a:rPr sz="1100" b="1">
                 <a:solidFill>
                   <a:srgbClr val="0F1115"/>
                 </a:solidFill>
                 <a:latin typeface="PingFang SC"/>
               </a:rPr>
-              <a:t>三类存储互补且互为降级</a:t>
-            </a:r>
-          </a:p>
-        </p:txBody>
-      </p:sp>
-      <p:sp>
-        <p:nvSpPr>
-          <p:cNvPr id="60" name="TextBox 59"/>
+              <a:t>口径按工行</a:t>
+            </a:r>
+            <a:r>
+              <a:rPr sz="930" b="0">
+                <a:solidFill>
+                  <a:srgbClr val="61666B"/>
+                </a:solidFill>
+                <a:latin typeface="PingFang SC"/>
+              </a:rPr>
+              <a:t>   客户标准与平台默认不一致 → 差异清单，人确认后生效</a:t>
+            </a:r>
+          </a:p>
+        </p:txBody>
+      </p:sp>
+      <p:cxnSp>
+        <p:nvCxnSpPr>
+          <p:cNvPr id="60" name="Connector 59"/>
+          <p:cNvCxnSpPr/>
+          <p:nvPr/>
+        </p:nvCxnSpPr>
+        <p:spPr>
+          <a:xfrm>
+            <a:off x="7315200" y="4745736"/>
+            <a:ext cx="228600" cy="0"/>
+          </a:xfrm>
+          <a:prstGeom prst="line">
+            <a:avLst/>
+          </a:prstGeom>
+          <a:ln w="19050">
+            <a:solidFill>
+              <a:srgbClr val="4176E6"/>
+            </a:solidFill>
+            <a:tailEnd type="triangle" w="med" len="med"/>
+          </a:ln>
+        </p:spPr>
+        <p:style>
+          <a:lnRef idx="2">
+            <a:schemeClr val="accent1"/>
+          </a:lnRef>
+          <a:fillRef idx="0">
+            <a:schemeClr val="accent1"/>
+          </a:fillRef>
+          <a:effectRef idx="1">
+            <a:schemeClr val="accent1"/>
+          </a:effectRef>
+          <a:fontRef idx="minor">
+            <a:schemeClr val="tx1"/>
+          </a:fontRef>
+        </p:style>
+      </p:cxnSp>
+      <p:sp>
+        <p:nvSpPr>
+          <p:cNvPr id="61" name="TextBox 60"/>
           <p:cNvSpPr txBox="1"/>
           <p:nvPr/>
         </p:nvSpPr>
         <p:spPr>
           <a:xfrm>
-            <a:off x="8714232" y="4462272"/>
-            <a:ext cx="2880360" cy="1051560"/>
-          </a:xfrm>
-          <a:prstGeom prst="rect">
-            <a:avLst/>
-          </a:prstGeom>
-          <a:noFill/>
-        </p:spPr>
-        <p:txBody>
-          <a:bodyPr wrap="square" lIns="36576" rIns="36576" tIns="18288" bIns="18288" anchor="t">
-            <a:spAutoFit/>
-          </a:bodyPr>
-          <a:lstStyle/>
-          <a:p>
-            <a:pPr algn="l">
-              <a:lnSpc>
-                <a:spcPct val="118000"/>
-              </a:lnSpc>
-            </a:pPr>
-            <a:r>
-              <a:rPr sz="919" b="0">
-                <a:solidFill>
-                  <a:srgbClr val="61666B"/>
-                </a:solidFill>
-                <a:latin typeface="PingFang SC"/>
-              </a:rPr>
-              <a:t>关系型存真相与权限、向量做语义召回、图做多跳串联；三者共用同一套标识，向量或图不可用时自动退回关系型，检索质量下降但结论不出错。</a:t>
-            </a:r>
-          </a:p>
-        </p:txBody>
-      </p:sp>
-      <p:sp>
-        <p:nvSpPr>
-          <p:cNvPr id="61" name="Oval 60"/>
-          <p:cNvSpPr/>
-          <p:nvPr/>
-        </p:nvSpPr>
-        <p:spPr>
-          <a:xfrm>
-            <a:off x="8348471" y="5522975"/>
-            <a:ext cx="274320" cy="274320"/>
-          </a:xfrm>
-          <a:prstGeom prst="ellipse">
-            <a:avLst/>
-          </a:prstGeom>
-          <a:solidFill>
-            <a:srgbClr val="4176E6"/>
-          </a:solidFill>
-          <a:ln>
-            <a:noFill/>
-          </a:ln>
-          <a:effectLst/>
-        </p:spPr>
-        <p:style>
-          <a:lnRef idx="1">
-            <a:schemeClr val="accent1"/>
-          </a:lnRef>
-          <a:fillRef idx="3">
-            <a:schemeClr val="accent1"/>
-          </a:fillRef>
-          <a:effectRef idx="2">
-            <a:schemeClr val="accent1"/>
-          </a:effectRef>
-          <a:fontRef idx="minor">
-            <a:schemeClr val="lt1"/>
-          </a:fontRef>
-        </p:style>
-        <p:txBody>
-          <a:bodyPr rtlCol="0" anchor="ctr" lIns="0" rIns="0" tIns="0" bIns="0"/>
-          <a:lstStyle/>
-          <a:p>
-            <a:pPr algn="ctr"/>
-            <a:r>
-              <a:rPr sz="1000" b="1">
-                <a:solidFill>
-                  <a:srgbClr val="FFFFFF"/>
-                </a:solidFill>
-                <a:latin typeface="PingFang SC"/>
-              </a:rPr>
-              <a:t>4</a:t>
-            </a:r>
-          </a:p>
-        </p:txBody>
-      </p:sp>
-      <p:sp>
-        <p:nvSpPr>
-          <p:cNvPr id="62" name="TextBox 61"/>
-          <p:cNvSpPr txBox="1"/>
-          <p:nvPr/>
-        </p:nvSpPr>
-        <p:spPr>
-          <a:xfrm>
-            <a:off x="8714232" y="5486400"/>
-            <a:ext cx="2880360" cy="310896"/>
+            <a:off x="457200" y="6053328"/>
+            <a:ext cx="7498079" cy="164592"/>
           </a:xfrm>
           <a:prstGeom prst="rect">
             <a:avLst/>
@@ -5943,104 +5814,26 @@
               </a:lnSpc>
             </a:pPr>
             <a:r>
-              <a:rPr sz="1150" b="1">
-                <a:solidFill>
-                  <a:srgbClr val="0F1115"/>
-                </a:solidFill>
-                <a:latin typeface="PingFang SC"/>
-              </a:rPr>
-              <a:t>越用越懂：缺口驱动地长大</a:t>
-            </a:r>
-          </a:p>
-        </p:txBody>
-      </p:sp>
-      <p:sp>
-        <p:nvSpPr>
-          <p:cNvPr id="63" name="TextBox 62"/>
+              <a:rPr sz="750" b="0">
+                <a:solidFill>
+                  <a:srgbClr val="81858C"/>
+                </a:solidFill>
+                <a:latin typeface="PingFang SC"/>
+              </a:rPr>
+              <a:t>图例：实线 = 主流程；框间双向箭头 = 存储层之间的同步与回表；三类存储只写类型，不绑定具体产品</a:t>
+            </a:r>
+          </a:p>
+        </p:txBody>
+      </p:sp>
+      <p:sp>
+        <p:nvSpPr>
+          <p:cNvPr id="62" name="TextBox 61"/>
           <p:cNvSpPr txBox="1"/>
           <p:nvPr/>
         </p:nvSpPr>
         <p:spPr>
           <a:xfrm>
-            <a:off x="8714232" y="5779007"/>
-            <a:ext cx="2880360" cy="1051560"/>
-          </a:xfrm>
-          <a:prstGeom prst="rect">
-            <a:avLst/>
-          </a:prstGeom>
-          <a:noFill/>
-        </p:spPr>
-        <p:txBody>
-          <a:bodyPr wrap="square" lIns="36576" rIns="36576" tIns="18288" bIns="18288" anchor="t">
-            <a:spAutoFit/>
-          </a:bodyPr>
-          <a:lstStyle/>
-          <a:p>
-            <a:pPr algn="l">
-              <a:lnSpc>
-                <a:spcPct val="118000"/>
-              </a:lnSpc>
-            </a:pPr>
-            <a:r>
-              <a:rPr sz="919" b="0">
-                <a:solidFill>
-                  <a:srgbClr val="61666B"/>
-                </a:solidFill>
-                <a:latin typeface="PingFang SC"/>
-              </a:rPr>
-              <a:t>报告里"无对应规范"的发现自动排队，提示补充哪类资料；DBA 对每条引用点"有用/无关"回写排序权重。冷启动只需先灌最核心的几十篇，而不是一次性倒进所有历史文档。</a:t>
-            </a:r>
-          </a:p>
-        </p:txBody>
-      </p:sp>
-      <p:sp>
-        <p:nvSpPr>
-          <p:cNvPr id="64" name="TextBox 63"/>
-          <p:cNvSpPr txBox="1"/>
-          <p:nvPr/>
-        </p:nvSpPr>
-        <p:spPr>
-          <a:xfrm>
-            <a:off x="457200" y="6693408"/>
-            <a:ext cx="7498079" cy="164592"/>
-          </a:xfrm>
-          <a:prstGeom prst="rect">
-            <a:avLst/>
-          </a:prstGeom>
-          <a:noFill/>
-        </p:spPr>
-        <p:txBody>
-          <a:bodyPr wrap="square" lIns="36576" rIns="36576" tIns="18288" bIns="18288" anchor="t">
-            <a:spAutoFit/>
-          </a:bodyPr>
-          <a:lstStyle/>
-          <a:p>
-            <a:pPr algn="l">
-              <a:lnSpc>
-                <a:spcPct val="115000"/>
-              </a:lnSpc>
-            </a:pPr>
-            <a:r>
-              <a:rPr sz="750" b="0">
-                <a:solidFill>
-                  <a:srgbClr val="81858C"/>
-                </a:solidFill>
-                <a:latin typeface="PingFang SC"/>
-              </a:rPr>
-              <a:t>图例：实线箭头 = 主流程；框间双向箭头 = 存储层之间的同步与回表；三类存储只写类型，不绑定具体产品</a:t>
-            </a:r>
-          </a:p>
-        </p:txBody>
-      </p:sp>
-      <p:sp>
-        <p:nvSpPr>
-          <p:cNvPr id="65" name="TextBox 64"/>
-          <p:cNvSpPr txBox="1"/>
-          <p:nvPr/>
-        </p:nvSpPr>
-        <p:spPr>
-          <a:xfrm>
-            <a:off x="8229600" y="6693408"/>
+            <a:off x="8229600" y="6053328"/>
             <a:ext cx="3566160" cy="164592"/>
           </a:xfrm>
           <a:prstGeom prst="rect">

--- a/docs/slides/opendb-harness-知识库一页.pptx
+++ b/docs/slides/opendb-harness-知识库一页.pptx
@@ -3096,7 +3096,7 @@
         </p:nvSpPr>
         <p:spPr>
           <a:xfrm>
-            <a:off x="457200" y="256032"/>
+            <a:off x="457200" y="237744"/>
             <a:ext cx="11247120" cy="457200"/>
           </a:xfrm>
           <a:prstGeom prst="rect">
@@ -3122,7 +3122,7 @@
                 </a:solidFill>
                 <a:latin typeface="PingFang SC"/>
               </a:rPr>
-              <a:t>客户知识库：让平台"懂工行"</a:t>
+              <a:t>客户知识库：从"存着"到"真懂"</a:t>
             </a:r>
             <a:r>
               <a:rPr sz="1400" b="0">
@@ -3131,7 +3131,7 @@
                 </a:solidFill>
                 <a:latin typeface="PingFang SC"/>
               </a:rPr>
-              <a:t>   把多年 GaussDB 实战沉淀，变成平台的判断力</a:t>
+              <a:t>   基于工行多年 GaussDB 实战经验，给出最懂工行风格的方案与建议</a:t>
             </a:r>
           </a:p>
         </p:txBody>
@@ -3144,7 +3144,7 @@
         </p:nvSpPr>
         <p:spPr>
           <a:xfrm>
-            <a:off x="457200" y="731520"/>
+            <a:off x="457200" y="694944"/>
             <a:ext cx="11247120" cy="274320"/>
           </a:xfrm>
           <a:prstGeom prst="rect">
@@ -3164,13 +3164,13 @@
               </a:lnSpc>
             </a:pPr>
             <a:r>
-              <a:rPr sz="1200" b="0">
+              <a:rPr sz="1100" b="0">
                 <a:solidFill>
                   <a:srgbClr val="4176E6"/>
                 </a:solidFill>
                 <a:latin typeface="PingFang SC"/>
               </a:rPr>
-              <a:t>规范 · 工单 · 故障总结  →  自动结构化  →  三类存储各司其职  →  每条结论都按工行口径给方案</a:t>
+              <a:t>几十篇使用规范 + 上千条问题处理工单 + 上百份故障分析总结 → 结构化 → 三类存储各司其职 → 每一条诊断结论旁都能说出"贵行规范怎么说、上次工行怎么处理"</a:t>
             </a:r>
           </a:p>
         </p:txBody>
@@ -3183,8 +3183,8 @@
         </p:nvSpPr>
         <p:spPr>
           <a:xfrm>
-            <a:off x="457200" y="1188720"/>
-            <a:ext cx="2212848" cy="402336"/>
+            <a:off x="457200" y="1078992"/>
+            <a:ext cx="2410968" cy="566928"/>
           </a:xfrm>
           <a:prstGeom prst="roundRect">
             <a:avLst>
@@ -3229,8 +3229,8 @@
         </p:nvSpPr>
         <p:spPr>
           <a:xfrm>
-            <a:off x="530352" y="1225296"/>
-            <a:ext cx="2066543" cy="274320"/>
+            <a:off x="530352" y="1115568"/>
+            <a:ext cx="2264664" cy="274320"/>
           </a:xfrm>
           <a:prstGeom prst="rect">
             <a:avLst/>
@@ -3258,7 +3258,7 @@
               <a:t>使用规范</a:t>
             </a:r>
             <a:r>
-              <a:rPr sz="900" b="1">
+              <a:rPr sz="850" b="1">
                 <a:solidFill>
                   <a:srgbClr val="C9CED6"/>
                 </a:solidFill>
@@ -3271,14 +3271,53 @@
       </p:sp>
       <p:sp>
         <p:nvSpPr>
-          <p:cNvPr id="6" name="Rounded Rectangle 5"/>
+          <p:cNvPr id="6" name="TextBox 5"/>
+          <p:cNvSpPr txBox="1"/>
+          <p:nvPr/>
+        </p:nvSpPr>
+        <p:spPr>
+          <a:xfrm>
+            <a:off x="530352" y="1371600"/>
+            <a:ext cx="2264664" cy="237744"/>
+          </a:xfrm>
+          <a:prstGeom prst="rect">
+            <a:avLst/>
+          </a:prstGeom>
+          <a:noFill/>
+        </p:spPr>
+        <p:txBody>
+          <a:bodyPr wrap="square" lIns="36576" rIns="36576" tIns="18288" bIns="18288" anchor="t">
+            <a:spAutoFit/>
+          </a:bodyPr>
+          <a:lstStyle/>
+          <a:p>
+            <a:pPr algn="l">
+              <a:lnSpc>
+                <a:spcPct val="112000"/>
+              </a:lnSpc>
+            </a:pPr>
+            <a:r>
+              <a:rPr sz="840" b="0">
+                <a:solidFill>
+                  <a:srgbClr val="61666B"/>
+                </a:solidFill>
+                <a:latin typeface="PingFang SC"/>
+              </a:rPr>
+              <a:t>· 运维/变更/安全规范、准入标准</a:t>
+            </a:r>
+          </a:p>
+        </p:txBody>
+      </p:sp>
+      <p:sp>
+        <p:nvSpPr>
+          <p:cNvPr id="7" name="Rounded Rectangle 6"/>
           <p:cNvSpPr/>
           <p:nvPr/>
         </p:nvSpPr>
         <p:spPr>
           <a:xfrm>
-            <a:off x="2779776" y="1188720"/>
-            <a:ext cx="2212848" cy="402336"/>
+            <a:off x="2977896" y="1078992"/>
+            <a:ext cx="2410968" cy="566928"/>
           </a:xfrm>
           <a:prstGeom prst="roundRect">
             <a:avLst>
@@ -3317,14 +3356,14 @@
       </p:sp>
       <p:sp>
         <p:nvSpPr>
-          <p:cNvPr id="7" name="TextBox 6"/>
+          <p:cNvPr id="8" name="TextBox 7"/>
           <p:cNvSpPr txBox="1"/>
           <p:nvPr/>
         </p:nvSpPr>
         <p:spPr>
           <a:xfrm>
-            <a:off x="2852928" y="1225296"/>
-            <a:ext cx="2066543" cy="274320"/>
+            <a:off x="3051048" y="1115568"/>
+            <a:ext cx="2264664" cy="274320"/>
           </a:xfrm>
           <a:prstGeom prst="rect">
             <a:avLst/>
@@ -3349,10 +3388,10 @@
                 </a:solidFill>
                 <a:latin typeface="PingFang SC"/>
               </a:rPr>
-              <a:t>处理工单</a:t>
-            </a:r>
-            <a:r>
-              <a:rPr sz="900" b="1">
+              <a:t>问题处理工单</a:t>
+            </a:r>
+            <a:r>
+              <a:rPr sz="850" b="1">
                 <a:solidFill>
                   <a:srgbClr val="C9CED6"/>
                 </a:solidFill>
@@ -3365,14 +3404,53 @@
       </p:sp>
       <p:sp>
         <p:nvSpPr>
-          <p:cNvPr id="8" name="Rounded Rectangle 7"/>
+          <p:cNvPr id="9" name="TextBox 8"/>
+          <p:cNvSpPr txBox="1"/>
+          <p:nvPr/>
+        </p:nvSpPr>
+        <p:spPr>
+          <a:xfrm>
+            <a:off x="3051048" y="1371600"/>
+            <a:ext cx="2264664" cy="237744"/>
+          </a:xfrm>
+          <a:prstGeom prst="rect">
+            <a:avLst/>
+          </a:prstGeom>
+          <a:noFill/>
+        </p:spPr>
+        <p:txBody>
+          <a:bodyPr wrap="square" lIns="36576" rIns="36576" tIns="18288" bIns="18288" anchor="t">
+            <a:spAutoFit/>
+          </a:bodyPr>
+          <a:lstStyle/>
+          <a:p>
+            <a:pPr algn="l">
+              <a:lnSpc>
+                <a:spcPct val="112000"/>
+              </a:lnSpc>
+            </a:pPr>
+            <a:r>
+              <a:rPr sz="840" b="0">
+                <a:solidFill>
+                  <a:srgbClr val="61666B"/>
+                </a:solidFill>
+                <a:latin typeface="PingFang SC"/>
+              </a:rPr>
+              <a:t>· 现象、处置动作、验证与耗时</a:t>
+            </a:r>
+          </a:p>
+        </p:txBody>
+      </p:sp>
+      <p:sp>
+        <p:nvSpPr>
+          <p:cNvPr id="10" name="Rounded Rectangle 9"/>
           <p:cNvSpPr/>
           <p:nvPr/>
         </p:nvSpPr>
         <p:spPr>
           <a:xfrm>
-            <a:off x="5102352" y="1188720"/>
-            <a:ext cx="2212848" cy="402336"/>
+            <a:off x="5498592" y="1078992"/>
+            <a:ext cx="2410968" cy="566928"/>
           </a:xfrm>
           <a:prstGeom prst="roundRect">
             <a:avLst>
@@ -3411,14 +3489,14 @@
       </p:sp>
       <p:sp>
         <p:nvSpPr>
-          <p:cNvPr id="9" name="TextBox 8"/>
+          <p:cNvPr id="11" name="TextBox 10"/>
           <p:cNvSpPr txBox="1"/>
           <p:nvPr/>
         </p:nvSpPr>
         <p:spPr>
           <a:xfrm>
-            <a:off x="5175504" y="1225296"/>
-            <a:ext cx="2066543" cy="274320"/>
+            <a:off x="5571744" y="1115568"/>
+            <a:ext cx="2264664" cy="274320"/>
           </a:xfrm>
           <a:prstGeom prst="rect">
             <a:avLst/>
@@ -3443,10 +3521,10 @@
                 </a:solidFill>
                 <a:latin typeface="PingFang SC"/>
               </a:rPr>
-              <a:t>故障总结</a:t>
-            </a:r>
-            <a:r>
-              <a:rPr sz="900" b="1">
+              <a:t>故障分析总结</a:t>
+            </a:r>
+            <a:r>
+              <a:rPr sz="850" b="1">
                 <a:solidFill>
                   <a:srgbClr val="C9CED6"/>
                 </a:solidFill>
@@ -3459,14 +3537,14 @@
       </p:sp>
       <p:sp>
         <p:nvSpPr>
-          <p:cNvPr id="10" name="TextBox 9"/>
+          <p:cNvPr id="12" name="TextBox 11"/>
           <p:cNvSpPr txBox="1"/>
           <p:nvPr/>
         </p:nvSpPr>
         <p:spPr>
           <a:xfrm>
-            <a:off x="457200" y="1042415"/>
-            <a:ext cx="3657600" cy="146304"/>
+            <a:off x="5571744" y="1371600"/>
+            <a:ext cx="2264664" cy="237744"/>
           </a:xfrm>
           <a:prstGeom prst="rect">
             <a:avLst/>
@@ -3474,7 +3552,46 @@
           <a:noFill/>
         </p:spPr>
         <p:txBody>
-          <a:bodyPr wrap="square" lIns="36576" rIns="36576" tIns="0" bIns="0" anchor="ctr">
+          <a:bodyPr wrap="square" lIns="36576" rIns="36576" tIns="18288" bIns="18288" anchor="t">
+            <a:spAutoFit/>
+          </a:bodyPr>
+          <a:lstStyle/>
+          <a:p>
+            <a:pPr algn="l">
+              <a:lnSpc>
+                <a:spcPct val="112000"/>
+              </a:lnSpc>
+            </a:pPr>
+            <a:r>
+              <a:rPr sz="840" b="0">
+                <a:solidFill>
+                  <a:srgbClr val="61666B"/>
+                </a:solidFill>
+                <a:latin typeface="PingFang SC"/>
+              </a:rPr>
+              <a:t>· 根因、影响面、复发防范</a:t>
+            </a:r>
+          </a:p>
+        </p:txBody>
+      </p:sp>
+      <p:sp>
+        <p:nvSpPr>
+          <p:cNvPr id="13" name="TextBox 12"/>
+          <p:cNvSpPr txBox="1"/>
+          <p:nvPr/>
+        </p:nvSpPr>
+        <p:spPr>
+          <a:xfrm>
+            <a:off x="457200" y="932688"/>
+            <a:ext cx="7452360" cy="146304"/>
+          </a:xfrm>
+          <a:prstGeom prst="rect">
+            <a:avLst/>
+          </a:prstGeom>
+          <a:noFill/>
+        </p:spPr>
+        <p:txBody>
+          <a:bodyPr wrap="square" lIns="36576" rIns="36576" tIns="18288" bIns="18288" anchor="t">
             <a:spAutoFit/>
           </a:bodyPr>
           <a:lstStyle/>
@@ -3485,27 +3602,176 @@
               </a:lnSpc>
             </a:pPr>
             <a:r>
-              <a:rPr sz="800" b="0">
+              <a:rPr sz="850" b="0">
                 <a:solidFill>
                   <a:srgbClr val="81858C"/>
                 </a:solidFill>
                 <a:latin typeface="PingFang SC"/>
               </a:rPr>
-              <a:t>① 工行既有资料 · 多来源 · 无统一结构</a:t>
-            </a:r>
-          </a:p>
-        </p:txBody>
-      </p:sp>
-      <p:sp>
-        <p:nvSpPr>
-          <p:cNvPr id="11" name="Rounded Rectangle 10"/>
+              <a:t>① 工行既有资料（多来源、多格式、无统一结构）</a:t>
+            </a:r>
+          </a:p>
+        </p:txBody>
+      </p:sp>
+      <p:sp>
+        <p:nvSpPr>
+          <p:cNvPr id="14" name="Rounded Rectangle 13"/>
           <p:cNvSpPr/>
           <p:nvPr/>
         </p:nvSpPr>
         <p:spPr>
           <a:xfrm>
-            <a:off x="457200" y="1792224"/>
-            <a:ext cx="6858000" cy="914400"/>
+            <a:off x="457200" y="1847088"/>
+            <a:ext cx="7452360" cy="548640"/>
+          </a:xfrm>
+          <a:prstGeom prst="roundRect">
+            <a:avLst>
+              <a:gd name="adj" fmla="val 8000"/>
+            </a:avLst>
+          </a:prstGeom>
+          <a:solidFill>
+            <a:srgbClr val="EEF3FF"/>
+          </a:solidFill>
+          <a:ln w="15875">
+            <a:solidFill>
+              <a:srgbClr val="4176E6"/>
+            </a:solidFill>
+          </a:ln>
+          <a:effectLst/>
+        </p:spPr>
+        <p:style>
+          <a:lnRef idx="1">
+            <a:schemeClr val="accent1"/>
+          </a:lnRef>
+          <a:fillRef idx="3">
+            <a:schemeClr val="accent1"/>
+          </a:fillRef>
+          <a:effectRef idx="2">
+            <a:schemeClr val="accent1"/>
+          </a:effectRef>
+          <a:fontRef idx="minor">
+            <a:schemeClr val="lt1"/>
+          </a:fontRef>
+        </p:style>
+        <p:txBody>
+          <a:bodyPr rtlCol="0" anchor="ctr"/>
+          <a:lstStyle/>
+          <a:p/>
+        </p:txBody>
+      </p:sp>
+      <p:sp>
+        <p:nvSpPr>
+          <p:cNvPr id="15" name="TextBox 14"/>
+          <p:cNvSpPr txBox="1"/>
+          <p:nvPr/>
+        </p:nvSpPr>
+        <p:spPr>
+          <a:xfrm>
+            <a:off x="530352" y="1883664"/>
+            <a:ext cx="7306056" cy="274320"/>
+          </a:xfrm>
+          <a:prstGeom prst="rect">
+            <a:avLst/>
+          </a:prstGeom>
+          <a:noFill/>
+        </p:spPr>
+        <p:txBody>
+          <a:bodyPr wrap="square" lIns="36576" rIns="36576" tIns="18288" bIns="18288" anchor="t">
+            <a:spAutoFit/>
+          </a:bodyPr>
+          <a:lstStyle/>
+          <a:p>
+            <a:pPr algn="l">
+              <a:lnSpc>
+                <a:spcPct val="115000"/>
+              </a:lnSpc>
+            </a:pPr>
+            <a:r>
+              <a:rPr sz="1150" b="1">
+                <a:solidFill>
+                  <a:srgbClr val="0F1115"/>
+                </a:solidFill>
+                <a:latin typeface="PingFang SC"/>
+              </a:rPr>
+              <a:t>② 摄入与治理</a:t>
+            </a:r>
+            <a:r>
+              <a:rPr sz="900" b="1">
+                <a:solidFill>
+                  <a:srgbClr val="4176E6"/>
+                </a:solidFill>
+                <a:latin typeface="PingFang SC"/>
+              </a:rPr>
+              <a:t>  自动化管线 · 增量</a:t>
+            </a:r>
+          </a:p>
+        </p:txBody>
+      </p:sp>
+      <p:sp>
+        <p:nvSpPr>
+          <p:cNvPr id="16" name="TextBox 15"/>
+          <p:cNvSpPr txBox="1"/>
+          <p:nvPr/>
+        </p:nvSpPr>
+        <p:spPr>
+          <a:xfrm>
+            <a:off x="530352" y="2139696"/>
+            <a:ext cx="7306056" cy="219456"/>
+          </a:xfrm>
+          <a:prstGeom prst="rect">
+            <a:avLst/>
+          </a:prstGeom>
+          <a:noFill/>
+        </p:spPr>
+        <p:txBody>
+          <a:bodyPr wrap="square" lIns="36576" rIns="36576" tIns="18288" bIns="18288" anchor="t">
+            <a:spAutoFit/>
+          </a:bodyPr>
+          <a:lstStyle/>
+          <a:p>
+            <a:pPr algn="l">
+              <a:lnSpc>
+                <a:spcPct val="112000"/>
+              </a:lnSpc>
+            </a:pPr>
+            <a:r>
+              <a:rPr sz="860" b="0">
+                <a:solidFill>
+                  <a:srgbClr val="61666B"/>
+                </a:solidFill>
+                <a:latin typeface="PingFang SC"/>
+              </a:rPr>
+              <a:t>· 格式归一（文档 / 表格 / 工单导出 / 邮件）→ 语义切块；每篇强制打元数据：类型 · 适用引擎与环境 · 生效时间 · 版本 · 密级</a:t>
+            </a:r>
+          </a:p>
+          <a:p>
+            <a:pPr algn="l">
+              <a:lnSpc>
+                <a:spcPct val="112000"/>
+              </a:lnSpc>
+            </a:pPr>
+            <a:r>
+              <a:rPr sz="860" b="0">
+                <a:solidFill>
+                  <a:srgbClr val="61666B"/>
+                </a:solidFill>
+                <a:latin typeface="PingFang SC"/>
+              </a:rPr>
+              <a:t>· 同源资料重灌产出新版本而非覆盖——报告引用永远能追溯到"当时依据的是哪一版规范"</a:t>
+            </a:r>
+          </a:p>
+        </p:txBody>
+      </p:sp>
+      <p:sp>
+        <p:nvSpPr>
+          <p:cNvPr id="17" name="Rounded Rectangle 16"/>
+          <p:cNvSpPr/>
+          <p:nvPr/>
+        </p:nvSpPr>
+        <p:spPr>
+          <a:xfrm>
+            <a:off x="457200" y="2596896"/>
+            <a:ext cx="7452360" cy="914400"/>
           </a:xfrm>
           <a:prstGeom prst="roundRect">
             <a:avLst>
@@ -3544,14 +3810,14 @@
       </p:sp>
       <p:sp>
         <p:nvSpPr>
-          <p:cNvPr id="12" name="TextBox 11"/>
+          <p:cNvPr id="18" name="TextBox 17"/>
           <p:cNvSpPr txBox="1"/>
           <p:nvPr/>
         </p:nvSpPr>
         <p:spPr>
           <a:xfrm>
-            <a:off x="530352" y="1828800"/>
-            <a:ext cx="6711696" cy="274320"/>
+            <a:off x="530352" y="2633472"/>
+            <a:ext cx="7306056" cy="274320"/>
           </a:xfrm>
           <a:prstGeom prst="rect">
             <a:avLst/>
@@ -3570,36 +3836,36 @@
               </a:lnSpc>
             </a:pPr>
             <a:r>
-              <a:rPr sz="1200" b="1">
+              <a:rPr sz="1150" b="1">
                 <a:solidFill>
                   <a:srgbClr val="0F1115"/>
                 </a:solidFill>
                 <a:latin typeface="PingFang SC"/>
               </a:rPr>
-              <a:t>② 自动加工成"可判定"的知识</a:t>
-            </a:r>
-            <a:r>
-              <a:rPr sz="900" b="1">
+              <a:t>③ 结构化抽取：把文本变成"可判定/可复用"的知识</a:t>
+            </a:r>
+            <a:r>
+              <a:rPr sz="850" b="1">
                 <a:solidFill>
                   <a:srgbClr val="3FA552"/>
                 </a:solidFill>
                 <a:latin typeface="PingFang SC"/>
               </a:rPr>
-              <a:t>  模型抽取 + 人工确认后方可引用</a:t>
-            </a:r>
-          </a:p>
-        </p:txBody>
-      </p:sp>
-      <p:sp>
-        <p:nvSpPr>
-          <p:cNvPr id="13" name="TextBox 12"/>
+              <a:t>  模型抽取 + 人工确认后才可被引用</a:t>
+            </a:r>
+          </a:p>
+        </p:txBody>
+      </p:sp>
+      <p:sp>
+        <p:nvSpPr>
+          <p:cNvPr id="19" name="TextBox 18"/>
           <p:cNvSpPr txBox="1"/>
           <p:nvPr/>
         </p:nvSpPr>
         <p:spPr>
           <a:xfrm>
-            <a:off x="548640" y="2048256"/>
-            <a:ext cx="2194560" cy="402336"/>
+            <a:off x="566928" y="2962656"/>
+            <a:ext cx="2374392" cy="457200"/>
           </a:xfrm>
           <a:prstGeom prst="rect">
             <a:avLst/>
@@ -3614,7 +3880,7 @@
           <a:p>
             <a:pPr algn="l">
               <a:lnSpc>
-                <a:spcPct val="110000"/>
+                <a:spcPct val="112000"/>
               </a:lnSpc>
             </a:pPr>
             <a:r>
@@ -3630,31 +3896,31 @@
           <a:p>
             <a:pPr algn="l">
               <a:lnSpc>
-                <a:spcPct val="110000"/>
+                <a:spcPct val="112000"/>
               </a:lnSpc>
             </a:pPr>
             <a:r>
-              <a:rPr sz="860" b="0">
+              <a:rPr sz="819" b="0">
                 <a:solidFill>
                   <a:srgbClr val="61666B"/>
                 </a:solidFill>
                 <a:latin typeface="PingFang SC"/>
               </a:rPr>
-              <a:t>约束对象 · 要求值 · 强制/建议</a:t>
-            </a:r>
-          </a:p>
-        </p:txBody>
-      </p:sp>
-      <p:sp>
-        <p:nvSpPr>
-          <p:cNvPr id="14" name="TextBox 13"/>
+              <a:t>约束对象 · 条件 · 要求值 · 强制/建议</a:t>
+            </a:r>
+          </a:p>
+        </p:txBody>
+      </p:sp>
+      <p:sp>
+        <p:nvSpPr>
+          <p:cNvPr id="20" name="TextBox 19"/>
           <p:cNvSpPr txBox="1"/>
           <p:nvPr/>
         </p:nvSpPr>
         <p:spPr>
           <a:xfrm>
-            <a:off x="2788920" y="2048256"/>
-            <a:ext cx="2194560" cy="402336"/>
+            <a:off x="2996184" y="2962656"/>
+            <a:ext cx="2374392" cy="457200"/>
           </a:xfrm>
           <a:prstGeom prst="rect">
             <a:avLst/>
@@ -3669,7 +3935,7 @@
           <a:p>
             <a:pPr algn="l">
               <a:lnSpc>
-                <a:spcPct val="110000"/>
+                <a:spcPct val="112000"/>
               </a:lnSpc>
             </a:pPr>
             <a:r>
@@ -3685,31 +3951,31 @@
           <a:p>
             <a:pPr algn="l">
               <a:lnSpc>
-                <a:spcPct val="110000"/>
+                <a:spcPct val="112000"/>
               </a:lnSpc>
             </a:pPr>
             <a:r>
-              <a:rPr sz="860" b="0">
+              <a:rPr sz="819" b="0">
                 <a:solidFill>
                   <a:srgbClr val="61666B"/>
                 </a:solidFill>
                 <a:latin typeface="PingFang SC"/>
               </a:rPr>
-              <a:t>现象 · 动作 · 耗时</a:t>
-            </a:r>
-          </a:p>
-        </p:txBody>
-      </p:sp>
-      <p:sp>
-        <p:nvSpPr>
-          <p:cNvPr id="15" name="TextBox 14"/>
+              <a:t>现象 · 动作 · 验证方式 · 耗时 · 涉及对象</a:t>
+            </a:r>
+          </a:p>
+        </p:txBody>
+      </p:sp>
+      <p:sp>
+        <p:nvSpPr>
+          <p:cNvPr id="21" name="TextBox 20"/>
           <p:cNvSpPr txBox="1"/>
           <p:nvPr/>
         </p:nvSpPr>
         <p:spPr>
           <a:xfrm>
-            <a:off x="5029199" y="2048256"/>
-            <a:ext cx="2194560" cy="402336"/>
+            <a:off x="5425440" y="2962656"/>
+            <a:ext cx="2374392" cy="457200"/>
           </a:xfrm>
           <a:prstGeom prst="rect">
             <a:avLst/>
@@ -3724,7 +3990,7 @@
           <a:p>
             <a:pPr algn="l">
               <a:lnSpc>
-                <a:spcPct val="110000"/>
+                <a:spcPct val="112000"/>
               </a:lnSpc>
             </a:pPr>
             <a:r>
@@ -3734,37 +4000,37 @@
                 </a:solidFill>
                 <a:latin typeface="PingFang SC"/>
               </a:rPr>
-              <a:t>故障 → 案例卡</a:t>
+              <a:t>故障总结 → 案例卡</a:t>
             </a:r>
           </a:p>
           <a:p>
             <a:pPr algn="l">
               <a:lnSpc>
-                <a:spcPct val="110000"/>
+                <a:spcPct val="112000"/>
               </a:lnSpc>
             </a:pPr>
             <a:r>
-              <a:rPr sz="860" b="0">
+              <a:rPr sz="819" b="0">
                 <a:solidFill>
                   <a:srgbClr val="61666B"/>
                 </a:solidFill>
                 <a:latin typeface="PingFang SC"/>
               </a:rPr>
-              <a:t>根因 · 处置 · 防复发</a:t>
-            </a:r>
-          </a:p>
-        </p:txBody>
-      </p:sp>
-      <p:sp>
-        <p:nvSpPr>
-          <p:cNvPr id="16" name="TextBox 15"/>
+              <a:t>现象 · 影响 · 根因 · 处置 · 防复发</a:t>
+            </a:r>
+          </a:p>
+        </p:txBody>
+      </p:sp>
+      <p:sp>
+        <p:nvSpPr>
+          <p:cNvPr id="22" name="TextBox 21"/>
           <p:cNvSpPr txBox="1"/>
           <p:nvPr/>
         </p:nvSpPr>
         <p:spPr>
           <a:xfrm>
-            <a:off x="548640" y="2432304"/>
-            <a:ext cx="6675120" cy="146304"/>
+            <a:off x="457200" y="3602736"/>
+            <a:ext cx="7452360" cy="146304"/>
           </a:xfrm>
           <a:prstGeom prst="rect">
             <a:avLst/>
@@ -3772,7 +4038,7 @@
           <a:noFill/>
         </p:spPr>
         <p:txBody>
-          <a:bodyPr wrap="square" lIns="36576" rIns="36576" tIns="0" bIns="0" anchor="ctr">
+          <a:bodyPr wrap="square" lIns="36576" rIns="36576" tIns="18288" bIns="18288" anchor="t">
             <a:spAutoFit/>
           </a:bodyPr>
           <a:lstStyle/>
@@ -3783,66 +4049,27 @@
               </a:lnSpc>
             </a:pPr>
             <a:r>
-              <a:rPr sz="840" b="0">
-                <a:solidFill>
-                  <a:srgbClr val="61666B"/>
-                </a:solidFill>
-                <a:latin typeface="PingFang SC"/>
-              </a:rPr>
-              <a:t>统一打标：适用引擎与环境 · 生效期 · 版本（重灌出新版，引用可追溯）</a:t>
-            </a:r>
-          </a:p>
-        </p:txBody>
-      </p:sp>
-      <p:sp>
-        <p:nvSpPr>
-          <p:cNvPr id="17" name="TextBox 16"/>
-          <p:cNvSpPr txBox="1"/>
-          <p:nvPr/>
-        </p:nvSpPr>
-        <p:spPr>
-          <a:xfrm>
-            <a:off x="457200" y="2688336"/>
-            <a:ext cx="5029200" cy="146304"/>
-          </a:xfrm>
-          <a:prstGeom prst="rect">
-            <a:avLst/>
-          </a:prstGeom>
-          <a:noFill/>
-        </p:spPr>
-        <p:txBody>
-          <a:bodyPr wrap="square" lIns="36576" rIns="36576" tIns="0" bIns="0" anchor="ctr">
-            <a:spAutoFit/>
-          </a:bodyPr>
-          <a:lstStyle/>
-          <a:p>
-            <a:pPr algn="l">
-              <a:lnSpc>
-                <a:spcPct val="115000"/>
-              </a:lnSpc>
-            </a:pPr>
-            <a:r>
-              <a:rPr sz="800" b="0">
+              <a:rPr sz="850" b="0">
                 <a:solidFill>
                   <a:srgbClr val="81858C"/>
                 </a:solidFill>
                 <a:latin typeface="PingFang SC"/>
               </a:rPr>
-              <a:t>③ 三类存储各司其职：真相只有一份，能力互补，任一层不可用都能降级</a:t>
-            </a:r>
-          </a:p>
-        </p:txBody>
-      </p:sp>
-      <p:sp>
-        <p:nvSpPr>
-          <p:cNvPr id="18" name="Rounded Rectangle 17"/>
+              <a:t>④ 三类存储各司其职：真相只有一份，能力互补，任一层不可用都能降级</a:t>
+            </a:r>
+          </a:p>
+        </p:txBody>
+      </p:sp>
+      <p:sp>
+        <p:nvSpPr>
+          <p:cNvPr id="23" name="Rounded Rectangle 22"/>
           <p:cNvSpPr/>
           <p:nvPr/>
         </p:nvSpPr>
         <p:spPr>
           <a:xfrm>
-            <a:off x="457200" y="2980944"/>
-            <a:ext cx="2103120" cy="1152144"/>
+            <a:off x="457200" y="3767328"/>
+            <a:ext cx="2301240" cy="1243584"/>
           </a:xfrm>
           <a:prstGeom prst="roundRect">
             <a:avLst>
@@ -3881,14 +4108,14 @@
       </p:sp>
       <p:sp>
         <p:nvSpPr>
-          <p:cNvPr id="19" name="TextBox 18"/>
+          <p:cNvPr id="24" name="TextBox 23"/>
           <p:cNvSpPr txBox="1"/>
           <p:nvPr/>
         </p:nvSpPr>
         <p:spPr>
           <a:xfrm>
-            <a:off x="530352" y="3017520"/>
-            <a:ext cx="1956816" cy="274320"/>
+            <a:off x="530352" y="3803904"/>
+            <a:ext cx="2154936" cy="274320"/>
           </a:xfrm>
           <a:prstGeom prst="rect">
             <a:avLst/>
@@ -3929,14 +4156,14 @@
       </p:sp>
       <p:sp>
         <p:nvSpPr>
-          <p:cNvPr id="20" name="TextBox 19"/>
+          <p:cNvPr id="25" name="TextBox 24"/>
           <p:cNvSpPr txBox="1"/>
           <p:nvPr/>
         </p:nvSpPr>
         <p:spPr>
           <a:xfrm>
-            <a:off x="530352" y="3273551"/>
-            <a:ext cx="1956816" cy="822960"/>
+            <a:off x="530352" y="4059936"/>
+            <a:ext cx="2154936" cy="914400"/>
           </a:xfrm>
           <a:prstGeom prst="rect">
             <a:avLst/>
@@ -3951,63 +4178,79 @@
           <a:p>
             <a:pPr algn="l">
               <a:lnSpc>
-                <a:spcPct val="114000"/>
+                <a:spcPct val="112000"/>
               </a:lnSpc>
             </a:pPr>
             <a:r>
-              <a:rPr sz="860" b="0">
+              <a:rPr sz="830" b="0">
                 <a:solidFill>
                   <a:srgbClr val="61666B"/>
                 </a:solidFill>
                 <a:latin typeface="PingFang SC"/>
               </a:rPr>
-              <a:t>· 三种卡片 · 版本 · 引用台账</a:t>
+              <a:t>· 文档 · 版本 · 条款卡 / 处置卡 / 案例卡</a:t>
             </a:r>
           </a:p>
           <a:p>
             <a:pPr algn="l">
               <a:lnSpc>
-                <a:spcPct val="114000"/>
+                <a:spcPct val="112000"/>
               </a:lnSpc>
             </a:pPr>
             <a:r>
-              <a:rPr sz="860" b="0">
+              <a:rPr sz="830" b="0">
                 <a:solidFill>
                   <a:srgbClr val="61666B"/>
                 </a:solidFill>
                 <a:latin typeface="PingFang SC"/>
               </a:rPr>
-              <a:t>· 记忆：这套库我们做过什么</a:t>
+              <a:t>· 记忆系统：平台在贵行环境里做过什么</a:t>
             </a:r>
           </a:p>
           <a:p>
             <a:pPr algn="l">
               <a:lnSpc>
-                <a:spcPct val="114000"/>
+                <a:spcPct val="112000"/>
               </a:lnSpc>
             </a:pPr>
             <a:r>
-              <a:rPr sz="860" b="0">
+              <a:rPr sz="830" b="0">
                 <a:solidFill>
                   <a:srgbClr val="61666B"/>
                 </a:solidFill>
                 <a:latin typeface="PingFang SC"/>
               </a:rPr>
-              <a:t>· 按引擎/环境/生效期精确过滤</a:t>
-            </a:r>
-          </a:p>
-        </p:txBody>
-      </p:sp>
-      <p:sp>
-        <p:nvSpPr>
-          <p:cNvPr id="21" name="Rounded Rectangle 20"/>
+              <a:t>· 引用台账：哪条结论引用了哪一版哪一条</a:t>
+            </a:r>
+          </a:p>
+          <a:p>
+            <a:pPr algn="l">
+              <a:lnSpc>
+                <a:spcPct val="112000"/>
+              </a:lnSpc>
+            </a:pPr>
+            <a:r>
+              <a:rPr sz="830" b="0">
+                <a:solidFill>
+                  <a:srgbClr val="61666B"/>
+                </a:solidFill>
+                <a:latin typeface="PingFang SC"/>
+              </a:rPr>
+              <a:t>· 精确过滤：引擎 · 环境 · 生效期 · 权限</a:t>
+            </a:r>
+          </a:p>
+        </p:txBody>
+      </p:sp>
+      <p:sp>
+        <p:nvSpPr>
+          <p:cNvPr id="26" name="Rounded Rectangle 25"/>
           <p:cNvSpPr/>
           <p:nvPr/>
         </p:nvSpPr>
         <p:spPr>
           <a:xfrm>
-            <a:off x="2834640" y="2980944"/>
-            <a:ext cx="2103120" cy="1152144"/>
+            <a:off x="3032760" y="3767328"/>
+            <a:ext cx="2301240" cy="1243584"/>
           </a:xfrm>
           <a:prstGeom prst="roundRect">
             <a:avLst>
@@ -4046,14 +4289,14 @@
       </p:sp>
       <p:sp>
         <p:nvSpPr>
-          <p:cNvPr id="22" name="TextBox 21"/>
+          <p:cNvPr id="27" name="TextBox 26"/>
           <p:cNvSpPr txBox="1"/>
           <p:nvPr/>
         </p:nvSpPr>
         <p:spPr>
           <a:xfrm>
-            <a:off x="2907792" y="3017520"/>
-            <a:ext cx="1956816" cy="274320"/>
+            <a:off x="3105912" y="3803904"/>
+            <a:ext cx="2154936" cy="274320"/>
           </a:xfrm>
           <a:prstGeom prst="rect">
             <a:avLst/>
@@ -4094,14 +4337,14 @@
       </p:sp>
       <p:sp>
         <p:nvSpPr>
-          <p:cNvPr id="23" name="TextBox 22"/>
+          <p:cNvPr id="28" name="TextBox 27"/>
           <p:cNvSpPr txBox="1"/>
           <p:nvPr/>
         </p:nvSpPr>
         <p:spPr>
           <a:xfrm>
-            <a:off x="2907792" y="3273551"/>
-            <a:ext cx="1956816" cy="822960"/>
+            <a:off x="3105912" y="4059936"/>
+            <a:ext cx="2154936" cy="914400"/>
           </a:xfrm>
           <a:prstGeom prst="rect">
             <a:avLst/>
@@ -4116,63 +4359,79 @@
           <a:p>
             <a:pPr algn="l">
               <a:lnSpc>
-                <a:spcPct val="114000"/>
+                <a:spcPct val="112000"/>
               </a:lnSpc>
             </a:pPr>
             <a:r>
-              <a:rPr sz="860" b="0">
+              <a:rPr sz="830" b="0">
                 <a:solidFill>
                   <a:srgbClr val="61666B"/>
                 </a:solidFill>
                 <a:latin typeface="PingFang SC"/>
               </a:rPr>
-              <a:t>· 说法不同、意思相同也能召回</a:t>
+              <a:t>· 切块与卡片的向量索引，规模化近邻检索</a:t>
             </a:r>
           </a:p>
           <a:p>
             <a:pPr algn="l">
               <a:lnSpc>
-                <a:spcPct val="114000"/>
+                <a:spcPct val="112000"/>
               </a:lnSpc>
             </a:pPr>
             <a:r>
-              <a:rPr sz="860" b="0">
+              <a:rPr sz="830" b="0">
                 <a:solidFill>
                   <a:srgbClr val="61666B"/>
                 </a:solidFill>
                 <a:latin typeface="PingFang SC"/>
               </a:rPr>
-              <a:t>· "连接打满" ↔ "连接超阈值"</a:t>
+              <a:t>· 解决"说法不同、意思相同"的召回</a:t>
             </a:r>
           </a:p>
           <a:p>
             <a:pPr algn="l">
               <a:lnSpc>
-                <a:spcPct val="114000"/>
+                <a:spcPct val="112000"/>
               </a:lnSpc>
             </a:pPr>
             <a:r>
-              <a:rPr sz="860" b="0">
+              <a:rPr sz="830" b="0">
                 <a:solidFill>
                   <a:srgbClr val="61666B"/>
                 </a:solidFill>
                 <a:latin typeface="PingFang SC"/>
               </a:rPr>
-              <a:t>· 只加速，不存真相，可重建</a:t>
-            </a:r>
-          </a:p>
-        </p:txBody>
-      </p:sp>
-      <p:sp>
-        <p:nvSpPr>
-          <p:cNvPr id="24" name="Rounded Rectangle 23"/>
+              <a:t>· 贵行说"连接打满" ↔ 平台判"连接超阈值"</a:t>
+            </a:r>
+          </a:p>
+          <a:p>
+            <a:pPr algn="l">
+              <a:lnSpc>
+                <a:spcPct val="112000"/>
+              </a:lnSpc>
+            </a:pPr>
+            <a:r>
+              <a:rPr sz="830" b="0">
+                <a:solidFill>
+                  <a:srgbClr val="61666B"/>
+                </a:solidFill>
+                <a:latin typeface="PingFang SC"/>
+              </a:rPr>
+              <a:t>· 不存业务事实——只加速，可随时重建</a:t>
+            </a:r>
+          </a:p>
+        </p:txBody>
+      </p:sp>
+      <p:sp>
+        <p:nvSpPr>
+          <p:cNvPr id="29" name="Rounded Rectangle 28"/>
           <p:cNvSpPr/>
           <p:nvPr/>
         </p:nvSpPr>
         <p:spPr>
           <a:xfrm>
-            <a:off x="5212080" y="2980944"/>
-            <a:ext cx="2103120" cy="1152144"/>
+            <a:off x="5608320" y="3767328"/>
+            <a:ext cx="2301240" cy="1243584"/>
           </a:xfrm>
           <a:prstGeom prst="roundRect">
             <a:avLst>
@@ -4211,14 +4470,14 @@
       </p:sp>
       <p:sp>
         <p:nvSpPr>
-          <p:cNvPr id="25" name="TextBox 24"/>
+          <p:cNvPr id="30" name="TextBox 29"/>
           <p:cNvSpPr txBox="1"/>
           <p:nvPr/>
         </p:nvSpPr>
         <p:spPr>
           <a:xfrm>
-            <a:off x="5285232" y="3017520"/>
-            <a:ext cx="1956816" cy="274320"/>
+            <a:off x="5681472" y="3803904"/>
+            <a:ext cx="2154936" cy="274320"/>
           </a:xfrm>
           <a:prstGeom prst="rect">
             <a:avLst/>
@@ -4259,14 +4518,14 @@
       </p:sp>
       <p:sp>
         <p:nvSpPr>
-          <p:cNvPr id="26" name="TextBox 25"/>
+          <p:cNvPr id="31" name="TextBox 30"/>
           <p:cNvSpPr txBox="1"/>
           <p:nvPr/>
         </p:nvSpPr>
         <p:spPr>
           <a:xfrm>
-            <a:off x="5285232" y="3273551"/>
-            <a:ext cx="1956816" cy="822960"/>
+            <a:off x="5681472" y="4059936"/>
+            <a:ext cx="2154936" cy="914400"/>
           </a:xfrm>
           <a:prstGeom prst="rect">
             <a:avLst/>
@@ -4281,62 +4540,78 @@
           <a:p>
             <a:pPr algn="l">
               <a:lnSpc>
-                <a:spcPct val="114000"/>
+                <a:spcPct val="112000"/>
               </a:lnSpc>
             </a:pPr>
             <a:r>
-              <a:rPr sz="860" b="0">
+              <a:rPr sz="830" b="0">
                 <a:solidFill>
                   <a:srgbClr val="61666B"/>
                 </a:solidFill>
                 <a:latin typeface="PingFang SC"/>
               </a:rPr>
-              <a:t>· 现象 → 根因 → 处置 多跳串联</a:t>
+              <a:t>· 实体：对象 · 现象 · 根因 · 处置动作 · 条款</a:t>
             </a:r>
           </a:p>
           <a:p>
             <a:pPr algn="l">
               <a:lnSpc>
-                <a:spcPct val="114000"/>
+                <a:spcPct val="112000"/>
               </a:lnSpc>
             </a:pPr>
             <a:r>
-              <a:rPr sz="860" b="0">
+              <a:rPr sz="830" b="0">
                 <a:solidFill>
                   <a:srgbClr val="61666B"/>
                 </a:solidFill>
                 <a:latin typeface="PingFang SC"/>
               </a:rPr>
-              <a:t>· 条款 ↔ 对象、案例 ↔ 条款</a:t>
+              <a:t>· 边：现象→根因→处置、条款→约束对象</a:t>
             </a:r>
           </a:p>
           <a:p>
             <a:pPr algn="l">
               <a:lnSpc>
-                <a:spcPct val="114000"/>
+                <a:spcPct val="112000"/>
               </a:lnSpc>
             </a:pPr>
             <a:r>
-              <a:rPr sz="860" b="0">
+              <a:rPr sz="830" b="0">
                 <a:solidFill>
                   <a:srgbClr val="61666B"/>
                 </a:solidFill>
                 <a:latin typeface="PingFang SC"/>
               </a:rPr>
-              <a:t>· 一条结论牵出规范与历史全链</a:t>
+              <a:t>· 案例→引用条款、故障→涉及节点</a:t>
+            </a:r>
+          </a:p>
+          <a:p>
+            <a:pPr algn="l">
+              <a:lnSpc>
+                <a:spcPct val="112000"/>
+              </a:lnSpc>
+            </a:pPr>
+            <a:r>
+              <a:rPr sz="830" b="0">
+                <a:solidFill>
+                  <a:srgbClr val="61666B"/>
+                </a:solidFill>
+                <a:latin typeface="PingFang SC"/>
+              </a:rPr>
+              <a:t>· 多跳串联：一条结论牵出规范与历史全链</a:t>
             </a:r>
           </a:p>
         </p:txBody>
       </p:sp>
       <p:cxnSp>
         <p:nvCxnSpPr>
-          <p:cNvPr id="27" name="Connector 26"/>
+          <p:cNvPr id="32" name="Connector 31"/>
           <p:cNvCxnSpPr/>
           <p:nvPr/>
         </p:nvCxnSpPr>
         <p:spPr>
           <a:xfrm>
-            <a:off x="2560320" y="3557015"/>
+            <a:off x="2758440" y="4389120"/>
             <a:ext cx="274320" cy="0"/>
           </a:xfrm>
           <a:prstGeom prst="line">
@@ -4367,13 +4642,13 @@
       </p:cxnSp>
       <p:cxnSp>
         <p:nvCxnSpPr>
-          <p:cNvPr id="28" name="Connector 27"/>
+          <p:cNvPr id="33" name="Connector 32"/>
           <p:cNvCxnSpPr/>
           <p:nvPr/>
         </p:nvCxnSpPr>
         <p:spPr>
           <a:xfrm>
-            <a:off x="4937760" y="3557015"/>
+            <a:off x="5334000" y="4389120"/>
             <a:ext cx="274320" cy="0"/>
           </a:xfrm>
           <a:prstGeom prst="line">
@@ -4404,14 +4679,14 @@
       </p:cxnSp>
       <p:sp>
         <p:nvSpPr>
-          <p:cNvPr id="29" name="TextBox 28"/>
+          <p:cNvPr id="34" name="TextBox 33"/>
           <p:cNvSpPr txBox="1"/>
           <p:nvPr/>
         </p:nvSpPr>
         <p:spPr>
           <a:xfrm>
-            <a:off x="2057400" y="4151375"/>
-            <a:ext cx="1280160" cy="146304"/>
+            <a:off x="2209800" y="5038344"/>
+            <a:ext cx="1371600" cy="146304"/>
           </a:xfrm>
           <a:prstGeom prst="rect">
             <a:avLst/>
@@ -4443,14 +4718,14 @@
       </p:sp>
       <p:sp>
         <p:nvSpPr>
-          <p:cNvPr id="30" name="TextBox 29"/>
+          <p:cNvPr id="35" name="TextBox 34"/>
           <p:cNvSpPr txBox="1"/>
           <p:nvPr/>
         </p:nvSpPr>
         <p:spPr>
           <a:xfrm>
-            <a:off x="4389120" y="4151375"/>
-            <a:ext cx="1371600" cy="146304"/>
+            <a:off x="4739640" y="5038344"/>
+            <a:ext cx="1463040" cy="146304"/>
           </a:xfrm>
           <a:prstGeom prst="rect">
             <a:avLst/>
@@ -4482,14 +4757,14 @@
       </p:sp>
       <p:sp>
         <p:nvSpPr>
-          <p:cNvPr id="31" name="Rounded Rectangle 30"/>
+          <p:cNvPr id="36" name="Rounded Rectangle 35"/>
           <p:cNvSpPr/>
           <p:nvPr/>
         </p:nvSpPr>
         <p:spPr>
           <a:xfrm>
-            <a:off x="457200" y="4443984"/>
-            <a:ext cx="6858000" cy="603504"/>
+            <a:off x="457200" y="5230368"/>
+            <a:ext cx="7452360" cy="530352"/>
           </a:xfrm>
           <a:prstGeom prst="roundRect">
             <a:avLst>
@@ -4528,14 +4803,14 @@
       </p:sp>
       <p:sp>
         <p:nvSpPr>
-          <p:cNvPr id="32" name="TextBox 31"/>
+          <p:cNvPr id="37" name="TextBox 36"/>
           <p:cNvSpPr txBox="1"/>
           <p:nvPr/>
         </p:nvSpPr>
         <p:spPr>
           <a:xfrm>
-            <a:off x="530352" y="4480560"/>
-            <a:ext cx="6711696" cy="274320"/>
+            <a:off x="530352" y="5266944"/>
+            <a:ext cx="7306056" cy="274320"/>
           </a:xfrm>
           <a:prstGeom prst="rect">
             <a:avLst/>
@@ -4554,36 +4829,36 @@
               </a:lnSpc>
             </a:pPr>
             <a:r>
-              <a:rPr sz="1200" b="1">
+              <a:rPr sz="1100" b="1">
                 <a:solidFill>
                   <a:srgbClr val="0F1115"/>
                 </a:solidFill>
                 <a:latin typeface="PingFang SC"/>
               </a:rPr>
-              <a:t>④ 混合检索：由平台按"发现"发起</a:t>
-            </a:r>
-            <a:r>
-              <a:rPr sz="900" b="1">
+              <a:t>⑤ 混合检索编排（由平台按"发现"发起，不靠模型自己想起来查）</a:t>
+            </a:r>
+            <a:r>
+              <a:rPr sz="850" b="1">
                 <a:solidFill>
                   <a:srgbClr val="4176E6"/>
                 </a:solidFill>
                 <a:latin typeface="PingFang SC"/>
               </a:rPr>
-              <a:t>  语义 + 词法 + 范围过滤 + 图扩展 → 重排</a:t>
-            </a:r>
-          </a:p>
-        </p:txBody>
-      </p:sp>
-      <p:sp>
-        <p:nvSpPr>
-          <p:cNvPr id="33" name="TextBox 32"/>
+              <a:t>  语义 + 词法 + 结构过滤 + 图扩展 → 重排</a:t>
+            </a:r>
+          </a:p>
+        </p:txBody>
+      </p:sp>
+      <p:sp>
+        <p:nvSpPr>
+          <p:cNvPr id="38" name="TextBox 37"/>
           <p:cNvSpPr txBox="1"/>
           <p:nvPr/>
         </p:nvSpPr>
         <p:spPr>
           <a:xfrm>
-            <a:off x="530352" y="4736592"/>
-            <a:ext cx="6711696" cy="274320"/>
+            <a:off x="530352" y="5522976"/>
+            <a:ext cx="7306056" cy="201167"/>
           </a:xfrm>
           <a:prstGeom prst="rect">
             <a:avLst/>
@@ -4598,31 +4873,31 @@
           <a:p>
             <a:pPr algn="l">
               <a:lnSpc>
-                <a:spcPct val="114000"/>
+                <a:spcPct val="112000"/>
               </a:lnSpc>
             </a:pPr>
             <a:r>
-              <a:rPr sz="880" b="0">
+              <a:rPr sz="860" b="0">
                 <a:solidFill>
                   <a:srgbClr val="61666B"/>
                 </a:solidFill>
                 <a:latin typeface="PingFang SC"/>
               </a:rPr>
-              <a:t>· 检索键 = 规则码 + 对象 + 现象词；命中条款卡 / 处置卡 / 案例卡，连同出处一起交给模型</a:t>
-            </a:r>
-          </a:p>
-        </p:txBody>
-      </p:sp>
-      <p:sp>
-        <p:nvSpPr>
-          <p:cNvPr id="34" name="Rounded Rectangle 33"/>
+              <a:t>· 检索键 = 规则码 + 对象 + 现象词：语义召回近义说法、词法精确命中错误码与对象名、按引擎/环境/生效期过滤、再沿图扩展到根因与历史处置</a:t>
+            </a:r>
+          </a:p>
+        </p:txBody>
+      </p:sp>
+      <p:sp>
+        <p:nvSpPr>
+          <p:cNvPr id="39" name="Rounded Rectangle 38"/>
           <p:cNvSpPr/>
           <p:nvPr/>
         </p:nvSpPr>
         <p:spPr>
           <a:xfrm>
-            <a:off x="457200" y="5266944"/>
-            <a:ext cx="6858000" cy="530352"/>
+            <a:off x="457200" y="5870448"/>
+            <a:ext cx="7452360" cy="786384"/>
           </a:xfrm>
           <a:prstGeom prst="roundRect">
             <a:avLst>
@@ -4661,14 +4936,14 @@
       </p:sp>
       <p:sp>
         <p:nvSpPr>
-          <p:cNvPr id="35" name="TextBox 34"/>
+          <p:cNvPr id="40" name="TextBox 39"/>
           <p:cNvSpPr txBox="1"/>
           <p:nvPr/>
         </p:nvSpPr>
         <p:spPr>
           <a:xfrm>
-            <a:off x="530352" y="5303520"/>
-            <a:ext cx="6711696" cy="274320"/>
+            <a:off x="530352" y="5907024"/>
+            <a:ext cx="7306056" cy="274320"/>
           </a:xfrm>
           <a:prstGeom prst="rect">
             <a:avLst/>
@@ -4687,36 +4962,36 @@
               </a:lnSpc>
             </a:pPr>
             <a:r>
-              <a:rPr sz="1150" b="1">
+              <a:rPr sz="1100" b="1">
                 <a:solidFill>
                   <a:srgbClr val="0F1115"/>
                 </a:solidFill>
                 <a:latin typeface="PingFang SC"/>
               </a:rPr>
-              <a:t>⑤ 越用越懂</a:t>
-            </a:r>
-            <a:r>
-              <a:rPr sz="900" b="1">
+              <a:t>⑥ 用在哪：贴到平台每一条确定性结论旁</a:t>
+            </a:r>
+            <a:r>
+              <a:rPr sz="850" b="1">
                 <a:solidFill>
                   <a:srgbClr val="B8BCC4"/>
                 </a:solidFill>
                 <a:latin typeface="PingFang SC"/>
               </a:rPr>
-              <a:t>  缺口驱动</a:t>
-            </a:r>
-          </a:p>
-        </p:txBody>
-      </p:sp>
-      <p:sp>
-        <p:nvSpPr>
-          <p:cNvPr id="36" name="TextBox 35"/>
+              <a:t>  引用必须有出处 · 查不到就写"无对应规范"，绝不编造</a:t>
+            </a:r>
+          </a:p>
+        </p:txBody>
+      </p:sp>
+      <p:sp>
+        <p:nvSpPr>
+          <p:cNvPr id="41" name="TextBox 40"/>
           <p:cNvSpPr txBox="1"/>
           <p:nvPr/>
         </p:nvSpPr>
         <p:spPr>
           <a:xfrm>
-            <a:off x="530352" y="5559552"/>
-            <a:ext cx="6711696" cy="201167"/>
+            <a:off x="566928" y="6181344"/>
+            <a:ext cx="1780794" cy="420624"/>
           </a:xfrm>
           <a:prstGeom prst="rect">
             <a:avLst/>
@@ -4731,30 +5006,211 @@
           <a:p>
             <a:pPr algn="l">
               <a:lnSpc>
-                <a:spcPct val="114000"/>
+                <a:spcPct val="110000"/>
               </a:lnSpc>
             </a:pPr>
             <a:r>
-              <a:rPr sz="880" b="0">
+              <a:rPr sz="900" b="1">
+                <a:solidFill>
+                  <a:srgbClr val="0F1115"/>
+                </a:solidFill>
+                <a:latin typeface="PingFang SC"/>
+              </a:rPr>
+              <a:t>规范对照</a:t>
+            </a:r>
+          </a:p>
+          <a:p>
+            <a:pPr algn="l">
+              <a:lnSpc>
+                <a:spcPct val="110000"/>
+              </a:lnSpc>
+            </a:pPr>
+            <a:r>
+              <a:rPr sz="800" b="0">
                 <a:solidFill>
                   <a:srgbClr val="61666B"/>
                 </a:solidFill>
                 <a:latin typeface="PingFang SC"/>
               </a:rPr>
-              <a:t>· 查不到规范的发现自动排队提示补料；DBA 点"有用 / 无关"回写排序权重</a:t>
+              <a:t>结论旁引用条款原文（参考不改判）</a:t>
+            </a:r>
+          </a:p>
+        </p:txBody>
+      </p:sp>
+      <p:sp>
+        <p:nvSpPr>
+          <p:cNvPr id="42" name="TextBox 41"/>
+          <p:cNvSpPr txBox="1"/>
+          <p:nvPr/>
+        </p:nvSpPr>
+        <p:spPr>
+          <a:xfrm>
+            <a:off x="2384298" y="6181344"/>
+            <a:ext cx="1780794" cy="420624"/>
+          </a:xfrm>
+          <a:prstGeom prst="rect">
+            <a:avLst/>
+          </a:prstGeom>
+          <a:noFill/>
+        </p:spPr>
+        <p:txBody>
+          <a:bodyPr wrap="square" lIns="36576" rIns="36576" tIns="18288" bIns="18288" anchor="t">
+            <a:spAutoFit/>
+          </a:bodyPr>
+          <a:lstStyle/>
+          <a:p>
+            <a:pPr algn="l">
+              <a:lnSpc>
+                <a:spcPct val="110000"/>
+              </a:lnSpc>
+            </a:pPr>
+            <a:r>
+              <a:rPr sz="900" b="1">
+                <a:solidFill>
+                  <a:srgbClr val="0F1115"/>
+                </a:solidFill>
+                <a:latin typeface="PingFang SC"/>
+              </a:rPr>
+              <a:t>建议本地化</a:t>
+            </a:r>
+          </a:p>
+          <a:p>
+            <a:pPr algn="l">
+              <a:lnSpc>
+                <a:spcPct val="110000"/>
+              </a:lnSpc>
+            </a:pPr>
+            <a:r>
+              <a:rPr sz="800" b="0">
+                <a:solidFill>
+                  <a:srgbClr val="61666B"/>
+                </a:solidFill>
+                <a:latin typeface="PingFang SC"/>
+              </a:rPr>
+              <a:t>按贵行流程改写处置建议</a:t>
+            </a:r>
+          </a:p>
+        </p:txBody>
+      </p:sp>
+      <p:sp>
+        <p:nvSpPr>
+          <p:cNvPr id="43" name="TextBox 42"/>
+          <p:cNvSpPr txBox="1"/>
+          <p:nvPr/>
+        </p:nvSpPr>
+        <p:spPr>
+          <a:xfrm>
+            <a:off x="4201668" y="6181344"/>
+            <a:ext cx="1780794" cy="420624"/>
+          </a:xfrm>
+          <a:prstGeom prst="rect">
+            <a:avLst/>
+          </a:prstGeom>
+          <a:noFill/>
+        </p:spPr>
+        <p:txBody>
+          <a:bodyPr wrap="square" lIns="36576" rIns="36576" tIns="18288" bIns="18288" anchor="t">
+            <a:spAutoFit/>
+          </a:bodyPr>
+          <a:lstStyle/>
+          <a:p>
+            <a:pPr algn="l">
+              <a:lnSpc>
+                <a:spcPct val="110000"/>
+              </a:lnSpc>
+            </a:pPr>
+            <a:r>
+              <a:rPr sz="900" b="1">
+                <a:solidFill>
+                  <a:srgbClr val="0F1115"/>
+                </a:solidFill>
+                <a:latin typeface="PingFang SC"/>
+              </a:rPr>
+              <a:t>阈值对齐</a:t>
+            </a:r>
+          </a:p>
+          <a:p>
+            <a:pPr algn="l">
+              <a:lnSpc>
+                <a:spcPct val="110000"/>
+              </a:lnSpc>
+            </a:pPr>
+            <a:r>
+              <a:rPr sz="800" b="0">
+                <a:solidFill>
+                  <a:srgbClr val="61666B"/>
+                </a:solidFill>
+                <a:latin typeface="PingFang SC"/>
+              </a:rPr>
+              <a:t>工行口径差异清单 → 人确认后生效</a:t>
+            </a:r>
+          </a:p>
+        </p:txBody>
+      </p:sp>
+      <p:sp>
+        <p:nvSpPr>
+          <p:cNvPr id="44" name="TextBox 43"/>
+          <p:cNvSpPr txBox="1"/>
+          <p:nvPr/>
+        </p:nvSpPr>
+        <p:spPr>
+          <a:xfrm>
+            <a:off x="6019038" y="6181344"/>
+            <a:ext cx="1780794" cy="420624"/>
+          </a:xfrm>
+          <a:prstGeom prst="rect">
+            <a:avLst/>
+          </a:prstGeom>
+          <a:noFill/>
+        </p:spPr>
+        <p:txBody>
+          <a:bodyPr wrap="square" lIns="36576" rIns="36576" tIns="18288" bIns="18288" anchor="t">
+            <a:spAutoFit/>
+          </a:bodyPr>
+          <a:lstStyle/>
+          <a:p>
+            <a:pPr algn="l">
+              <a:lnSpc>
+                <a:spcPct val="110000"/>
+              </a:lnSpc>
+            </a:pPr>
+            <a:r>
+              <a:rPr sz="900" b="1">
+                <a:solidFill>
+                  <a:srgbClr val="0F1115"/>
+                </a:solidFill>
+                <a:latin typeface="PingFang SC"/>
+              </a:rPr>
+              <a:t>案例复用</a:t>
+            </a:r>
+          </a:p>
+          <a:p>
+            <a:pPr algn="l">
+              <a:lnSpc>
+                <a:spcPct val="110000"/>
+              </a:lnSpc>
+            </a:pPr>
+            <a:r>
+              <a:rPr sz="800" b="0">
+                <a:solidFill>
+                  <a:srgbClr val="61666B"/>
+                </a:solidFill>
+                <a:latin typeface="PingFang SC"/>
+              </a:rPr>
+              <a:t>相似历史故障的处置与耗时</a:t>
             </a:r>
           </a:p>
         </p:txBody>
       </p:sp>
       <p:cxnSp>
         <p:nvCxnSpPr>
-          <p:cNvPr id="37" name="Connector 36"/>
+          <p:cNvPr id="45" name="Connector 44"/>
           <p:cNvCxnSpPr/>
           <p:nvPr/>
         </p:nvCxnSpPr>
         <p:spPr>
           <a:xfrm>
-            <a:off x="3886200" y="1591056"/>
+            <a:off x="4183380" y="1645920"/>
             <a:ext cx="0" cy="201168"/>
           </a:xfrm>
           <a:prstGeom prst="line">
@@ -4784,14 +5240,14 @@
       </p:cxnSp>
       <p:cxnSp>
         <p:nvCxnSpPr>
-          <p:cNvPr id="38" name="Connector 37"/>
+          <p:cNvPr id="46" name="Connector 45"/>
           <p:cNvCxnSpPr/>
           <p:nvPr/>
         </p:nvCxnSpPr>
         <p:spPr>
           <a:xfrm>
-            <a:off x="3886200" y="2706624"/>
-            <a:ext cx="0" cy="274320"/>
+            <a:off x="4183380" y="2395728"/>
+            <a:ext cx="0" cy="201168"/>
           </a:xfrm>
           <a:prstGeom prst="line">
             <a:avLst/>
@@ -4820,21 +5276,21 @@
       </p:cxnSp>
       <p:cxnSp>
         <p:nvCxnSpPr>
-          <p:cNvPr id="39" name="Connector 38"/>
+          <p:cNvPr id="47" name="Connector 46"/>
           <p:cNvCxnSpPr/>
           <p:nvPr/>
         </p:nvCxnSpPr>
         <p:spPr>
           <a:xfrm>
-            <a:off x="3886200" y="4133087"/>
-            <a:ext cx="0" cy="310897"/>
+            <a:off x="4183380" y="3511296"/>
+            <a:ext cx="0" cy="256032"/>
           </a:xfrm>
           <a:prstGeom prst="line">
             <a:avLst/>
           </a:prstGeom>
           <a:ln w="15875">
             <a:solidFill>
-              <a:srgbClr val="4176E6"/>
+              <a:srgbClr val="61666B"/>
             </a:solidFill>
             <a:tailEnd type="triangle" w="med" len="med"/>
           </a:ln>
@@ -4856,14 +5312,50 @@
       </p:cxnSp>
       <p:cxnSp>
         <p:nvCxnSpPr>
-          <p:cNvPr id="40" name="Connector 39"/>
+          <p:cNvPr id="48" name="Connector 47"/>
           <p:cNvCxnSpPr/>
           <p:nvPr/>
         </p:nvCxnSpPr>
         <p:spPr>
           <a:xfrm>
-            <a:off x="3886200" y="5047488"/>
+            <a:off x="4183380" y="5010912"/>
             <a:ext cx="0" cy="219456"/>
+          </a:xfrm>
+          <a:prstGeom prst="line">
+            <a:avLst/>
+          </a:prstGeom>
+          <a:ln w="15875">
+            <a:solidFill>
+              <a:srgbClr val="4176E6"/>
+            </a:solidFill>
+            <a:tailEnd type="triangle" w="med" len="med"/>
+          </a:ln>
+        </p:spPr>
+        <p:style>
+          <a:lnRef idx="2">
+            <a:schemeClr val="accent1"/>
+          </a:lnRef>
+          <a:fillRef idx="0">
+            <a:schemeClr val="accent1"/>
+          </a:fillRef>
+          <a:effectRef idx="1">
+            <a:schemeClr val="accent1"/>
+          </a:effectRef>
+          <a:fontRef idx="minor">
+            <a:schemeClr val="tx1"/>
+          </a:fontRef>
+        </p:style>
+      </p:cxnSp>
+      <p:cxnSp>
+        <p:nvCxnSpPr>
+          <p:cNvPr id="49" name="Connector 48"/>
+          <p:cNvCxnSpPr/>
+          <p:nvPr/>
+        </p:nvCxnSpPr>
+        <p:spPr>
+          <a:xfrm>
+            <a:off x="4183380" y="5760720"/>
+            <a:ext cx="0" cy="109728"/>
           </a:xfrm>
           <a:prstGeom prst="line">
             <a:avLst/>
@@ -4892,156 +5384,14 @@
       </p:cxnSp>
       <p:sp>
         <p:nvSpPr>
-          <p:cNvPr id="41" name="Rounded Rectangle 40"/>
+          <p:cNvPr id="50" name="Rounded Rectangle 49"/>
           <p:cNvSpPr/>
           <p:nvPr/>
         </p:nvSpPr>
         <p:spPr>
           <a:xfrm>
-            <a:off x="7543800" y="1005840"/>
-            <a:ext cx="4206240" cy="4791456"/>
-          </a:xfrm>
-          <a:prstGeom prst="roundRect">
-            <a:avLst>
-              <a:gd name="adj" fmla="val 3000"/>
-            </a:avLst>
-          </a:prstGeom>
-          <a:solidFill>
-            <a:srgbClr val="FFFFFF"/>
-          </a:solidFill>
-          <a:ln w="19050">
-            <a:solidFill>
-              <a:srgbClr val="4176E6"/>
-            </a:solidFill>
-          </a:ln>
-          <a:effectLst/>
-        </p:spPr>
-        <p:style>
-          <a:lnRef idx="1">
-            <a:schemeClr val="accent1"/>
-          </a:lnRef>
-          <a:fillRef idx="3">
-            <a:schemeClr val="accent1"/>
-          </a:fillRef>
-          <a:effectRef idx="2">
-            <a:schemeClr val="accent1"/>
-          </a:effectRef>
-          <a:fontRef idx="minor">
-            <a:schemeClr val="lt1"/>
-          </a:fontRef>
-        </p:style>
-        <p:txBody>
-          <a:bodyPr rtlCol="0" anchor="ctr"/>
-          <a:lstStyle/>
-          <a:p>
-            <a:pPr algn="ctr"/>
-          </a:p>
-        </p:txBody>
-      </p:sp>
-      <p:sp>
-        <p:nvSpPr>
-          <p:cNvPr id="42" name="TextBox 41"/>
-          <p:cNvSpPr txBox="1"/>
-          <p:nvPr/>
-        </p:nvSpPr>
-        <p:spPr>
-          <a:xfrm>
-            <a:off x="7708392" y="1097280"/>
-            <a:ext cx="3877055" cy="329184"/>
-          </a:xfrm>
-          <a:prstGeom prst="rect">
-            <a:avLst/>
-          </a:prstGeom>
-          <a:noFill/>
-        </p:spPr>
-        <p:txBody>
-          <a:bodyPr wrap="square" lIns="36576" rIns="36576" tIns="18288" bIns="18288" anchor="t">
-            <a:spAutoFit/>
-          </a:bodyPr>
-          <a:lstStyle/>
-          <a:p>
-            <a:pPr algn="l">
-              <a:lnSpc>
-                <a:spcPct val="115000"/>
-              </a:lnSpc>
-            </a:pPr>
-            <a:r>
-              <a:rPr sz="1500" b="1">
-                <a:solidFill>
-                  <a:srgbClr val="0F1115"/>
-                </a:solidFill>
-                <a:latin typeface="PingFang SC"/>
-              </a:rPr>
-              <a:t>效果：最懂工行的那一版建议</a:t>
-            </a:r>
-          </a:p>
-        </p:txBody>
-      </p:sp>
-      <p:sp>
-        <p:nvSpPr>
-          <p:cNvPr id="43" name="TextBox 42"/>
-          <p:cNvSpPr txBox="1"/>
-          <p:nvPr/>
-        </p:nvSpPr>
-        <p:spPr>
-          <a:xfrm>
-            <a:off x="7708392" y="1444752"/>
-            <a:ext cx="3877055" cy="420624"/>
-          </a:xfrm>
-          <a:prstGeom prst="rect">
-            <a:avLst/>
-          </a:prstGeom>
-          <a:noFill/>
-        </p:spPr>
-        <p:txBody>
-          <a:bodyPr wrap="square" lIns="36576" rIns="36576" tIns="18288" bIns="18288" anchor="t">
-            <a:spAutoFit/>
-          </a:bodyPr>
-          <a:lstStyle/>
-          <a:p>
-            <a:pPr algn="l">
-              <a:lnSpc>
-                <a:spcPct val="120000"/>
-              </a:lnSpc>
-            </a:pPr>
-            <a:r>
-              <a:rPr sz="1050" b="1">
-                <a:solidFill>
-                  <a:srgbClr val="4176E6"/>
-                </a:solidFill>
-                <a:latin typeface="PingFang SC"/>
-              </a:rPr>
-              <a:t>知识库 = 工行多年 GaussDB 实战经验的结构化沉淀</a:t>
-            </a:r>
-          </a:p>
-          <a:p>
-            <a:pPr algn="l">
-              <a:lnSpc>
-                <a:spcPct val="120000"/>
-              </a:lnSpc>
-            </a:pPr>
-            <a:r>
-              <a:rPr sz="950" b="0">
-                <a:solidFill>
-                  <a:srgbClr val="61666B"/>
-                </a:solidFill>
-                <a:latin typeface="PingFang SC"/>
-              </a:rPr>
-              <a:t>平台判定仍归脚本，知识库负责"按工行的规矩和习惯"给方案</a:t>
-            </a:r>
-          </a:p>
-        </p:txBody>
-      </p:sp>
-      <p:sp>
-        <p:nvSpPr>
-          <p:cNvPr id="44" name="Rounded Rectangle 43"/>
-          <p:cNvSpPr/>
-          <p:nvPr/>
-        </p:nvSpPr>
-        <p:spPr>
-          <a:xfrm>
-            <a:off x="7708392" y="1965960"/>
-            <a:ext cx="3877055" cy="2011680"/>
+            <a:off x="8183879" y="1078992"/>
+            <a:ext cx="3566160" cy="5577840"/>
           </a:xfrm>
           <a:prstGeom prst="roundRect">
             <a:avLst>
@@ -5049,7 +5399,7 @@
             </a:avLst>
           </a:prstGeom>
           <a:solidFill>
-            <a:srgbClr val="F7F8FA"/>
+            <a:srgbClr val="FFFFFF"/>
           </a:solidFill>
           <a:ln w="12700">
             <a:solidFill>
@@ -5082,14 +5432,14 @@
       </p:sp>
       <p:sp>
         <p:nvSpPr>
-          <p:cNvPr id="45" name="TextBox 44"/>
+          <p:cNvPr id="51" name="TextBox 50"/>
           <p:cNvSpPr txBox="1"/>
           <p:nvPr/>
         </p:nvSpPr>
         <p:spPr>
           <a:xfrm>
-            <a:off x="7781544" y="2020824"/>
-            <a:ext cx="2194560" cy="146304"/>
+            <a:off x="8321040" y="1152144"/>
+            <a:ext cx="3291840" cy="320040"/>
           </a:xfrm>
           <a:prstGeom prst="rect">
             <a:avLst/>
@@ -5097,7 +5447,7 @@
           <a:noFill/>
         </p:spPr>
         <p:txBody>
-          <a:bodyPr wrap="square" lIns="36576" rIns="36576" tIns="0" bIns="0" anchor="ctr">
+          <a:bodyPr wrap="square" lIns="36576" rIns="36576" tIns="18288" bIns="18288" anchor="t">
             <a:spAutoFit/>
           </a:bodyPr>
           <a:lstStyle/>
@@ -5108,355 +5458,27 @@
               </a:lnSpc>
             </a:pPr>
             <a:r>
-              <a:rPr sz="800" b="0">
-                <a:solidFill>
-                  <a:srgbClr val="81858C"/>
-                </a:solidFill>
-                <a:latin typeface="PingFang SC"/>
-              </a:rPr>
-              <a:t>示例 · 报告里的一条结论</a:t>
-            </a:r>
-          </a:p>
-        </p:txBody>
-      </p:sp>
-      <p:sp>
-        <p:nvSpPr>
-          <p:cNvPr id="46" name="Rounded Rectangle 45"/>
+              <a:rPr sz="1400" b="1">
+                <a:solidFill>
+                  <a:srgbClr val="0F1115"/>
+                </a:solidFill>
+                <a:latin typeface="PingFang SC"/>
+              </a:rPr>
+              <a:t>效果：基于工行多年 GaussDB 实战经验</a:t>
+            </a:r>
+          </a:p>
+        </p:txBody>
+      </p:sp>
+      <p:sp>
+        <p:nvSpPr>
+          <p:cNvPr id="52" name="Oval 51"/>
           <p:cNvSpPr/>
           <p:nvPr/>
         </p:nvSpPr>
         <p:spPr>
           <a:xfrm>
-            <a:off x="7781544" y="2240279"/>
-            <a:ext cx="420624" cy="182880"/>
-          </a:xfrm>
-          <a:prstGeom prst="roundRect">
-            <a:avLst>
-              <a:gd name="adj" fmla="val 30000"/>
-            </a:avLst>
-          </a:prstGeom>
-          <a:solidFill>
-            <a:srgbClr val="FDF0E3"/>
-          </a:solidFill>
-          <a:ln>
-            <a:noFill/>
-          </a:ln>
-          <a:effectLst/>
-        </p:spPr>
-        <p:style>
-          <a:lnRef idx="1">
-            <a:schemeClr val="accent1"/>
-          </a:lnRef>
-          <a:fillRef idx="3">
-            <a:schemeClr val="accent1"/>
-          </a:fillRef>
-          <a:effectRef idx="2">
-            <a:schemeClr val="accent1"/>
-          </a:effectRef>
-          <a:fontRef idx="minor">
-            <a:schemeClr val="lt1"/>
-          </a:fontRef>
-        </p:style>
-        <p:txBody>
-          <a:bodyPr rtlCol="0" anchor="ctr" lIns="0" rIns="0" tIns="0" bIns="0"/>
-          <a:lstStyle/>
-          <a:p>
-            <a:pPr algn="ctr"/>
-            <a:r>
-              <a:rPr sz="850" b="1">
-                <a:solidFill>
-                  <a:srgbClr val="E07A1F"/>
-                </a:solidFill>
-                <a:latin typeface="PingFang SC"/>
-              </a:rPr>
-              <a:t>warn</a:t>
-            </a:r>
-          </a:p>
-        </p:txBody>
-      </p:sp>
-      <p:sp>
-        <p:nvSpPr>
-          <p:cNvPr id="47" name="TextBox 46"/>
-          <p:cNvSpPr txBox="1"/>
-          <p:nvPr/>
-        </p:nvSpPr>
-        <p:spPr>
-          <a:xfrm>
-            <a:off x="8238744" y="2212848"/>
-            <a:ext cx="3346703" cy="237744"/>
-          </a:xfrm>
-          <a:prstGeom prst="rect">
-            <a:avLst/>
-          </a:prstGeom>
-          <a:noFill/>
-        </p:spPr>
-        <p:txBody>
-          <a:bodyPr wrap="square" lIns="36576" rIns="36576" tIns="18288" bIns="18288" anchor="t">
-            <a:spAutoFit/>
-          </a:bodyPr>
-          <a:lstStyle/>
-          <a:p>
-            <a:pPr algn="l">
-              <a:lnSpc>
-                <a:spcPct val="115000"/>
-              </a:lnSpc>
-            </a:pPr>
-            <a:r>
-              <a:rPr sz="1050" b="1">
-                <a:solidFill>
-                  <a:srgbClr val="0F1115"/>
-                </a:solidFill>
-                <a:latin typeface="PingFang SC"/>
-              </a:rPr>
-              <a:t>系统表膨胀 · 全量 SQL 追踪表 16GB</a:t>
-            </a:r>
-          </a:p>
-        </p:txBody>
-      </p:sp>
-      <p:sp>
-        <p:nvSpPr>
-          <p:cNvPr id="48" name="TextBox 47"/>
-          <p:cNvSpPr txBox="1"/>
-          <p:nvPr/>
-        </p:nvSpPr>
-        <p:spPr>
-          <a:xfrm>
-            <a:off x="7781544" y="2532888"/>
-            <a:ext cx="1188720" cy="219456"/>
-          </a:xfrm>
-          <a:prstGeom prst="rect">
-            <a:avLst/>
-          </a:prstGeom>
-          <a:noFill/>
-        </p:spPr>
-        <p:txBody>
-          <a:bodyPr wrap="square" lIns="36576" rIns="36576" tIns="18288" bIns="18288" anchor="t">
-            <a:spAutoFit/>
-          </a:bodyPr>
-          <a:lstStyle/>
-          <a:p>
-            <a:pPr algn="l">
-              <a:lnSpc>
-                <a:spcPct val="115000"/>
-              </a:lnSpc>
-            </a:pPr>
-            <a:r>
-              <a:rPr sz="900" b="1">
-                <a:solidFill>
-                  <a:srgbClr val="3FA552"/>
-                </a:solidFill>
-                <a:latin typeface="PingFang SC"/>
-              </a:rPr>
-              <a:t>贵行规范</a:t>
-            </a:r>
-          </a:p>
-        </p:txBody>
-      </p:sp>
-      <p:sp>
-        <p:nvSpPr>
-          <p:cNvPr id="49" name="TextBox 48"/>
-          <p:cNvSpPr txBox="1"/>
-          <p:nvPr/>
-        </p:nvSpPr>
-        <p:spPr>
-          <a:xfrm>
-            <a:off x="8988552" y="2532888"/>
-            <a:ext cx="2596896" cy="457200"/>
-          </a:xfrm>
-          <a:prstGeom prst="rect">
-            <a:avLst/>
-          </a:prstGeom>
-          <a:noFill/>
-        </p:spPr>
-        <p:txBody>
-          <a:bodyPr wrap="square" lIns="36576" rIns="36576" tIns="18288" bIns="18288" anchor="t">
-            <a:spAutoFit/>
-          </a:bodyPr>
-          <a:lstStyle/>
-          <a:p>
-            <a:pPr algn="l">
-              <a:lnSpc>
-                <a:spcPct val="115000"/>
-              </a:lnSpc>
-            </a:pPr>
-            <a:r>
-              <a:rPr sz="900" b="0">
-                <a:solidFill>
-                  <a:srgbClr val="61666B"/>
-                </a:solidFill>
-                <a:latin typeface="PingFang SC"/>
-              </a:rPr>
-              <a:t>全量 SQL 追踪仅在诊断窗口开启（强制）</a:t>
-            </a:r>
-          </a:p>
-        </p:txBody>
-      </p:sp>
-      <p:sp>
-        <p:nvSpPr>
-          <p:cNvPr id="50" name="TextBox 49"/>
-          <p:cNvSpPr txBox="1"/>
-          <p:nvPr/>
-        </p:nvSpPr>
-        <p:spPr>
-          <a:xfrm>
-            <a:off x="7781544" y="3081528"/>
-            <a:ext cx="1188720" cy="219456"/>
-          </a:xfrm>
-          <a:prstGeom prst="rect">
-            <a:avLst/>
-          </a:prstGeom>
-          <a:noFill/>
-        </p:spPr>
-        <p:txBody>
-          <a:bodyPr wrap="square" lIns="36576" rIns="36576" tIns="18288" bIns="18288" anchor="t">
-            <a:spAutoFit/>
-          </a:bodyPr>
-          <a:lstStyle/>
-          <a:p>
-            <a:pPr algn="l">
-              <a:lnSpc>
-                <a:spcPct val="115000"/>
-              </a:lnSpc>
-            </a:pPr>
-            <a:r>
-              <a:rPr sz="900" b="1">
-                <a:solidFill>
-                  <a:srgbClr val="8B6BE0"/>
-                </a:solidFill>
-                <a:latin typeface="PingFang SC"/>
-              </a:rPr>
-              <a:t>历史相似</a:t>
-            </a:r>
-          </a:p>
-        </p:txBody>
-      </p:sp>
-      <p:sp>
-        <p:nvSpPr>
-          <p:cNvPr id="51" name="TextBox 50"/>
-          <p:cNvSpPr txBox="1"/>
-          <p:nvPr/>
-        </p:nvSpPr>
-        <p:spPr>
-          <a:xfrm>
-            <a:off x="8988552" y="3081528"/>
-            <a:ext cx="2596896" cy="457200"/>
-          </a:xfrm>
-          <a:prstGeom prst="rect">
-            <a:avLst/>
-          </a:prstGeom>
-          <a:noFill/>
-        </p:spPr>
-        <p:txBody>
-          <a:bodyPr wrap="square" lIns="36576" rIns="36576" tIns="18288" bIns="18288" anchor="t">
-            <a:spAutoFit/>
-          </a:bodyPr>
-          <a:lstStyle/>
-          <a:p>
-            <a:pPr algn="l">
-              <a:lnSpc>
-                <a:spcPct val="115000"/>
-              </a:lnSpc>
-            </a:pPr>
-            <a:r>
-              <a:rPr sz="900" b="0">
-                <a:solidFill>
-                  <a:srgbClr val="61666B"/>
-                </a:solidFill>
-                <a:latin typeface="PingFang SC"/>
-              </a:rPr>
-              <a:t>同类问题曾降追踪级别后重建，2 小时恢复</a:t>
-            </a:r>
-          </a:p>
-        </p:txBody>
-      </p:sp>
-      <p:sp>
-        <p:nvSpPr>
-          <p:cNvPr id="52" name="TextBox 51"/>
-          <p:cNvSpPr txBox="1"/>
-          <p:nvPr/>
-        </p:nvSpPr>
-        <p:spPr>
-          <a:xfrm>
-            <a:off x="7781544" y="3630168"/>
-            <a:ext cx="1188720" cy="219456"/>
-          </a:xfrm>
-          <a:prstGeom prst="rect">
-            <a:avLst/>
-          </a:prstGeom>
-          <a:noFill/>
-        </p:spPr>
-        <p:txBody>
-          <a:bodyPr wrap="square" lIns="36576" rIns="36576" tIns="18288" bIns="18288" anchor="t">
-            <a:spAutoFit/>
-          </a:bodyPr>
-          <a:lstStyle/>
-          <a:p>
-            <a:pPr algn="l">
-              <a:lnSpc>
-                <a:spcPct val="115000"/>
-              </a:lnSpc>
-            </a:pPr>
-            <a:r>
-              <a:rPr sz="900" b="1">
-                <a:solidFill>
-                  <a:srgbClr val="4176E6"/>
-                </a:solidFill>
-                <a:latin typeface="PingFang SC"/>
-              </a:rPr>
-              <a:t>建议 · 工行口径</a:t>
-            </a:r>
-          </a:p>
-        </p:txBody>
-      </p:sp>
-      <p:sp>
-        <p:nvSpPr>
-          <p:cNvPr id="53" name="TextBox 52"/>
-          <p:cNvSpPr txBox="1"/>
-          <p:nvPr/>
-        </p:nvSpPr>
-        <p:spPr>
-          <a:xfrm>
-            <a:off x="8988552" y="3630168"/>
-            <a:ext cx="2596896" cy="457200"/>
-          </a:xfrm>
-          <a:prstGeom prst="rect">
-            <a:avLst/>
-          </a:prstGeom>
-          <a:noFill/>
-        </p:spPr>
-        <p:txBody>
-          <a:bodyPr wrap="square" lIns="36576" rIns="36576" tIns="18288" bIns="18288" anchor="t">
-            <a:spAutoFit/>
-          </a:bodyPr>
-          <a:lstStyle/>
-          <a:p>
-            <a:pPr algn="l">
-              <a:lnSpc>
-                <a:spcPct val="115000"/>
-              </a:lnSpc>
-            </a:pPr>
-            <a:r>
-              <a:rPr sz="900" b="0">
-                <a:solidFill>
-                  <a:srgbClr val="61666B"/>
-                </a:solidFill>
-                <a:latin typeface="PingFang SC"/>
-              </a:rPr>
-              <a:t>提变更单 → 23:00–06:00 窗口 → 双人复核</a:t>
-            </a:r>
-          </a:p>
-        </p:txBody>
-      </p:sp>
-      <p:sp>
-        <p:nvSpPr>
-          <p:cNvPr id="54" name="Oval 53"/>
-          <p:cNvSpPr/>
-          <p:nvPr/>
-        </p:nvSpPr>
-        <p:spPr>
-          <a:xfrm>
-            <a:off x="7726679" y="4242816"/>
-            <a:ext cx="237744" cy="237744"/>
+            <a:off x="8348471" y="1572768"/>
+            <a:ext cx="274320" cy="274320"/>
           </a:xfrm>
           <a:prstGeom prst="ellipse">
             <a:avLst/>
@@ -5489,7 +5511,7 @@
           <a:p>
             <a:pPr algn="ctr"/>
             <a:r>
-              <a:rPr sz="900" b="1">
+              <a:rPr sz="1000" b="1">
                 <a:solidFill>
                   <a:srgbClr val="FFFFFF"/>
                 </a:solidFill>
@@ -5502,14 +5524,14 @@
       </p:sp>
       <p:sp>
         <p:nvSpPr>
-          <p:cNvPr id="55" name="TextBox 54"/>
+          <p:cNvPr id="53" name="TextBox 52"/>
           <p:cNvSpPr txBox="1"/>
           <p:nvPr/>
         </p:nvSpPr>
         <p:spPr>
           <a:xfrm>
-            <a:off x="8037575" y="4215383"/>
-            <a:ext cx="3547872" cy="256032"/>
+            <a:off x="8714232" y="1536192"/>
+            <a:ext cx="2880360" cy="310896"/>
           </a:xfrm>
           <a:prstGeom prst="rect">
             <a:avLst/>
@@ -5528,36 +5550,66 @@
               </a:lnSpc>
             </a:pPr>
             <a:r>
-              <a:rPr sz="1100" b="1">
+              <a:rPr sz="1150" b="1">
                 <a:solidFill>
                   <a:srgbClr val="0F1115"/>
                 </a:solidFill>
                 <a:latin typeface="PingFang SC"/>
               </a:rPr>
-              <a:t>说工行的话</a:t>
-            </a:r>
-            <a:r>
-              <a:rPr sz="930" b="0">
+              <a:t>懂工行的规矩：能对账，不只是能搜</a:t>
+            </a:r>
+          </a:p>
+        </p:txBody>
+      </p:sp>
+      <p:sp>
+        <p:nvSpPr>
+          <p:cNvPr id="54" name="TextBox 53"/>
+          <p:cNvSpPr txBox="1"/>
+          <p:nvPr/>
+        </p:nvSpPr>
+        <p:spPr>
+          <a:xfrm>
+            <a:off x="8714232" y="1828800"/>
+            <a:ext cx="2880360" cy="1051560"/>
+          </a:xfrm>
+          <a:prstGeom prst="rect">
+            <a:avLst/>
+          </a:prstGeom>
+          <a:noFill/>
+        </p:spPr>
+        <p:txBody>
+          <a:bodyPr wrap="square" lIns="36576" rIns="36576" tIns="18288" bIns="18288" anchor="t">
+            <a:spAutoFit/>
+          </a:bodyPr>
+          <a:lstStyle/>
+          <a:p>
+            <a:pPr algn="l">
+              <a:lnSpc>
+                <a:spcPct val="118000"/>
+              </a:lnSpc>
+            </a:pPr>
+            <a:r>
+              <a:rPr sz="919" b="0">
                 <a:solidFill>
                   <a:srgbClr val="61666B"/>
                 </a:solidFill>
                 <a:latin typeface="PingFang SC"/>
               </a:rPr>
-              <a:t>   用贵行的术语与流程给建议，不给通用套话</a:t>
-            </a:r>
-          </a:p>
-        </p:txBody>
-      </p:sp>
-      <p:sp>
-        <p:nvSpPr>
-          <p:cNvPr id="56" name="Oval 55"/>
+              <a:t>规范变成条款卡后，与平台内置的确定性规则逐条比对：贵行有要求、平台在判但阈值不同 → 差异清单；贵行有要求、平台没规则 → 能力缺口；平台在判、贵行没写 → 建议补进规范。知识库因此从"资料检索"变成"按工行口径工作"。</a:t>
+            </a:r>
+          </a:p>
+        </p:txBody>
+      </p:sp>
+      <p:sp>
+        <p:nvSpPr>
+          <p:cNvPr id="55" name="Oval 54"/>
           <p:cNvSpPr/>
           <p:nvPr/>
         </p:nvSpPr>
         <p:spPr>
           <a:xfrm>
-            <a:off x="7726679" y="4663440"/>
-            <a:ext cx="237744" cy="237744"/>
+            <a:off x="8348471" y="2889503"/>
+            <a:ext cx="274320" cy="274320"/>
           </a:xfrm>
           <a:prstGeom prst="ellipse">
             <a:avLst/>
@@ -5590,7 +5642,7 @@
           <a:p>
             <a:pPr algn="ctr"/>
             <a:r>
-              <a:rPr sz="900" b="1">
+              <a:rPr sz="1000" b="1">
                 <a:solidFill>
                   <a:srgbClr val="FFFFFF"/>
                 </a:solidFill>
@@ -5603,14 +5655,14 @@
       </p:sp>
       <p:sp>
         <p:nvSpPr>
-          <p:cNvPr id="57" name="TextBox 56"/>
+          <p:cNvPr id="56" name="TextBox 55"/>
           <p:cNvSpPr txBox="1"/>
           <p:nvPr/>
         </p:nvSpPr>
         <p:spPr>
           <a:xfrm>
-            <a:off x="8037575" y="4636007"/>
-            <a:ext cx="3547872" cy="256032"/>
+            <a:off x="8714232" y="2852927"/>
+            <a:ext cx="2880360" cy="310896"/>
           </a:xfrm>
           <a:prstGeom prst="rect">
             <a:avLst/>
@@ -5629,22 +5681,52 @@
               </a:lnSpc>
             </a:pPr>
             <a:r>
-              <a:rPr sz="1100" b="1">
+              <a:rPr sz="1150" b="1">
                 <a:solidFill>
                   <a:srgbClr val="0F1115"/>
                 </a:solidFill>
                 <a:latin typeface="PingFang SC"/>
               </a:rPr>
-              <a:t>每条有出处</a:t>
-            </a:r>
-            <a:r>
-              <a:rPr sz="930" b="0">
+              <a:t>懂工行的处置习惯：给的是贵行的做法</a:t>
+            </a:r>
+          </a:p>
+        </p:txBody>
+      </p:sp>
+      <p:sp>
+        <p:nvSpPr>
+          <p:cNvPr id="57" name="TextBox 56"/>
+          <p:cNvSpPr txBox="1"/>
+          <p:nvPr/>
+        </p:nvSpPr>
+        <p:spPr>
+          <a:xfrm>
+            <a:off x="8714232" y="3145535"/>
+            <a:ext cx="2880360" cy="1051560"/>
+          </a:xfrm>
+          <a:prstGeom prst="rect">
+            <a:avLst/>
+          </a:prstGeom>
+          <a:noFill/>
+        </p:spPr>
+        <p:txBody>
+          <a:bodyPr wrap="square" lIns="36576" rIns="36576" tIns="18288" bIns="18288" anchor="t">
+            <a:spAutoFit/>
+          </a:bodyPr>
+          <a:lstStyle/>
+          <a:p>
+            <a:pPr algn="l">
+              <a:lnSpc>
+                <a:spcPct val="118000"/>
+              </a:lnSpc>
+            </a:pPr>
+            <a:r>
+              <a:rPr sz="919" b="0">
                 <a:solidFill>
                   <a:srgbClr val="61666B"/>
                 </a:solidFill>
                 <a:latin typeface="PingFang SC"/>
               </a:rPr>
-              <a:t>   引用可追到哪一版哪一条；查不到就写"无对应规范"</a:t>
+              <a:t>上千条工单与上百份故障总结沉淀成处置卡 / 案例卡，遇到相似问题直接给贵行历史上的处置路径与耗时；建议按贵行流程表述——提变更单、低峰窗口、双人复核，而不是通用套话。</a:t>
             </a:r>
           </a:p>
         </p:txBody>
@@ -5657,8 +5739,8 @@
         </p:nvSpPr>
         <p:spPr>
           <a:xfrm>
-            <a:off x="7726679" y="5084064"/>
-            <a:ext cx="237744" cy="237744"/>
+            <a:off x="8348471" y="4206240"/>
+            <a:ext cx="274320" cy="274320"/>
           </a:xfrm>
           <a:prstGeom prst="ellipse">
             <a:avLst/>
@@ -5691,7 +5773,7 @@
           <a:p>
             <a:pPr algn="ctr"/>
             <a:r>
-              <a:rPr sz="900" b="1">
+              <a:rPr sz="1000" b="1">
                 <a:solidFill>
                   <a:srgbClr val="FFFFFF"/>
                 </a:solidFill>
@@ -5710,8 +5792,8 @@
         </p:nvSpPr>
         <p:spPr>
           <a:xfrm>
-            <a:off x="8037575" y="5056631"/>
-            <a:ext cx="3547872" cy="256032"/>
+            <a:off x="8714232" y="4169664"/>
+            <a:ext cx="2880360" cy="310896"/>
           </a:xfrm>
           <a:prstGeom prst="rect">
             <a:avLst/>
@@ -5730,72 +5812,119 @@
               </a:lnSpc>
             </a:pPr>
             <a:r>
-              <a:rPr sz="1100" b="1">
+              <a:rPr sz="1150" b="1">
                 <a:solidFill>
                   <a:srgbClr val="0F1115"/>
                 </a:solidFill>
                 <a:latin typeface="PingFang SC"/>
               </a:rPr>
-              <a:t>口径按工行</a:t>
-            </a:r>
-            <a:r>
-              <a:rPr sz="930" b="0">
+              <a:t>两套经验双轮驱动</a:t>
+            </a:r>
+          </a:p>
+        </p:txBody>
+      </p:sp>
+      <p:sp>
+        <p:nvSpPr>
+          <p:cNvPr id="60" name="TextBox 59"/>
+          <p:cNvSpPr txBox="1"/>
+          <p:nvPr/>
+        </p:nvSpPr>
+        <p:spPr>
+          <a:xfrm>
+            <a:off x="8714232" y="4462272"/>
+            <a:ext cx="2880360" cy="1051560"/>
+          </a:xfrm>
+          <a:prstGeom prst="rect">
+            <a:avLst/>
+          </a:prstGeom>
+          <a:noFill/>
+        </p:spPr>
+        <p:txBody>
+          <a:bodyPr wrap="square" lIns="36576" rIns="36576" tIns="18288" bIns="18288" anchor="t">
+            <a:spAutoFit/>
+          </a:bodyPr>
+          <a:lstStyle/>
+          <a:p>
+            <a:pPr algn="l">
+              <a:lnSpc>
+                <a:spcPct val="118000"/>
+              </a:lnSpc>
+            </a:pPr>
+            <a:r>
+              <a:rPr sz="919" b="0">
                 <a:solidFill>
                   <a:srgbClr val="61666B"/>
                 </a:solidFill>
                 <a:latin typeface="PingFang SC"/>
               </a:rPr>
-              <a:t>   客户标准与平台默认不一致 → 差异清单，人确认后生效</a:t>
-            </a:r>
-          </a:p>
-        </p:txBody>
-      </p:sp>
-      <p:cxnSp>
-        <p:nvCxnSpPr>
-          <p:cNvPr id="60" name="Connector 59"/>
-          <p:cNvCxnSpPr/>
+              <a:t>知识 = 工行多年沉淀的规范与案例；记忆 = 平台在这套 GaussDB 环境里做过什么、上次结论是什么。两者同库同源、互为佐证——既懂贵行的规矩，也记得这套库的脾气。</a:t>
+            </a:r>
+          </a:p>
+        </p:txBody>
+      </p:sp>
+      <p:sp>
+        <p:nvSpPr>
+          <p:cNvPr id="61" name="Oval 60"/>
+          <p:cNvSpPr/>
           <p:nvPr/>
-        </p:nvCxnSpPr>
-        <p:spPr>
-          <a:xfrm>
-            <a:off x="7315200" y="4745736"/>
-            <a:ext cx="228600" cy="0"/>
-          </a:xfrm>
-          <a:prstGeom prst="line">
+        </p:nvSpPr>
+        <p:spPr>
+          <a:xfrm>
+            <a:off x="8348471" y="5522975"/>
+            <a:ext cx="274320" cy="274320"/>
+          </a:xfrm>
+          <a:prstGeom prst="ellipse">
             <a:avLst/>
           </a:prstGeom>
-          <a:ln w="19050">
-            <a:solidFill>
-              <a:srgbClr val="4176E6"/>
-            </a:solidFill>
-            <a:tailEnd type="triangle" w="med" len="med"/>
+          <a:solidFill>
+            <a:srgbClr val="4176E6"/>
+          </a:solidFill>
+          <a:ln>
+            <a:noFill/>
           </a:ln>
+          <a:effectLst/>
         </p:spPr>
         <p:style>
-          <a:lnRef idx="2">
+          <a:lnRef idx="1">
             <a:schemeClr val="accent1"/>
           </a:lnRef>
-          <a:fillRef idx="0">
+          <a:fillRef idx="3">
             <a:schemeClr val="accent1"/>
           </a:fillRef>
-          <a:effectRef idx="1">
+          <a:effectRef idx="2">
             <a:schemeClr val="accent1"/>
           </a:effectRef>
           <a:fontRef idx="minor">
-            <a:schemeClr val="tx1"/>
+            <a:schemeClr val="lt1"/>
           </a:fontRef>
         </p:style>
-      </p:cxnSp>
-      <p:sp>
-        <p:nvSpPr>
-          <p:cNvPr id="61" name="TextBox 60"/>
+        <p:txBody>
+          <a:bodyPr rtlCol="0" anchor="ctr" lIns="0" rIns="0" tIns="0" bIns="0"/>
+          <a:lstStyle/>
+          <a:p>
+            <a:pPr algn="ctr"/>
+            <a:r>
+              <a:rPr sz="1000" b="1">
+                <a:solidFill>
+                  <a:srgbClr val="FFFFFF"/>
+                </a:solidFill>
+                <a:latin typeface="PingFang SC"/>
+              </a:rPr>
+              <a:t>4</a:t>
+            </a:r>
+          </a:p>
+        </p:txBody>
+      </p:sp>
+      <p:sp>
+        <p:nvSpPr>
+          <p:cNvPr id="62" name="TextBox 61"/>
           <p:cNvSpPr txBox="1"/>
           <p:nvPr/>
         </p:nvSpPr>
         <p:spPr>
           <a:xfrm>
-            <a:off x="457200" y="6053328"/>
-            <a:ext cx="7498079" cy="164592"/>
+            <a:off x="8714232" y="5486400"/>
+            <a:ext cx="2880360" cy="310896"/>
           </a:xfrm>
           <a:prstGeom prst="rect">
             <a:avLst/>
@@ -5814,26 +5943,104 @@
               </a:lnSpc>
             </a:pPr>
             <a:r>
-              <a:rPr sz="750" b="0">
-                <a:solidFill>
-                  <a:srgbClr val="81858C"/>
-                </a:solidFill>
-                <a:latin typeface="PingFang SC"/>
-              </a:rPr>
-              <a:t>图例：实线 = 主流程；框间双向箭头 = 存储层之间的同步与回表；三类存储只写类型，不绑定具体产品</a:t>
-            </a:r>
-          </a:p>
-        </p:txBody>
-      </p:sp>
-      <p:sp>
-        <p:nvSpPr>
-          <p:cNvPr id="62" name="TextBox 61"/>
+              <a:rPr sz="1150" b="1">
+                <a:solidFill>
+                  <a:srgbClr val="0F1115"/>
+                </a:solidFill>
+                <a:latin typeface="PingFang SC"/>
+              </a:rPr>
+              <a:t>越用越懂：缺口驱动地长大</a:t>
+            </a:r>
+          </a:p>
+        </p:txBody>
+      </p:sp>
+      <p:sp>
+        <p:nvSpPr>
+          <p:cNvPr id="63" name="TextBox 62"/>
           <p:cNvSpPr txBox="1"/>
           <p:nvPr/>
         </p:nvSpPr>
         <p:spPr>
           <a:xfrm>
-            <a:off x="8229600" y="6053328"/>
+            <a:off x="8714232" y="5779007"/>
+            <a:ext cx="2880360" cy="1051560"/>
+          </a:xfrm>
+          <a:prstGeom prst="rect">
+            <a:avLst/>
+          </a:prstGeom>
+          <a:noFill/>
+        </p:spPr>
+        <p:txBody>
+          <a:bodyPr wrap="square" lIns="36576" rIns="36576" tIns="18288" bIns="18288" anchor="t">
+            <a:spAutoFit/>
+          </a:bodyPr>
+          <a:lstStyle/>
+          <a:p>
+            <a:pPr algn="l">
+              <a:lnSpc>
+                <a:spcPct val="118000"/>
+              </a:lnSpc>
+            </a:pPr>
+            <a:r>
+              <a:rPr sz="919" b="0">
+                <a:solidFill>
+                  <a:srgbClr val="61666B"/>
+                </a:solidFill>
+                <a:latin typeface="PingFang SC"/>
+              </a:rPr>
+              <a:t>报告里"无对应规范"的发现自动排队，提示补哪类资料；DBA 对每条引用点"有用 / 无关"回写排序权重。冷启动只需先灌最核心的几十篇，而不是一次性倒进所有历史文档。</a:t>
+            </a:r>
+          </a:p>
+        </p:txBody>
+      </p:sp>
+      <p:sp>
+        <p:nvSpPr>
+          <p:cNvPr id="64" name="TextBox 63"/>
+          <p:cNvSpPr txBox="1"/>
+          <p:nvPr/>
+        </p:nvSpPr>
+        <p:spPr>
+          <a:xfrm>
+            <a:off x="457200" y="6693408"/>
+            <a:ext cx="7498079" cy="164592"/>
+          </a:xfrm>
+          <a:prstGeom prst="rect">
+            <a:avLst/>
+          </a:prstGeom>
+          <a:noFill/>
+        </p:spPr>
+        <p:txBody>
+          <a:bodyPr wrap="square" lIns="36576" rIns="36576" tIns="18288" bIns="18288" anchor="t">
+            <a:spAutoFit/>
+          </a:bodyPr>
+          <a:lstStyle/>
+          <a:p>
+            <a:pPr algn="l">
+              <a:lnSpc>
+                <a:spcPct val="115000"/>
+              </a:lnSpc>
+            </a:pPr>
+            <a:r>
+              <a:rPr sz="750" b="0">
+                <a:solidFill>
+                  <a:srgbClr val="81858C"/>
+                </a:solidFill>
+                <a:latin typeface="PingFang SC"/>
+              </a:rPr>
+              <a:t>图例：实线箭头 = 主流程；框间双向箭头 = 存储层之间的同步与回表；三类存储只写类型，不绑定具体产品</a:t>
+            </a:r>
+          </a:p>
+        </p:txBody>
+      </p:sp>
+      <p:sp>
+        <p:nvSpPr>
+          <p:cNvPr id="65" name="TextBox 64"/>
+          <p:cNvSpPr txBox="1"/>
+          <p:nvPr/>
+        </p:nvSpPr>
+        <p:spPr>
+          <a:xfrm>
+            <a:off x="8229600" y="6693408"/>
             <a:ext cx="3566160" cy="164592"/>
           </a:xfrm>
           <a:prstGeom prst="rect">
